--- a/docs/교재/실전반_오프라인/06회차/실전반_오프라인_06회차.pptx
+++ b/docs/교재/실전반_오프라인/06회차/실전반_오프라인_06회차.pptx
@@ -1823,7 +1823,7 @@
           <a:lstStyle/>
           <a:p>
             <a:r>
-              <a:t>둘째 실습에서는 기존 요청 에이전트를 다시 씁니다. 부품 수량이나 긴급 사유나 승인권자가 빠진 요청을 주었을 때, 에이전트가 그 값을 짐작해 확정하지 않고 확인 질문을 내도록 고칩니다. 추가 입력을 받으면 같은 요청을 다시 판단하고, 질문 전과 답변 후의 상태를 기록으로 남깁니다. 온톨로지와 SOP는 이미 있는 것을 그대로 씁니다.</a:t>
+              <a:t>둘째 실습에서는 정비 요청을 처리하는 에이전트를 고칩니다. 부품 수량이나 긴급 사유나 승인권자가 빠진 요청을 주었을 때, 에이전트가 그 값을 짐작해 확정하지 않고 확인 질문을 내도록 고칩니다. 추가 입력을 받으면 같은 요청을 다시 판단하고, 질문 전과 답변 후의 상태를 기록으로 남깁니다. 온톨로지와 SOP는 이미 있는 것을 그대로 씁니다.</a:t>
             </a:r>
           </a:p>
         </p:txBody>
@@ -3573,7 +3573,7 @@
           <a:lstStyle/>
           <a:p>
             <a:r>
-              <a:t>뜻은 앞에서 풀었으므로 여기서는 이름과 자리만 확인합니다. 이 여섯과 함께 승인 역할, 에이전트의 질문, 금지 조건, 시나리오가 오늘의 용어입니다. 하나를 골라 자료를 덮고 자신의 문장으로 써 보시기 바랍니다.</a:t>
+              <a:t>뜻은 앞에서 풀었으므로 여기서는 이름과 자리만 확인합니다. 이 일곱과 함께 승인 역할, 에이전트의 질문, 금지 조건, 시나리오가 오늘의 용어입니다. 하나를 골라 자료를 덮고 자신의 문장으로 써 보시기 바랍니다.</a:t>
             </a:r>
           </a:p>
         </p:txBody>
@@ -10299,7 +10299,7 @@
       </p:sp>
       <p:pic>
         <p:nvPicPr>
-          <p:cNvPr id="6" name="삽화:두관문.svg" descr="illust_5811566909800487355_1791736073.png"/>
+          <p:cNvPr id="6" name="삽화:두관문.svg" descr="illust_7588262989240790817_1791736073.png"/>
           <p:cNvPicPr>
             <a:picLocks noChangeAspect="1"/>
           </p:cNvPicPr>
@@ -11670,7 +11670,7 @@
       </p:sp>
       <p:pic>
         <p:nvPicPr>
-          <p:cNvPr id="6" name="삽화:세해석.svg" descr="illust_6824632224936741654_1791736073.png"/>
+          <p:cNvPr id="6" name="삽화:세해석.svg" descr="illust_8128149962712771213_1791736073.png"/>
           <p:cNvPicPr>
             <a:picLocks noChangeAspect="1"/>
           </p:cNvPicPr>
@@ -12831,7 +12831,7 @@
       </p:sp>
       <p:pic>
         <p:nvPicPr>
-          <p:cNvPr id="6" name="삽화:명세문서.svg" descr="illust_485771025529714641_1791736073.png"/>
+          <p:cNvPr id="6" name="삽화:명세문서.svg" descr="illust_696621957975213819_1791736073.png"/>
           <p:cNvPicPr>
             <a:picLocks noChangeAspect="1"/>
           </p:cNvPicPr>
@@ -13342,7 +13342,7 @@
       </p:sp>
       <p:pic>
         <p:nvPicPr>
-          <p:cNvPr id="6" name="삽화:계약.svg" descr="illust_6135915277294247261_1791736073.png"/>
+          <p:cNvPr id="6" name="삽화:계약.svg" descr="illust_5122341806176466526_1791736073.png"/>
           <p:cNvPicPr>
             <a:picLocks noChangeAspect="1"/>
           </p:cNvPicPr>
@@ -18607,7 +18607,7 @@
       </p:sp>
       <p:pic>
         <p:nvPicPr>
-          <p:cNvPr id="6" name="삽화:명세와실행.svg" descr="illust_7079774206441769770_1791743471.png"/>
+          <p:cNvPr id="6" name="삽화:명세와실행.svg" descr="illust_5037534855377508603_1791743471.png"/>
           <p:cNvPicPr>
             <a:picLocks noChangeAspect="1"/>
           </p:cNvPicPr>
@@ -19778,7 +19778,7 @@
       </p:sp>
       <p:pic>
         <p:nvPicPr>
-          <p:cNvPr id="6" name="삽화:세부분.svg" descr="illust_2537175994119302219_1791743471.png"/>
+          <p:cNvPr id="6" name="삽화:세부분.svg" descr="illust_6128900808637055573_1791743471.png"/>
           <p:cNvPicPr>
             <a:picLocks noChangeAspect="1"/>
           </p:cNvPicPr>
@@ -22384,7 +22384,7 @@
       </p:sp>
       <p:pic>
         <p:nvPicPr>
-          <p:cNvPr id="6" name="삽화:회귀.svg" descr="illust_2025613651449580966_1791743471.png"/>
+          <p:cNvPr id="6" name="삽화:회귀.svg" descr="illust_4875533925239624276_1791743471.png"/>
           <p:cNvPicPr>
             <a:picLocks noChangeAspect="1"/>
           </p:cNvPicPr>
@@ -25213,7 +25213,7 @@
                 <a:ea typeface="맑은 고딕"/>
                 <a:cs typeface="맑은 고딕"/>
               </a:rPr>
-              <a:t>기존 요청 에이전트가 빠진 정보를 확정하지 않고 확인 질문을 내도록 고친다</a:t>
+              <a:t>정비 요청을 처리하는 에이전트가 빠진 정보를 확정하지 않고 확인 질문을 내도록 고친다</a:t>
             </a:r>
           </a:p>
         </p:txBody>
@@ -29014,7 +29014,7 @@
       </p:sp>
       <p:pic>
         <p:nvPicPr>
-          <p:cNvPr id="6" name="삽화:더해진것.svg" descr="illust_2531225160783764582_1791743471.png"/>
+          <p:cNvPr id="6" name="삽화:더해진것.svg" descr="illust_6865235133747865530_1791743471.png"/>
           <p:cNvPicPr>
             <a:picLocks noChangeAspect="1"/>
           </p:cNvPicPr>
@@ -31008,7 +31008,7 @@
       </p:sp>
       <p:pic>
         <p:nvPicPr>
-          <p:cNvPr id="6" name="삽화:사건위장치.svg" descr="illust_5714762896589184998_1791743471.png"/>
+          <p:cNvPr id="6" name="삽화:사건위장치.svg" descr="illust_2393677024522452563_1791743471.png"/>
           <p:cNvPicPr>
             <a:picLocks noChangeAspect="1"/>
           </p:cNvPicPr>
@@ -41179,7 +41179,7 @@
       </p:sp>
       <p:pic>
         <p:nvPicPr>
-          <p:cNvPr id="6" name="삽화:갈림.svg" descr="illust_6035758424324636795_1791736073.png"/>
+          <p:cNvPr id="6" name="삽화:갈림.svg" descr="illust_6401623513390373159_1791736073.png"/>
           <p:cNvPicPr>
             <a:picLocks noChangeAspect="1"/>
           </p:cNvPicPr>
@@ -46576,7 +46576,7 @@
       </p:sp>
       <p:pic>
         <p:nvPicPr>
-          <p:cNvPr id="6" name="삽화:남은일_추천뒤.svg" descr="illust_6126262426737901892_1791735769.png"/>
+          <p:cNvPr id="6" name="삽화:남은일_추천뒤.svg" descr="illust_2463733771193095324_1791735769.png"/>
           <p:cNvPicPr>
             <a:picLocks noChangeAspect="1"/>
           </p:cNvPicPr>
@@ -48290,7 +48290,7 @@
         <p:spPr>
           <a:xfrm>
             <a:off x="548640" y="2061972"/>
-            <a:ext cx="11094415" cy="656843"/>
+            <a:ext cx="11094415" cy="553865"/>
           </a:xfrm>
           <a:prstGeom prst="roundRect">
             <a:avLst>
@@ -48321,7 +48321,7 @@
         <p:spPr>
           <a:xfrm>
             <a:off x="685800" y="2029968"/>
-            <a:ext cx="2514600" cy="720851"/>
+            <a:ext cx="2514600" cy="617873"/>
           </a:xfrm>
           <a:prstGeom prst="rect">
             <a:avLst/>
@@ -48346,7 +48346,7 @@
                 <a:ea typeface="맑은 고딕"/>
                 <a:cs typeface="맑은 고딕"/>
               </a:rPr>
-              <a:t>가드레일</a:t>
+              <a:t>HITL</a:t>
             </a:r>
           </a:p>
         </p:txBody>
@@ -48360,7 +48360,7 @@
         <p:spPr>
           <a:xfrm>
             <a:off x="3200400" y="2029968"/>
-            <a:ext cx="6156655" cy="720851"/>
+            <a:ext cx="6156655" cy="617873"/>
           </a:xfrm>
           <a:prstGeom prst="rect">
             <a:avLst/>
@@ -48385,7 +48385,7 @@
                 <a:ea typeface="맑은 고딕"/>
                 <a:cs typeface="맑은 고딕"/>
               </a:rPr>
-              <a:t>Guardrail</a:t>
+              <a:t>Human-in-the-Loop</a:t>
             </a:r>
           </a:p>
         </p:txBody>
@@ -48399,7 +48399,7 @@
         <p:spPr>
           <a:xfrm>
             <a:off x="9448495" y="2029968"/>
-            <a:ext cx="2103120" cy="720851"/>
+            <a:ext cx="2103120" cy="617873"/>
           </a:xfrm>
           <a:prstGeom prst="rect">
             <a:avLst/>
@@ -48424,7 +48424,7 @@
                 <a:ea typeface="맑은 고딕"/>
                 <a:cs typeface="맑은 고딕"/>
               </a:rPr>
-              <a:t>추천안이 승인 대기로 가기 전의 자동 검사</a:t>
+              <a:t>추천안에 대한 운전원의 승인과 거절</a:t>
             </a:r>
           </a:p>
         </p:txBody>
@@ -48437,8 +48437,8 @@
         </p:nvSpPr>
         <p:spPr>
           <a:xfrm>
-            <a:off x="548640" y="2782824"/>
-            <a:ext cx="11094415" cy="656843"/>
+            <a:off x="548640" y="2679845"/>
+            <a:ext cx="11094415" cy="553865"/>
           </a:xfrm>
           <a:prstGeom prst="roundRect">
             <a:avLst>
@@ -48468,8 +48468,8 @@
         </p:nvSpPr>
         <p:spPr>
           <a:xfrm>
-            <a:off x="685800" y="2750820"/>
-            <a:ext cx="2514600" cy="720851"/>
+            <a:off x="685800" y="2647841"/>
+            <a:ext cx="2514600" cy="617873"/>
           </a:xfrm>
           <a:prstGeom prst="rect">
             <a:avLst/>
@@ -48494,7 +48494,7 @@
                 <a:ea typeface="맑은 고딕"/>
                 <a:cs typeface="맑은 고딕"/>
               </a:rPr>
-              <a:t>SDD</a:t>
+              <a:t>가드레일</a:t>
             </a:r>
           </a:p>
         </p:txBody>
@@ -48507,8 +48507,8 @@
         </p:nvSpPr>
         <p:spPr>
           <a:xfrm>
-            <a:off x="3200400" y="2750820"/>
-            <a:ext cx="6156655" cy="720851"/>
+            <a:off x="3200400" y="2647841"/>
+            <a:ext cx="6156655" cy="617873"/>
           </a:xfrm>
           <a:prstGeom prst="rect">
             <a:avLst/>
@@ -48533,7 +48533,7 @@
                 <a:ea typeface="맑은 고딕"/>
                 <a:cs typeface="맑은 고딕"/>
               </a:rPr>
-              <a:t>Spec-Driven Development</a:t>
+              <a:t>Guardrail</a:t>
             </a:r>
           </a:p>
         </p:txBody>
@@ -48546,8 +48546,8 @@
         </p:nvSpPr>
         <p:spPr>
           <a:xfrm>
-            <a:off x="9448495" y="2750820"/>
-            <a:ext cx="2103120" cy="720851"/>
+            <a:off x="9448495" y="2647841"/>
+            <a:ext cx="2103120" cy="617873"/>
           </a:xfrm>
           <a:prstGeom prst="rect">
             <a:avLst/>
@@ -48572,7 +48572,7 @@
                 <a:ea typeface="맑은 고딕"/>
                 <a:cs typeface="맑은 고딕"/>
               </a:rPr>
-              <a:t>변경 전에 먼저 고치는 명세</a:t>
+              <a:t>추천안이 승인 대기로 가기 전의 자동 검사</a:t>
             </a:r>
           </a:p>
         </p:txBody>
@@ -48585,8 +48585,8 @@
         </p:nvSpPr>
         <p:spPr>
           <a:xfrm>
-            <a:off x="548640" y="3503676"/>
-            <a:ext cx="11094415" cy="656843"/>
+            <a:off x="548640" y="3297718"/>
+            <a:ext cx="11094415" cy="553865"/>
           </a:xfrm>
           <a:prstGeom prst="roundRect">
             <a:avLst>
@@ -48616,8 +48616,8 @@
         </p:nvSpPr>
         <p:spPr>
           <a:xfrm>
-            <a:off x="685800" y="3471672"/>
-            <a:ext cx="2514600" cy="720851"/>
+            <a:off x="685800" y="3265714"/>
+            <a:ext cx="2514600" cy="617873"/>
           </a:xfrm>
           <a:prstGeom prst="rect">
             <a:avLst/>
@@ -48642,7 +48642,7 @@
                 <a:ea typeface="맑은 고딕"/>
                 <a:cs typeface="맑은 고딕"/>
               </a:rPr>
-              <a:t>계약</a:t>
+              <a:t>SDD</a:t>
             </a:r>
           </a:p>
         </p:txBody>
@@ -48655,8 +48655,8 @@
         </p:nvSpPr>
         <p:spPr>
           <a:xfrm>
-            <a:off x="3200400" y="3471672"/>
-            <a:ext cx="6156655" cy="720851"/>
+            <a:off x="3200400" y="3265714"/>
+            <a:ext cx="6156655" cy="617873"/>
           </a:xfrm>
           <a:prstGeom prst="rect">
             <a:avLst/>
@@ -48681,7 +48681,7 @@
                 <a:ea typeface="맑은 고딕"/>
                 <a:cs typeface="맑은 고딕"/>
               </a:rPr>
-              <a:t>Contract</a:t>
+              <a:t>Spec-Driven Development</a:t>
             </a:r>
           </a:p>
         </p:txBody>
@@ -48694,8 +48694,8 @@
         </p:nvSpPr>
         <p:spPr>
           <a:xfrm>
-            <a:off x="9448495" y="3471672"/>
-            <a:ext cx="2103120" cy="720851"/>
+            <a:off x="9448495" y="3265714"/>
+            <a:ext cx="2103120" cy="617873"/>
           </a:xfrm>
           <a:prstGeom prst="rect">
             <a:avLst/>
@@ -48720,7 +48720,7 @@
                 <a:ea typeface="맑은 고딕"/>
                 <a:cs typeface="맑은 고딕"/>
               </a:rPr>
-              <a:t>받는 입력과 내는 출력의 항목과 형식</a:t>
+              <a:t>변경 전에 먼저 고치는 명세</a:t>
             </a:r>
           </a:p>
         </p:txBody>
@@ -48733,8 +48733,8 @@
         </p:nvSpPr>
         <p:spPr>
           <a:xfrm>
-            <a:off x="548640" y="4224528"/>
-            <a:ext cx="11094415" cy="656843"/>
+            <a:off x="548640" y="3915591"/>
+            <a:ext cx="11094415" cy="553865"/>
           </a:xfrm>
           <a:prstGeom prst="roundRect">
             <a:avLst>
@@ -48764,8 +48764,8 @@
         </p:nvSpPr>
         <p:spPr>
           <a:xfrm>
-            <a:off x="685800" y="4192524"/>
-            <a:ext cx="2514600" cy="720851"/>
+            <a:off x="685800" y="3883587"/>
+            <a:ext cx="2514600" cy="617873"/>
           </a:xfrm>
           <a:prstGeom prst="rect">
             <a:avLst/>
@@ -48790,7 +48790,7 @@
                 <a:ea typeface="맑은 고딕"/>
                 <a:cs typeface="맑은 고딕"/>
               </a:rPr>
-              <a:t>수용 기준</a:t>
+              <a:t>계약</a:t>
             </a:r>
           </a:p>
         </p:txBody>
@@ -48803,8 +48803,8 @@
         </p:nvSpPr>
         <p:spPr>
           <a:xfrm>
-            <a:off x="3200400" y="4192524"/>
-            <a:ext cx="6156655" cy="720851"/>
+            <a:off x="3200400" y="3883587"/>
+            <a:ext cx="6156655" cy="617873"/>
           </a:xfrm>
           <a:prstGeom prst="rect">
             <a:avLst/>
@@ -48829,7 +48829,7 @@
                 <a:ea typeface="맑은 고딕"/>
                 <a:cs typeface="맑은 고딕"/>
               </a:rPr>
-              <a:t>Acceptance Criteria</a:t>
+              <a:t>Contract</a:t>
             </a:r>
           </a:p>
         </p:txBody>
@@ -48842,8 +48842,8 @@
         </p:nvSpPr>
         <p:spPr>
           <a:xfrm>
-            <a:off x="9448495" y="4192524"/>
-            <a:ext cx="2103120" cy="720851"/>
+            <a:off x="9448495" y="3883587"/>
+            <a:ext cx="2103120" cy="617873"/>
           </a:xfrm>
           <a:prstGeom prst="rect">
             <a:avLst/>
@@ -48868,7 +48868,7 @@
                 <a:ea typeface="맑은 고딕"/>
                 <a:cs typeface="맑은 고딕"/>
               </a:rPr>
-              <a:t>거절하면 설비 명령이 0건이다</a:t>
+              <a:t>받는 입력과 내는 출력의 항목과 형식</a:t>
             </a:r>
           </a:p>
         </p:txBody>
@@ -48881,8 +48881,8 @@
         </p:nvSpPr>
         <p:spPr>
           <a:xfrm>
-            <a:off x="548640" y="4945380"/>
-            <a:ext cx="11094415" cy="656843"/>
+            <a:off x="548640" y="4533464"/>
+            <a:ext cx="11094415" cy="553865"/>
           </a:xfrm>
           <a:prstGeom prst="roundRect">
             <a:avLst>
@@ -48912,8 +48912,8 @@
         </p:nvSpPr>
         <p:spPr>
           <a:xfrm>
-            <a:off x="685800" y="4913376"/>
-            <a:ext cx="2514600" cy="720851"/>
+            <a:off x="685800" y="4501460"/>
+            <a:ext cx="2514600" cy="617873"/>
           </a:xfrm>
           <a:prstGeom prst="rect">
             <a:avLst/>
@@ -48938,7 +48938,7 @@
                 <a:ea typeface="맑은 고딕"/>
                 <a:cs typeface="맑은 고딕"/>
               </a:rPr>
-              <a:t>BDD</a:t>
+              <a:t>수용 기준</a:t>
             </a:r>
           </a:p>
         </p:txBody>
@@ -48951,8 +48951,8 @@
         </p:nvSpPr>
         <p:spPr>
           <a:xfrm>
-            <a:off x="3200400" y="4913376"/>
-            <a:ext cx="6156655" cy="720851"/>
+            <a:off x="3200400" y="4501460"/>
+            <a:ext cx="6156655" cy="617873"/>
           </a:xfrm>
           <a:prstGeom prst="rect">
             <a:avLst/>
@@ -48977,7 +48977,7 @@
                 <a:ea typeface="맑은 고딕"/>
                 <a:cs typeface="맑은 고딕"/>
               </a:rPr>
-              <a:t>Behavior-Driven Development</a:t>
+              <a:t>Acceptance Criteria</a:t>
             </a:r>
           </a:p>
         </p:txBody>
@@ -48990,8 +48990,8 @@
         </p:nvSpPr>
         <p:spPr>
           <a:xfrm>
-            <a:off x="9448495" y="4913376"/>
-            <a:ext cx="2103120" cy="720851"/>
+            <a:off x="9448495" y="4501460"/>
+            <a:ext cx="2103120" cy="617873"/>
           </a:xfrm>
           <a:prstGeom prst="rect">
             <a:avLst/>
@@ -49016,7 +49016,7 @@
                 <a:ea typeface="맑은 고딕"/>
                 <a:cs typeface="맑은 고딕"/>
               </a:rPr>
-              <a:t>시나리오로 행동 확인</a:t>
+              <a:t>거절하면 설비 명령이 0건이다</a:t>
             </a:r>
           </a:p>
         </p:txBody>
@@ -49029,8 +49029,8 @@
         </p:nvSpPr>
         <p:spPr>
           <a:xfrm>
-            <a:off x="548640" y="5666232"/>
-            <a:ext cx="11094415" cy="656843"/>
+            <a:off x="548640" y="5151337"/>
+            <a:ext cx="11094415" cy="553865"/>
           </a:xfrm>
           <a:prstGeom prst="roundRect">
             <a:avLst>
@@ -49060,8 +49060,8 @@
         </p:nvSpPr>
         <p:spPr>
           <a:xfrm>
-            <a:off x="685800" y="5634228"/>
-            <a:ext cx="2514600" cy="720851"/>
+            <a:off x="685800" y="5119333"/>
+            <a:ext cx="2514600" cy="617873"/>
           </a:xfrm>
           <a:prstGeom prst="rect">
             <a:avLst/>
@@ -49086,6 +49086,154 @@
                 <a:ea typeface="맑은 고딕"/>
                 <a:cs typeface="맑은 고딕"/>
               </a:rPr>
+              <a:t>BDD</a:t>
+            </a:r>
+          </a:p>
+        </p:txBody>
+      </p:sp>
+      <p:sp>
+        <p:nvSpPr>
+          <p:cNvPr id="32" name="TextBox 31"/>
+          <p:cNvSpPr txBox="1"/>
+          <p:nvPr/>
+        </p:nvSpPr>
+        <p:spPr>
+          <a:xfrm>
+            <a:off x="3200400" y="5119333"/>
+            <a:ext cx="6156655" cy="617873"/>
+          </a:xfrm>
+          <a:prstGeom prst="rect">
+            <a:avLst/>
+          </a:prstGeom>
+          <a:noFill/>
+        </p:spPr>
+        <p:txBody>
+          <a:bodyPr wrap="square" anchor="ctr"/>
+          <a:lstStyle/>
+          <a:p>
+            <a:pPr algn="l">
+              <a:lnSpc>
+                <a:spcPct val="110000"/>
+              </a:lnSpc>
+            </a:pPr>
+            <a:r>
+              <a:rPr sz="1400" b="0">
+                <a:solidFill>
+                  <a:srgbClr val="1F2A3A"/>
+                </a:solidFill>
+                <a:latin typeface="맑은 고딕"/>
+                <a:ea typeface="맑은 고딕"/>
+                <a:cs typeface="맑은 고딕"/>
+              </a:rPr>
+              <a:t>Behavior-Driven Development</a:t>
+            </a:r>
+          </a:p>
+        </p:txBody>
+      </p:sp>
+      <p:sp>
+        <p:nvSpPr>
+          <p:cNvPr id="33" name="TextBox 32"/>
+          <p:cNvSpPr txBox="1"/>
+          <p:nvPr/>
+        </p:nvSpPr>
+        <p:spPr>
+          <a:xfrm>
+            <a:off x="9448495" y="5119333"/>
+            <a:ext cx="2103120" cy="617873"/>
+          </a:xfrm>
+          <a:prstGeom prst="rect">
+            <a:avLst/>
+          </a:prstGeom>
+          <a:noFill/>
+        </p:spPr>
+        <p:txBody>
+          <a:bodyPr wrap="square" anchor="ctr"/>
+          <a:lstStyle/>
+          <a:p>
+            <a:pPr algn="l">
+              <a:lnSpc>
+                <a:spcPct val="110000"/>
+              </a:lnSpc>
+            </a:pPr>
+            <a:r>
+              <a:rPr sz="1250" b="1">
+                <a:solidFill>
+                  <a:srgbClr val="556175"/>
+                </a:solidFill>
+                <a:latin typeface="맑은 고딕"/>
+                <a:ea typeface="맑은 고딕"/>
+                <a:cs typeface="맑은 고딕"/>
+              </a:rPr>
+              <a:t>시나리오로 행동 확인</a:t>
+            </a:r>
+          </a:p>
+        </p:txBody>
+      </p:sp>
+      <p:sp>
+        <p:nvSpPr>
+          <p:cNvPr id="34" name="Rounded Rectangle 33"/>
+          <p:cNvSpPr/>
+          <p:nvPr/>
+        </p:nvSpPr>
+        <p:spPr>
+          <a:xfrm>
+            <a:off x="548640" y="5769210"/>
+            <a:ext cx="11094415" cy="553865"/>
+          </a:xfrm>
+          <a:prstGeom prst="roundRect">
+            <a:avLst>
+              <a:gd name="adj" fmla="val 8000"/>
+            </a:avLst>
+          </a:prstGeom>
+          <a:solidFill>
+            <a:srgbClr val="F3F6F9"/>
+          </a:solidFill>
+          <a:ln>
+            <a:noFill/>
+          </a:ln>
+        </p:spPr>
+        <p:txBody>
+          <a:bodyPr rtlCol="0" anchor="ctr"/>
+          <a:lstStyle/>
+          <a:p>
+            <a:pPr algn="ctr"/>
+          </a:p>
+        </p:txBody>
+      </p:sp>
+      <p:sp>
+        <p:nvSpPr>
+          <p:cNvPr id="35" name="TextBox 34"/>
+          <p:cNvSpPr txBox="1"/>
+          <p:nvPr/>
+        </p:nvSpPr>
+        <p:spPr>
+          <a:xfrm>
+            <a:off x="685800" y="5737206"/>
+            <a:ext cx="2514600" cy="617873"/>
+          </a:xfrm>
+          <a:prstGeom prst="rect">
+            <a:avLst/>
+          </a:prstGeom>
+          <a:noFill/>
+        </p:spPr>
+        <p:txBody>
+          <a:bodyPr wrap="square" anchor="ctr"/>
+          <a:lstStyle/>
+          <a:p>
+            <a:pPr algn="l">
+              <a:lnSpc>
+                <a:spcPct val="110000"/>
+              </a:lnSpc>
+            </a:pPr>
+            <a:r>
+              <a:rPr sz="1600" b="1">
+                <a:solidFill>
+                  <a:srgbClr val="13294B"/>
+                </a:solidFill>
+                <a:latin typeface="맑은 고딕"/>
+                <a:ea typeface="맑은 고딕"/>
+                <a:cs typeface="맑은 고딕"/>
+              </a:rPr>
               <a:t>회귀 시험</a:t>
             </a:r>
           </a:p>
@@ -49093,14 +49241,14 @@
       </p:sp>
       <p:sp>
         <p:nvSpPr>
-          <p:cNvPr id="32" name="TextBox 31"/>
-          <p:cNvSpPr txBox="1"/>
-          <p:nvPr/>
-        </p:nvSpPr>
-        <p:spPr>
-          <a:xfrm>
-            <a:off x="3200400" y="5634228"/>
-            <a:ext cx="6156655" cy="720851"/>
+          <p:cNvPr id="36" name="TextBox 35"/>
+          <p:cNvSpPr txBox="1"/>
+          <p:nvPr/>
+        </p:nvSpPr>
+        <p:spPr>
+          <a:xfrm>
+            <a:off x="3200400" y="5737206"/>
+            <a:ext cx="6156655" cy="617873"/>
           </a:xfrm>
           <a:prstGeom prst="rect">
             <a:avLst/>
@@ -49132,14 +49280,14 @@
       </p:sp>
       <p:sp>
         <p:nvSpPr>
-          <p:cNvPr id="33" name="TextBox 32"/>
-          <p:cNvSpPr txBox="1"/>
-          <p:nvPr/>
-        </p:nvSpPr>
-        <p:spPr>
-          <a:xfrm>
-            <a:off x="9448495" y="5634228"/>
-            <a:ext cx="2103120" cy="720851"/>
+          <p:cNvPr id="37" name="TextBox 36"/>
+          <p:cNvSpPr txBox="1"/>
+          <p:nvPr/>
+        </p:nvSpPr>
+        <p:spPr>
+          <a:xfrm>
+            <a:off x="9448495" y="5737206"/>
+            <a:ext cx="2103120" cy="617873"/>
           </a:xfrm>
           <a:prstGeom prst="rect">
             <a:avLst/>
@@ -50195,7 +50343,7 @@
                 <a:ea typeface="맑은 고딕"/>
                 <a:cs typeface="맑은 고딕"/>
               </a:rPr>
-              <a:t>자동으로 처리하는 일과 사람이 결정하는 일</a:t>
+              <a:t>자동 처리와 사람의 결정: HITL(Human-in-the-Loop)</a:t>
             </a:r>
           </a:p>
         </p:txBody>
@@ -53457,7 +53605,7 @@
       </p:sp>
       <p:pic>
         <p:nvPicPr>
-          <p:cNvPr id="6" name="삽화:세지점.svg" descr="illust_3011843767613754214_1791736073.png"/>
+          <p:cNvPr id="6" name="삽화:세지점.svg" descr="illust_8567374191004304732_1791736073.png"/>
           <p:cNvPicPr>
             <a:picLocks noChangeAspect="1"/>
           </p:cNvPicPr>

--- a/docs/교재/실전반_오프라인/06회차/실전반_오프라인_06회차.pptx
+++ b/docs/교재/실전반_오프라인/06회차/실전반_오프라인_06회차.pptx
@@ -563,7 +563,7 @@
           <a:lstStyle/>
           <a:p>
             <a:r>
-              <a:t>앞의 두 회차에서는 에이전트가 일하는 방식과 에이전트에 붙이는 지침과 도구를 다루었습니다. 오늘은 그 에이전트를 믿고 쓰기 위한 세 가지, 곧 사람이 결정하는 자리와 요구사항을 적는 명세와 행동의 검증을 다룹니다. 네 실습을 마친 뒤에는 에이전트를 만들어 온 과정을 하나로 정리합니다. 이 네 가지를 자료 없이 자신의 말로 설명할 수 있는지가 오늘의 기준입니다.</a:t>
+              <a:t>앞의 두 회차에서는 에이전트가 일하는 방식과 에이전트에 붙이는 지침과 도구를 다루었습니다. 오늘은 그 에이전트를 믿고 쓰기 위한 세 가지, 곧 사람이 결정하는 자리와 요구사항을 적는 명세와 행동의 검증을 다룹니다. 네 실습을 마친 뒤에는 에이전트를 만들어 온 과정을 하나로 정리합니다.</a:t>
             </a:r>
           </a:p>
         </p:txBody>
@@ -2383,7 +2383,7 @@
           <a:lstStyle/>
           <a:p>
             <a:r>
-              <a:t>에이전트가 쓴 근거가 어디에서 왔는지를 되짚습니다. 가능한 원인이 무엇인지는 지식 그래프의 관계에서 읽었습니다. 지금 냉각 효율이 얼마인지는 시계열 DB에서, 걸려 있는 납기가 있는지는 업무 DB에서 판단하는 순간에 읽었습니다. 변하지 않는 지식과 변하는 값을 섞지 않는 것이 근거를 다루는 기준이었습니다.</a:t>
+              <a:t>4회차의 네 정보원을 추천안 한 건으로 모이는 두 갈래로 다시 놓았습니다. 위쪽은 지식이며, 원인 후보 셋에서 고장 유형을 거쳐 조치 방법으로 가는 관계는 1회차부터 3회차까지 만든 지식 그래프에서 읽었습니다. 아래쪽은 현재값이며, 냉각 효율 46.2 %는 시계열 DB에서, 납기 오더는 업무 DB에서 판단하는 순간에 읽었습니다. 두 갈래가 도구 호출을 거쳐 추천안에 모이고, 변하지 않는 지식과 변하는 값을 섞지 않는 것이 근거를 다루는 기준이었습니다.</a:t>
             </a:r>
           </a:p>
         </p:txBody>
@@ -2523,7 +2523,7 @@
           <a:lstStyle/>
           <a:p>
             <a:r>
-              <a:t>검사와 승인은 뜻이 다릅니다. 가드레일은 결과의 형식이 맞는지, 규칙을 인용했는지, 승인 역할이 붙어 있는지를 시스템이 보는 것이고, 통과해도 상태는 승인 대기입니다. 에이전트의 자기 검토나 다른 에이전트의 검토도 승인이 아닙니다. 승인은 승인 역할의 담당자가 내용과 상황을 보고 내리는 결정이며, 누가 어느 역할로 승인했는지가 결정 기록으로 남습니다. 설비 명령은 이 승인 뒤에만 만들어집니다.</a:t>
+              <a:t>오늘 이론에서 본 내용을 추천안이 지나는 문 둘로 다시 놓았습니다. 첫째 문은 시스템의 자동 검사이며, 형식이 맞는지와 규칙을 인용했는지와 승인 역할이 붙어 있는지를 보고, 통과해도 상태는 승인 대기입니다. 둘째 문은 승인 역할의 담당자이며, 내용과 상황을 보고 승인해야 설비 명령이 만들어지고 누가 어느 역할로 승인했는지가 결정 기록으로 남습니다. 에이전트의 자기 검토나 다른 에이전트의 검토는 첫째 문 쪽에 속하고 승인이 되지 않습니다. 왼쪽 아래의 두 장면은 에이전트가 일하는 동안 사람이 들어가는 나머지 두 자리, 곧 질문에 답하는 때와 멈춘 작업을 닫는 때입니다.</a:t>
             </a:r>
           </a:p>
         </p:txBody>
@@ -2663,7 +2663,7 @@
           <a:lstStyle/>
           <a:p>
             <a:r>
-              <a:t>명세와 시나리오를 변경 한 번의 순서로 이었습니다. 요구가 바뀌면 먼저 명세에 새 조건의 계약과 금지 조건과 수용 기준을 적습니다. 그 조건의 시나리오와 기대값을 더한 다음에 지침이나 코드를 고칩니다. 마지막으로 새 시나리오와 기존 시나리오를 모두 다시 실행합니다.</a:t>
+              <a:t>명세와 시나리오를 변경 한 번의 순서로 이었습니다. 단계마다 아래 줄은 실습에서 다룬 긴급 정비 조건의 예입니다. 요구가 바뀌면 먼저 명세에 새 조건을 적고, 그 조건의 시나리오와 기대값을 더한 다음에 지침이나 코드를 고칩니다. 마지막으로 새 시나리오와 함께 일반 요청, 보류, 거절의 기존 시나리오를 모두 다시 실행합니다.</a:t>
             </a:r>
           </a:p>
         </p:txBody>
@@ -2803,7 +2803,7 @@
           <a:lstStyle/>
           <a:p>
             <a:r>
-              <a:t>응용에 따라 산출물이 어떻게 달라지는지를 HYD의 세 에이전트로 봅니다. 목표가 있고 스킬과 도구가 있고 출력 계약이 있다는 틀은 셋이 같습니다. 쿨러 과열 경보를 맡은 에이전트는 팬 최대 운전과 대안 셋을 담은 조치 카드를 냅니다. 정기 정비를 맡은 에이전트는 언제 정비할지를 담은 카드를, 예비품 구매를 맡은 에이전트는 공급사와 수량과 금액을 담은 발주 카드를 냅니다.</a:t>
+              <a:t>응용에 따라 산출물이 어떻게 달라지는지를 HYD의 세 에이전트로 봅니다. 가운데의 하늘색 구획이 셋에 공통인 틀이며, 목표가 있고 스킬과 도구가 있고 출력 계약이 있습니다. 위에서부터 쿨러 성능 저하 경보를 맡은 에이전트는 팬 최대 운전과 대안 셋을 담은 추천안을 냅니다. 정기 정비를 맡은 에이전트는 언제 정비할지를, 예비품 구매를 맡은 에이전트는 공급사와 수량과 금액을 담은 발주안을 냅니다. 새 업무를 맡길 때에도 틀은 그대로 두고 그 자리에 넣을 것을 정합니다.</a:t>
             </a:r>
           </a:p>
         </p:txBody>
@@ -2873,7 +2873,7 @@
           <a:lstStyle/>
           <a:p>
             <a:r>
-              <a:t>사람이 끼어드는 자리는 승인 하나만이 아닙니다. 위의 띠는 처리의 구간이고, 아래의 세 장면은 사람이 개입하는 자리입니다. 왼쪽 둘은 에이전트가 일하는 동안에 생깁니다. 에이전트가 필요한 정보가 없어 묻는 경우와, 한도를 넘겨 멈춘 작업을 사람이 닫는 경우입니다. 오른쪽은 추천안이 나온 뒤 실행하기 전에 담당자가 승인하거나 거절하는 단계입니다.</a:t>
+              <a:t>사람이 끼어드는 자리는 승인 하나만이 아닙니다. 위의 띠는 처리의 구간이고, 아래의 세 장면은 사람이 개입하는 자리입니다. 왼쪽 둘은 에이전트가 일하는 동안에 생깁니다. 에이전트가 필요한 정보가 없어 묻는 경우와, 한도를 넘겨 멈춘 작업을 사람이 닫는 경우입니다. 한도는 한 번의 실행에 정해 둔 시간과, 형식이 틀린 결과를 다시 고치게 하는 횟수에 걸려 있습니다. 오른쪽은 추천안이 나온 뒤 실행하기 전에 담당자가 승인하거나 거절하는 단계입니다.</a:t>
             </a:r>
           </a:p>
         </p:txBody>
@@ -3013,7 +3013,7 @@
           <a:lstStyle/>
           <a:p>
             <a:r>
-              <a:t>오늘 실습의 산출물은 서로 이어집니다. 확인 질문은 필수 정보가 빠진 경우의 시나리오가 되었습니다. spec.md와 함께 저장한 입력과 기대 결과는 시나리오의 재료가 되었고, 시나리오와 회귀 기록은 다음에 요구가 바뀔 때의 기준으로 남습니다.</a:t>
+              <a:t>오늘 실습의 산출물은 서로 이어집니다. 둘째 실습의 확인 질문은 필수 정보가 빠진 경우의 시나리오가 되었고, 셋째 실습에서 spec.md와 함께 저장한 입력과 기대 결과는 넷째 실습 시나리오의 재료가 되었습니다. 시나리오는 실행되어 회귀 기록으로 남고, 그 기록이 다음에 요구가 바뀔 때의 기준이 됩니다.</a:t>
             </a:r>
           </a:p>
         </p:txBody>
@@ -3433,7 +3433,7 @@
           <a:lstStyle/>
           <a:p>
             <a:r>
-              <a:t>에이전트가 원인을 쿨러 핀 오염으로 가리고 팬 최대 운전을 추천한 시점으로 돌아가 보겠습니다. 추천은 나왔지만 팬은 아직 그대로 돌고 유온도 그대로입니다. 운전원의 승인, 설비로 가는 냉각 명령, 유온을 다시 읽는 재관측, 핀 세척을 위한 작업지시 등록, 결과 보고가 남아 있습니다.</a:t>
+              <a:t>에이전트가 원인을 쿨러 핀 오염으로 가리고 팬 최대 운전을 추천한 시점으로 돌아가 보겠습니다. 에이전트가 낸 것, 곧 추천 하나와 대안과 그 이유를 묶은 것이 앞 회차에서 본 추천안입니다. 추천안은 나왔지만 팬은 아직 그대로 돌고 유온도 그대로입니다. 운전원의 승인, 설비로 가는 냉각 명령, 유온을 다시 읽는 재관측, 핀 세척을 위한 작업지시 등록, 결과 보고가 남아 있습니다.</a:t>
             </a:r>
           </a:p>
         </p:txBody>
@@ -3573,7 +3573,7 @@
           <a:lstStyle/>
           <a:p>
             <a:r>
-              <a:t>뜻은 앞에서 풀었으므로 여기서는 이름과 자리만 확인합니다. 이 일곱과 함께 승인 역할, 에이전트의 질문, 금지 조건, 시나리오가 오늘의 용어입니다. 하나를 골라 자료를 덮고 자신의 문장으로 써 보시기 바랍니다.</a:t>
+              <a:t>위의 둘은 사람의 결정에, 가운데 셋은 명세에, 아래 둘은 검증에 속하는 말입니다. 이 일곱과 함께 승인 역할, 에이전트의 질문, 금지 조건, 시나리오가 오늘의 용어입니다. 오른쪽 칸을 가리고 용어마다 쿨러 사건에서의 자리를 말해 보시기 바랍니다.</a:t>
             </a:r>
           </a:p>
         </p:txBody>
@@ -3923,7 +3923,7 @@
           <a:lstStyle/>
           <a:p>
             <a:r>
-              <a:t>정답보다 판단 기준이 중요합니다. 첫 문항의 3번은 두 번 확인했다는 점에서 그럴듯하지만, 두 확인 모두 실행의 결정은 아닙니다. 둘째 문항의 1번은 얼마나 빨라야 하는지가 적혀 있지 않아 판정할 수 없습니다. 셋째 문항의 3번은 새 시나리오만 되풀이하므로 기존 행동을 알려 주지 못합니다.</a:t>
+              <a:t>첫 문항의 3번은 두 번 확인했다는 점에서 그럴듯하지만, 두 확인 모두 실행의 결정은 아닙니다. 둘째 문항의 1번은 얼마나 빨라야 하는지가 적혀 있지 않아 판정할 수 없습니다. 셋째 문항의 3번은 새 시나리오만 되풀이하므로 기존 행동을 알려 주지 못합니다.</a:t>
             </a:r>
           </a:p>
         </p:txBody>
@@ -10299,7 +10299,7 @@
       </p:sp>
       <p:pic>
         <p:nvPicPr>
-          <p:cNvPr id="6" name="삽화:두관문.svg" descr="illust_7588262989240790817_1791736073.png"/>
+          <p:cNvPr id="6" name="삽화:두관문.svg" descr="illust_7143711520488172470_1791736073.png"/>
           <p:cNvPicPr>
             <a:picLocks noChangeAspect="1"/>
           </p:cNvPicPr>
@@ -11670,7 +11670,7 @@
       </p:sp>
       <p:pic>
         <p:nvPicPr>
-          <p:cNvPr id="6" name="삽화:세해석.svg" descr="illust_8128149962712771213_1791736073.png"/>
+          <p:cNvPr id="6" name="삽화:세해석.svg" descr="illust_928805092734271264_1791736073.png"/>
           <p:cNvPicPr>
             <a:picLocks noChangeAspect="1"/>
           </p:cNvPicPr>
@@ -12831,7 +12831,7 @@
       </p:sp>
       <p:pic>
         <p:nvPicPr>
-          <p:cNvPr id="6" name="삽화:명세문서.svg" descr="illust_696621957975213819_1791736073.png"/>
+          <p:cNvPr id="6" name="삽화:명세문서.svg" descr="illust_1512623812394534611_1791736073.png"/>
           <p:cNvPicPr>
             <a:picLocks noChangeAspect="1"/>
           </p:cNvPicPr>
@@ -13342,7 +13342,7 @@
       </p:sp>
       <p:pic>
         <p:nvPicPr>
-          <p:cNvPr id="6" name="삽화:계약.svg" descr="illust_5122341806176466526_1791736073.png"/>
+          <p:cNvPr id="6" name="삽화:계약.svg" descr="illust_1909185994350290981_1791736073.png"/>
           <p:cNvPicPr>
             <a:picLocks noChangeAspect="1"/>
           </p:cNvPicPr>
@@ -18607,7 +18607,7 @@
       </p:sp>
       <p:pic>
         <p:nvPicPr>
-          <p:cNvPr id="6" name="삽화:명세와실행.svg" descr="illust_5037534855377508603_1791743471.png"/>
+          <p:cNvPr id="6" name="삽화:명세와실행.svg" descr="illust_7289801345771377311_1791770361.png"/>
           <p:cNvPicPr>
             <a:picLocks noChangeAspect="1"/>
           </p:cNvPicPr>
@@ -19778,7 +19778,7 @@
       </p:sp>
       <p:pic>
         <p:nvPicPr>
-          <p:cNvPr id="6" name="삽화:세부분.svg" descr="illust_6128900808637055573_1791743471.png"/>
+          <p:cNvPr id="6" name="삽화:세부분.svg" descr="illust_4049484602687774924_1791770361.png"/>
           <p:cNvPicPr>
             <a:picLocks noChangeAspect="1"/>
           </p:cNvPicPr>
@@ -22384,7 +22384,7 @@
       </p:sp>
       <p:pic>
         <p:nvPicPr>
-          <p:cNvPr id="6" name="삽화:회귀.svg" descr="illust_4875533925239624276_1791743471.png"/>
+          <p:cNvPr id="6" name="삽화:회귀.svg" descr="illust_574339008930830013_1791770361.png"/>
           <p:cNvPicPr>
             <a:picLocks noChangeAspect="1"/>
           </p:cNvPicPr>
@@ -22624,8 +22624,8 @@
         </p:nvSpPr>
         <p:spPr>
           <a:xfrm>
-            <a:off x="9968718" y="3329513"/>
-            <a:ext cx="1418234" cy="577342"/>
+            <a:off x="10241455" y="3329513"/>
+            <a:ext cx="1309139" cy="577342"/>
           </a:xfrm>
           <a:prstGeom prst="rect">
             <a:avLst/>
@@ -22687,8 +22687,8 @@
         </p:nvSpPr>
         <p:spPr>
           <a:xfrm>
-            <a:off x="9968718" y="4511375"/>
-            <a:ext cx="1418234" cy="375920"/>
+            <a:off x="10241455" y="4511375"/>
+            <a:ext cx="1309139" cy="375920"/>
           </a:xfrm>
           <a:prstGeom prst="rect">
             <a:avLst/>
@@ -25317,7 +25317,7 @@
                 <a:ea typeface="맑은 고딕"/>
                 <a:cs typeface="맑은 고딕"/>
               </a:rPr>
-              <a:t>이 실습을 마치면 빠진 정보를 묻는 확인 질문과, 추가 입력을 받아 다시 판단한 결과와, 그 전후의 상태 기록이 남는다.</a:t>
+              <a:t>빠진 정보를 확정하지 않고 확인 질문을 내게 고친 뒤, 추가 입력을 받아 다시 판단한 결과와 전후 상태를 남긴다.</a:t>
             </a:r>
           </a:p>
         </p:txBody>
@@ -29014,7 +29014,7 @@
       </p:sp>
       <p:pic>
         <p:nvPicPr>
-          <p:cNvPr id="6" name="삽화:더해진것.svg" descr="illust_6865235133747865530_1791743471.png"/>
+          <p:cNvPr id="6" name="삽화:더해진것.svg" descr="illust_3575183096368693717_1791770361.png"/>
           <p:cNvPicPr>
             <a:picLocks noChangeAspect="1"/>
           </p:cNvPicPr>
@@ -29199,7 +29199,7 @@
                 <a:ea typeface="맑은 고딕"/>
                 <a:cs typeface="맑은 고딕"/>
               </a:rPr>
-              <a:t>6회차</a:t>
+              <a:t>6회차 ①</a:t>
             </a:r>
           </a:p>
           <a:p>
@@ -29262,7 +29262,7 @@
                 <a:ea typeface="맑은 고딕"/>
                 <a:cs typeface="맑은 고딕"/>
               </a:rPr>
-              <a:t>6회차</a:t>
+              <a:t>6회차 ②</a:t>
             </a:r>
           </a:p>
           <a:p>
@@ -31008,7 +31008,7 @@
       </p:sp>
       <p:pic>
         <p:nvPicPr>
-          <p:cNvPr id="6" name="삽화:사건위장치.svg" descr="illust_2393677024522452563_1791743471.png"/>
+          <p:cNvPr id="6" name="삽화:사건위장치.svg" descr="illust_1266081435908013750_1791770361.png"/>
           <p:cNvPicPr>
             <a:picLocks noChangeAspect="1"/>
           </p:cNvPicPr>
@@ -32876,37 +32876,30 @@
           </a:p>
         </p:txBody>
       </p:sp>
-      <p:sp>
-        <p:nvSpPr>
-          <p:cNvPr id="6" name="Rounded Rectangle 5"/>
-          <p:cNvSpPr/>
-          <p:nvPr/>
-        </p:nvSpPr>
-        <p:spPr>
-          <a:xfrm>
-            <a:off x="548640" y="1961387"/>
-            <a:ext cx="11094415" cy="347472"/>
-          </a:xfrm>
-          <a:prstGeom prst="roundRect">
-            <a:avLst>
-              <a:gd name="adj" fmla="val 12000"/>
-            </a:avLst>
-          </a:prstGeom>
-          <a:solidFill>
-            <a:srgbClr val="13294B"/>
-          </a:solidFill>
-          <a:ln>
-            <a:noFill/>
-          </a:ln>
-        </p:spPr>
-        <p:txBody>
-          <a:bodyPr rtlCol="0" anchor="ctr"/>
-          <a:lstStyle/>
-          <a:p>
-            <a:pPr algn="ctr"/>
-          </a:p>
-        </p:txBody>
-      </p:sp>
+      <p:pic>
+        <p:nvPicPr>
+          <p:cNvPr id="6" name="삽화:근거자리.svg" descr="illust_1418957791228613445_1791770880.png"/>
+          <p:cNvPicPr>
+            <a:picLocks noChangeAspect="1"/>
+          </p:cNvPicPr>
+          <p:nvPr/>
+        </p:nvPicPr>
+        <p:blipFill>
+          <a:blip r:embed="rId3"/>
+          <a:stretch>
+            <a:fillRect/>
+          </a:stretch>
+        </p:blipFill>
+        <p:spPr>
+          <a:xfrm>
+            <a:off x="641100" y="1627632"/>
+            <a:ext cx="10909495" cy="4727448"/>
+          </a:xfrm>
+          <a:prstGeom prst="rect">
+            <a:avLst/>
+          </a:prstGeom>
+        </p:spPr>
+      </p:pic>
       <p:sp>
         <p:nvSpPr>
           <p:cNvPr id="7" name="TextBox 6"/>
@@ -32915,33 +32908,57 @@
         </p:nvSpPr>
         <p:spPr>
           <a:xfrm>
-            <a:off x="685800" y="1961387"/>
-            <a:ext cx="2514600" cy="347472"/>
-          </a:xfrm>
-          <a:prstGeom prst="rect">
-            <a:avLst/>
-          </a:prstGeom>
-          <a:noFill/>
-        </p:spPr>
-        <p:txBody>
-          <a:bodyPr wrap="square" anchor="ctr"/>
-          <a:lstStyle/>
-          <a:p>
-            <a:pPr algn="l">
-              <a:lnSpc>
-                <a:spcPct val="110000"/>
-              </a:lnSpc>
-            </a:pPr>
-            <a:r>
-              <a:rPr sz="1300" b="1">
-                <a:solidFill>
-                  <a:srgbClr val="FFFFFF"/>
-                </a:solidFill>
-                <a:latin typeface="맑은 고딕"/>
-                <a:ea typeface="맑은 고딕"/>
-                <a:cs typeface="맑은 고딕"/>
-              </a:rPr>
-              <a:t>물음</a:t>
+            <a:off x="968384" y="2242200"/>
+            <a:ext cx="1527329" cy="778764"/>
+          </a:xfrm>
+          <a:prstGeom prst="rect">
+            <a:avLst/>
+          </a:prstGeom>
+          <a:noFill/>
+        </p:spPr>
+        <p:txBody>
+          <a:bodyPr wrap="square" anchor="t"/>
+          <a:lstStyle/>
+          <a:p>
+            <a:pPr algn="ctr">
+              <a:lnSpc>
+                <a:spcPct val="110000"/>
+              </a:lnSpc>
+              <a:spcAft>
+                <a:spcPts val="100"/>
+              </a:spcAft>
+            </a:pPr>
+            <a:r>
+              <a:rPr sz="1600" b="1">
+                <a:solidFill>
+                  <a:srgbClr val="13294B"/>
+                </a:solidFill>
+                <a:latin typeface="맑은 고딕"/>
+                <a:ea typeface="맑은 고딕"/>
+                <a:cs typeface="맑은 고딕"/>
+              </a:rPr>
+              <a:t>지식</a:t>
+            </a:r>
+          </a:p>
+          <a:p>
+            <a:pPr algn="ctr">
+              <a:lnSpc>
+                <a:spcPct val="110000"/>
+              </a:lnSpc>
+              <a:spcAft>
+                <a:spcPts val="100"/>
+              </a:spcAft>
+            </a:pPr>
+            <a:r>
+              <a:rPr sz="1300" b="0">
+                <a:solidFill>
+                  <a:srgbClr val="556175"/>
+                </a:solidFill>
+                <a:latin typeface="맑은 고딕"/>
+                <a:ea typeface="맑은 고딕"/>
+                <a:cs typeface="맑은 고딕"/>
+              </a:rPr>
+              <a:t>지식 그래프에 정해 둔 관계</a:t>
             </a:r>
           </a:p>
         </p:txBody>
@@ -32954,33 +32971,57 @@
         </p:nvSpPr>
         <p:spPr>
           <a:xfrm>
-            <a:off x="3200400" y="1961387"/>
-            <a:ext cx="6248095" cy="347472"/>
-          </a:xfrm>
-          <a:prstGeom prst="rect">
-            <a:avLst/>
-          </a:prstGeom>
-          <a:noFill/>
-        </p:spPr>
-        <p:txBody>
-          <a:bodyPr wrap="square" anchor="ctr"/>
-          <a:lstStyle/>
-          <a:p>
-            <a:pPr algn="l">
-              <a:lnSpc>
-                <a:spcPct val="110000"/>
-              </a:lnSpc>
-            </a:pPr>
-            <a:r>
-              <a:rPr sz="1300" b="1">
-                <a:solidFill>
-                  <a:srgbClr val="FFFFFF"/>
-                </a:solidFill>
-                <a:latin typeface="맑은 고딕"/>
-                <a:ea typeface="맑은 고딕"/>
-                <a:cs typeface="맑은 고딕"/>
-              </a:rPr>
-              <a:t>읽은 곳</a:t>
+            <a:off x="2255705" y="3234964"/>
+            <a:ext cx="1636424" cy="577342"/>
+          </a:xfrm>
+          <a:prstGeom prst="rect">
+            <a:avLst/>
+          </a:prstGeom>
+          <a:noFill/>
+        </p:spPr>
+        <p:txBody>
+          <a:bodyPr wrap="square" anchor="t"/>
+          <a:lstStyle/>
+          <a:p>
+            <a:pPr algn="ctr">
+              <a:lnSpc>
+                <a:spcPct val="110000"/>
+              </a:lnSpc>
+              <a:spcAft>
+                <a:spcPts val="100"/>
+              </a:spcAft>
+            </a:pPr>
+            <a:r>
+              <a:rPr sz="1600" b="1">
+                <a:solidFill>
+                  <a:srgbClr val="13294B"/>
+                </a:solidFill>
+                <a:latin typeface="맑은 고딕"/>
+                <a:ea typeface="맑은 고딕"/>
+                <a:cs typeface="맑은 고딕"/>
+              </a:rPr>
+              <a:t>원인 후보 셋</a:t>
+            </a:r>
+          </a:p>
+          <a:p>
+            <a:pPr algn="ctr">
+              <a:lnSpc>
+                <a:spcPct val="110000"/>
+              </a:lnSpc>
+              <a:spcAft>
+                <a:spcPts val="100"/>
+              </a:spcAft>
+            </a:pPr>
+            <a:r>
+              <a:rPr sz="1300" b="0">
+                <a:solidFill>
+                  <a:srgbClr val="556175"/>
+                </a:solidFill>
+                <a:latin typeface="맑은 고딕"/>
+                <a:ea typeface="맑은 고딕"/>
+                <a:cs typeface="맑은 고딕"/>
+              </a:rPr>
+              <a:t>쿨러 핀 오염 외 둘</a:t>
             </a:r>
           </a:p>
         </p:txBody>
@@ -32993,65 +33034,100 @@
         </p:nvSpPr>
         <p:spPr>
           <a:xfrm>
-            <a:off x="9448495" y="1961387"/>
-            <a:ext cx="2194560" cy="347472"/>
-          </a:xfrm>
-          <a:prstGeom prst="rect">
-            <a:avLst/>
-          </a:prstGeom>
-          <a:noFill/>
-        </p:spPr>
-        <p:txBody>
-          <a:bodyPr wrap="square" anchor="ctr"/>
-          <a:lstStyle/>
-          <a:p>
-            <a:pPr algn="l">
-              <a:lnSpc>
-                <a:spcPct val="110000"/>
-              </a:lnSpc>
-            </a:pPr>
-            <a:r>
-              <a:rPr sz="1300" b="1">
-                <a:solidFill>
-                  <a:srgbClr val="FFFFFF"/>
-                </a:solidFill>
-                <a:latin typeface="맑은 고딕"/>
-                <a:ea typeface="맑은 고딕"/>
-                <a:cs typeface="맑은 고딕"/>
-              </a:rPr>
-              <a:t>쿨러 사건에서 읽은 것</a:t>
-            </a:r>
-          </a:p>
-        </p:txBody>
-      </p:sp>
-      <p:sp>
-        <p:nvSpPr>
-          <p:cNvPr id="10" name="Rounded Rectangle 9"/>
-          <p:cNvSpPr/>
-          <p:nvPr/>
-        </p:nvSpPr>
-        <p:spPr>
-          <a:xfrm>
-            <a:off x="548640" y="2395727"/>
-            <a:ext cx="11094415" cy="850392"/>
-          </a:xfrm>
-          <a:prstGeom prst="roundRect">
-            <a:avLst>
-              <a:gd name="adj" fmla="val 8000"/>
-            </a:avLst>
-          </a:prstGeom>
-          <a:solidFill>
-            <a:srgbClr val="F3F6F9"/>
-          </a:solidFill>
-          <a:ln>
-            <a:noFill/>
-          </a:ln>
-        </p:spPr>
-        <p:txBody>
-          <a:bodyPr rtlCol="0" anchor="ctr"/>
-          <a:lstStyle/>
-          <a:p>
-            <a:pPr algn="ctr"/>
+            <a:off x="3826672" y="2880405"/>
+            <a:ext cx="1200044" cy="375920"/>
+          </a:xfrm>
+          <a:prstGeom prst="rect">
+            <a:avLst/>
+          </a:prstGeom>
+          <a:noFill/>
+        </p:spPr>
+        <p:txBody>
+          <a:bodyPr wrap="square" anchor="t"/>
+          <a:lstStyle/>
+          <a:p>
+            <a:pPr algn="ctr">
+              <a:lnSpc>
+                <a:spcPct val="110000"/>
+              </a:lnSpc>
+              <a:spcAft>
+                <a:spcPts val="100"/>
+              </a:spcAft>
+            </a:pPr>
+            <a:r>
+              <a:rPr sz="1600" b="1">
+                <a:solidFill>
+                  <a:srgbClr val="13294B"/>
+                </a:solidFill>
+                <a:latin typeface="맑은 고딕"/>
+                <a:ea typeface="맑은 고딕"/>
+                <a:cs typeface="맑은 고딕"/>
+              </a:rPr>
+              <a:t>고장 유형</a:t>
+            </a:r>
+          </a:p>
+        </p:txBody>
+      </p:sp>
+      <p:sp>
+        <p:nvSpPr>
+          <p:cNvPr id="10" name="TextBox 9"/>
+          <p:cNvSpPr txBox="1"/>
+          <p:nvPr/>
+        </p:nvSpPr>
+        <p:spPr>
+          <a:xfrm>
+            <a:off x="5201269" y="3069503"/>
+            <a:ext cx="1527329" cy="577342"/>
+          </a:xfrm>
+          <a:prstGeom prst="rect">
+            <a:avLst/>
+          </a:prstGeom>
+          <a:noFill/>
+        </p:spPr>
+        <p:txBody>
+          <a:bodyPr wrap="square" anchor="t"/>
+          <a:lstStyle/>
+          <a:p>
+            <a:pPr algn="ctr">
+              <a:lnSpc>
+                <a:spcPct val="110000"/>
+              </a:lnSpc>
+              <a:spcAft>
+                <a:spcPts val="100"/>
+              </a:spcAft>
+            </a:pPr>
+            <a:r>
+              <a:rPr sz="1600" b="1">
+                <a:solidFill>
+                  <a:srgbClr val="13294B"/>
+                </a:solidFill>
+                <a:latin typeface="맑은 고딕"/>
+                <a:ea typeface="맑은 고딕"/>
+                <a:cs typeface="맑은 고딕"/>
+              </a:rPr>
+              <a:t>조치 방법</a:t>
+            </a:r>
+          </a:p>
+          <a:p>
+            <a:pPr algn="ctr">
+              <a:lnSpc>
+                <a:spcPct val="110000"/>
+              </a:lnSpc>
+              <a:spcAft>
+                <a:spcPts val="100"/>
+              </a:spcAft>
+            </a:pPr>
+            <a:r>
+              <a:rPr sz="1300" b="0">
+                <a:solidFill>
+                  <a:srgbClr val="556175"/>
+                </a:solidFill>
+                <a:latin typeface="맑은 고딕"/>
+                <a:ea typeface="맑은 고딕"/>
+                <a:cs typeface="맑은 고딕"/>
+              </a:rPr>
+              <a:t>SOP-COOL-11</a:t>
+            </a:r>
           </a:p>
         </p:txBody>
       </p:sp>
@@ -33063,22 +33139,25 @@
         </p:nvSpPr>
         <p:spPr>
           <a:xfrm>
-            <a:off x="685800" y="2363723"/>
-            <a:ext cx="2514600" cy="914400"/>
-          </a:xfrm>
-          <a:prstGeom prst="rect">
-            <a:avLst/>
-          </a:prstGeom>
-          <a:noFill/>
-        </p:spPr>
-        <p:txBody>
-          <a:bodyPr wrap="square" anchor="ctr"/>
-          <a:lstStyle/>
-          <a:p>
-            <a:pPr algn="l">
-              <a:lnSpc>
-                <a:spcPct val="110000"/>
-              </a:lnSpc>
+            <a:off x="968384" y="4558649"/>
+            <a:ext cx="1527329" cy="778764"/>
+          </a:xfrm>
+          <a:prstGeom prst="rect">
+            <a:avLst/>
+          </a:prstGeom>
+          <a:noFill/>
+        </p:spPr>
+        <p:txBody>
+          <a:bodyPr wrap="square" anchor="t"/>
+          <a:lstStyle/>
+          <a:p>
+            <a:pPr algn="ctr">
+              <a:lnSpc>
+                <a:spcPct val="110000"/>
+              </a:lnSpc>
+              <a:spcAft>
+                <a:spcPts val="100"/>
+              </a:spcAft>
             </a:pPr>
             <a:r>
               <a:rPr sz="1600" b="1">
@@ -33089,7 +33168,28 @@
                 <a:ea typeface="맑은 고딕"/>
                 <a:cs typeface="맑은 고딕"/>
               </a:rPr>
-              <a:t>가능한 원인은 무엇인가</a:t>
+              <a:t>현재값</a:t>
+            </a:r>
+          </a:p>
+          <a:p>
+            <a:pPr algn="ctr">
+              <a:lnSpc>
+                <a:spcPct val="110000"/>
+              </a:lnSpc>
+              <a:spcAft>
+                <a:spcPts val="100"/>
+              </a:spcAft>
+            </a:pPr>
+            <a:r>
+              <a:rPr sz="1300" b="0">
+                <a:solidFill>
+                  <a:srgbClr val="556175"/>
+                </a:solidFill>
+                <a:latin typeface="맑은 고딕"/>
+                <a:ea typeface="맑은 고딕"/>
+                <a:cs typeface="맑은 고딕"/>
+              </a:rPr>
+              <a:t>판단하는 순간에 읽는 값</a:t>
             </a:r>
           </a:p>
         </p:txBody>
@@ -33102,33 +33202,57 @@
         </p:nvSpPr>
         <p:spPr>
           <a:xfrm>
-            <a:off x="3200400" y="2363723"/>
-            <a:ext cx="6156655" cy="914400"/>
-          </a:xfrm>
-          <a:prstGeom prst="rect">
-            <a:avLst/>
-          </a:prstGeom>
-          <a:noFill/>
-        </p:spPr>
-        <p:txBody>
-          <a:bodyPr wrap="square" anchor="ctr"/>
-          <a:lstStyle/>
-          <a:p>
-            <a:pPr algn="l">
-              <a:lnSpc>
-                <a:spcPct val="110000"/>
-              </a:lnSpc>
-            </a:pPr>
-            <a:r>
-              <a:rPr sz="1400" b="0">
-                <a:solidFill>
-                  <a:srgbClr val="1F2A3A"/>
-                </a:solidFill>
-                <a:latin typeface="맑은 고딕"/>
-                <a:ea typeface="맑은 고딕"/>
-                <a:cs typeface="맑은 고딕"/>
-              </a:rPr>
-              <a:t>지식 그래프</a:t>
+            <a:off x="2495714" y="5362315"/>
+            <a:ext cx="1745519" cy="577342"/>
+          </a:xfrm>
+          <a:prstGeom prst="rect">
+            <a:avLst/>
+          </a:prstGeom>
+          <a:noFill/>
+        </p:spPr>
+        <p:txBody>
+          <a:bodyPr wrap="square" anchor="t"/>
+          <a:lstStyle/>
+          <a:p>
+            <a:pPr algn="ctr">
+              <a:lnSpc>
+                <a:spcPct val="110000"/>
+              </a:lnSpc>
+              <a:spcAft>
+                <a:spcPts val="100"/>
+              </a:spcAft>
+            </a:pPr>
+            <a:r>
+              <a:rPr sz="1600" b="1">
+                <a:solidFill>
+                  <a:srgbClr val="13294B"/>
+                </a:solidFill>
+                <a:latin typeface="맑은 고딕"/>
+                <a:ea typeface="맑은 고딕"/>
+                <a:cs typeface="맑은 고딕"/>
+              </a:rPr>
+              <a:t>시계열 DB</a:t>
+            </a:r>
+          </a:p>
+          <a:p>
+            <a:pPr algn="ctr">
+              <a:lnSpc>
+                <a:spcPct val="110000"/>
+              </a:lnSpc>
+              <a:spcAft>
+                <a:spcPts val="100"/>
+              </a:spcAft>
+            </a:pPr>
+            <a:r>
+              <a:rPr sz="1300" b="0">
+                <a:solidFill>
+                  <a:srgbClr val="556175"/>
+                </a:solidFill>
+                <a:latin typeface="맑은 고딕"/>
+                <a:ea typeface="맑은 고딕"/>
+                <a:cs typeface="맑은 고딕"/>
+              </a:rPr>
+              <a:t>냉각 효율 46.2 %</a:t>
             </a:r>
           </a:p>
         </p:txBody>
@@ -33141,25 +33265,49 @@
         </p:nvSpPr>
         <p:spPr>
           <a:xfrm>
-            <a:off x="9448495" y="2363723"/>
-            <a:ext cx="2103120" cy="914400"/>
-          </a:xfrm>
-          <a:prstGeom prst="rect">
-            <a:avLst/>
-          </a:prstGeom>
-          <a:noFill/>
-        </p:spPr>
-        <p:txBody>
-          <a:bodyPr wrap="square" anchor="ctr"/>
-          <a:lstStyle/>
-          <a:p>
-            <a:pPr algn="l">
-              <a:lnSpc>
-                <a:spcPct val="110000"/>
-              </a:lnSpc>
-            </a:pPr>
-            <a:r>
-              <a:rPr sz="1250" b="1">
+            <a:off x="4241233" y="5362315"/>
+            <a:ext cx="2618278" cy="577342"/>
+          </a:xfrm>
+          <a:prstGeom prst="rect">
+            <a:avLst/>
+          </a:prstGeom>
+          <a:noFill/>
+        </p:spPr>
+        <p:txBody>
+          <a:bodyPr wrap="square" anchor="t"/>
+          <a:lstStyle/>
+          <a:p>
+            <a:pPr algn="ctr">
+              <a:lnSpc>
+                <a:spcPct val="110000"/>
+              </a:lnSpc>
+              <a:spcAft>
+                <a:spcPts val="100"/>
+              </a:spcAft>
+            </a:pPr>
+            <a:r>
+              <a:rPr sz="1600" b="1">
+                <a:solidFill>
+                  <a:srgbClr val="13294B"/>
+                </a:solidFill>
+                <a:latin typeface="맑은 고딕"/>
+                <a:ea typeface="맑은 고딕"/>
+                <a:cs typeface="맑은 고딕"/>
+              </a:rPr>
+              <a:t>업무 DB</a:t>
+            </a:r>
+          </a:p>
+          <a:p>
+            <a:pPr algn="ctr">
+              <a:lnSpc>
+                <a:spcPct val="110000"/>
+              </a:lnSpc>
+              <a:spcAft>
+                <a:spcPts val="100"/>
+              </a:spcAft>
+            </a:pPr>
+            <a:r>
+              <a:rPr sz="1300" b="0">
                 <a:solidFill>
                   <a:srgbClr val="556175"/>
                 </a:solidFill>
@@ -33167,17 +33315,104 @@
                 <a:ea typeface="맑은 고딕"/>
                 <a:cs typeface="맑은 고딕"/>
               </a:rPr>
-              <a:t>쿨러 핀 오염을 비롯한</a:t>
-            </a:r>
-          </a:p>
-          <a:p>
-            <a:pPr algn="l">
-              <a:lnSpc>
-                <a:spcPct val="110000"/>
-              </a:lnSpc>
-            </a:pPr>
-            <a:r>
-              <a:rPr sz="1250" b="1">
+              <a:t>납기 오더 MO-0930-0412</a:t>
+            </a:r>
+          </a:p>
+        </p:txBody>
+      </p:sp>
+      <p:sp>
+        <p:nvSpPr>
+          <p:cNvPr id="14" name="TextBox 13"/>
+          <p:cNvSpPr txBox="1"/>
+          <p:nvPr/>
+        </p:nvSpPr>
+        <p:spPr>
+          <a:xfrm>
+            <a:off x="6804964" y="3873169"/>
+            <a:ext cx="981854" cy="623824"/>
+          </a:xfrm>
+          <a:prstGeom prst="rect">
+            <a:avLst/>
+          </a:prstGeom>
+          <a:noFill/>
+        </p:spPr>
+        <p:txBody>
+          <a:bodyPr wrap="square" anchor="t"/>
+          <a:lstStyle/>
+          <a:p>
+            <a:pPr algn="ctr">
+              <a:lnSpc>
+                <a:spcPct val="110000"/>
+              </a:lnSpc>
+              <a:spcAft>
+                <a:spcPts val="100"/>
+              </a:spcAft>
+            </a:pPr>
+            <a:r>
+              <a:rPr sz="1600" b="1">
+                <a:solidFill>
+                  <a:srgbClr val="13294B"/>
+                </a:solidFill>
+                <a:latin typeface="맑은 고딕"/>
+                <a:ea typeface="맑은 고딕"/>
+                <a:cs typeface="맑은 고딕"/>
+              </a:rPr>
+              <a:t>도구 호출</a:t>
+            </a:r>
+          </a:p>
+        </p:txBody>
+      </p:sp>
+      <p:sp>
+        <p:nvSpPr>
+          <p:cNvPr id="15" name="TextBox 14"/>
+          <p:cNvSpPr txBox="1"/>
+          <p:nvPr/>
+        </p:nvSpPr>
+        <p:spPr>
+          <a:xfrm>
+            <a:off x="9292329" y="4629561"/>
+            <a:ext cx="2072804" cy="778764"/>
+          </a:xfrm>
+          <a:prstGeom prst="rect">
+            <a:avLst/>
+          </a:prstGeom>
+          <a:noFill/>
+        </p:spPr>
+        <p:txBody>
+          <a:bodyPr wrap="square" anchor="t"/>
+          <a:lstStyle/>
+          <a:p>
+            <a:pPr algn="ctr">
+              <a:lnSpc>
+                <a:spcPct val="110000"/>
+              </a:lnSpc>
+              <a:spcAft>
+                <a:spcPts val="100"/>
+              </a:spcAft>
+            </a:pPr>
+            <a:r>
+              <a:rPr sz="1600" b="1">
+                <a:solidFill>
+                  <a:srgbClr val="1A6FC4"/>
+                </a:solidFill>
+                <a:latin typeface="맑은 고딕"/>
+                <a:ea typeface="맑은 고딕"/>
+                <a:cs typeface="맑은 고딕"/>
+              </a:rPr>
+              <a:t>추천안</a:t>
+            </a:r>
+          </a:p>
+          <a:p>
+            <a:pPr algn="ctr">
+              <a:lnSpc>
+                <a:spcPct val="110000"/>
+              </a:lnSpc>
+              <a:spcAft>
+                <a:spcPts val="100"/>
+              </a:spcAft>
+            </a:pPr>
+            <a:r>
+              <a:rPr sz="1300" b="0">
                 <a:solidFill>
                   <a:srgbClr val="556175"/>
                 </a:solidFill>
@@ -33185,487 +33420,7 @@
                 <a:ea typeface="맑은 고딕"/>
                 <a:cs typeface="맑은 고딕"/>
               </a:rPr>
-              <a:t>원인 후보 셋</a:t>
-            </a:r>
-          </a:p>
-        </p:txBody>
-      </p:sp>
-      <p:sp>
-        <p:nvSpPr>
-          <p:cNvPr id="14" name="Rounded Rectangle 13"/>
-          <p:cNvSpPr/>
-          <p:nvPr/>
-        </p:nvSpPr>
-        <p:spPr>
-          <a:xfrm>
-            <a:off x="548640" y="3310127"/>
-            <a:ext cx="11094415" cy="850392"/>
-          </a:xfrm>
-          <a:prstGeom prst="roundRect">
-            <a:avLst>
-              <a:gd name="adj" fmla="val 8000"/>
-            </a:avLst>
-          </a:prstGeom>
-          <a:solidFill>
-            <a:srgbClr val="F3F6F9"/>
-          </a:solidFill>
-          <a:ln>
-            <a:noFill/>
-          </a:ln>
-        </p:spPr>
-        <p:txBody>
-          <a:bodyPr rtlCol="0" anchor="ctr"/>
-          <a:lstStyle/>
-          <a:p>
-            <a:pPr algn="ctr"/>
-          </a:p>
-        </p:txBody>
-      </p:sp>
-      <p:sp>
-        <p:nvSpPr>
-          <p:cNvPr id="15" name="TextBox 14"/>
-          <p:cNvSpPr txBox="1"/>
-          <p:nvPr/>
-        </p:nvSpPr>
-        <p:spPr>
-          <a:xfrm>
-            <a:off x="685800" y="3278123"/>
-            <a:ext cx="2514600" cy="914400"/>
-          </a:xfrm>
-          <a:prstGeom prst="rect">
-            <a:avLst/>
-          </a:prstGeom>
-          <a:noFill/>
-        </p:spPr>
-        <p:txBody>
-          <a:bodyPr wrap="square" anchor="ctr"/>
-          <a:lstStyle/>
-          <a:p>
-            <a:pPr algn="l">
-              <a:lnSpc>
-                <a:spcPct val="110000"/>
-              </a:lnSpc>
-            </a:pPr>
-            <a:r>
-              <a:rPr sz="1600" b="1">
-                <a:solidFill>
-                  <a:srgbClr val="13294B"/>
-                </a:solidFill>
-                <a:latin typeface="맑은 고딕"/>
-                <a:ea typeface="맑은 고딕"/>
-                <a:cs typeface="맑은 고딕"/>
-              </a:rPr>
-              <a:t>지금 냉각 효율은 얼마인가</a:t>
-            </a:r>
-          </a:p>
-        </p:txBody>
-      </p:sp>
-      <p:sp>
-        <p:nvSpPr>
-          <p:cNvPr id="16" name="TextBox 15"/>
-          <p:cNvSpPr txBox="1"/>
-          <p:nvPr/>
-        </p:nvSpPr>
-        <p:spPr>
-          <a:xfrm>
-            <a:off x="3200400" y="3278123"/>
-            <a:ext cx="6156655" cy="914400"/>
-          </a:xfrm>
-          <a:prstGeom prst="rect">
-            <a:avLst/>
-          </a:prstGeom>
-          <a:noFill/>
-        </p:spPr>
-        <p:txBody>
-          <a:bodyPr wrap="square" anchor="ctr"/>
-          <a:lstStyle/>
-          <a:p>
-            <a:pPr algn="l">
-              <a:lnSpc>
-                <a:spcPct val="110000"/>
-              </a:lnSpc>
-            </a:pPr>
-            <a:r>
-              <a:rPr sz="1400" b="0">
-                <a:solidFill>
-                  <a:srgbClr val="1F2A3A"/>
-                </a:solidFill>
-                <a:latin typeface="맑은 고딕"/>
-                <a:ea typeface="맑은 고딕"/>
-                <a:cs typeface="맑은 고딕"/>
-              </a:rPr>
-              <a:t>시계열 DB</a:t>
-            </a:r>
-          </a:p>
-        </p:txBody>
-      </p:sp>
-      <p:sp>
-        <p:nvSpPr>
-          <p:cNvPr id="17" name="TextBox 16"/>
-          <p:cNvSpPr txBox="1"/>
-          <p:nvPr/>
-        </p:nvSpPr>
-        <p:spPr>
-          <a:xfrm>
-            <a:off x="9448495" y="3278123"/>
-            <a:ext cx="2103120" cy="914400"/>
-          </a:xfrm>
-          <a:prstGeom prst="rect">
-            <a:avLst/>
-          </a:prstGeom>
-          <a:noFill/>
-        </p:spPr>
-        <p:txBody>
-          <a:bodyPr wrap="square" anchor="ctr"/>
-          <a:lstStyle/>
-          <a:p>
-            <a:pPr algn="l">
-              <a:lnSpc>
-                <a:spcPct val="110000"/>
-              </a:lnSpc>
-            </a:pPr>
-            <a:r>
-              <a:rPr sz="1250" b="1">
-                <a:solidFill>
-                  <a:srgbClr val="556175"/>
-                </a:solidFill>
-                <a:latin typeface="맑은 고딕"/>
-                <a:ea typeface="맑은 고딕"/>
-                <a:cs typeface="맑은 고딕"/>
-              </a:rPr>
-              <a:t>46.2 %</a:t>
-            </a:r>
-          </a:p>
-        </p:txBody>
-      </p:sp>
-      <p:sp>
-        <p:nvSpPr>
-          <p:cNvPr id="18" name="Rounded Rectangle 17"/>
-          <p:cNvSpPr/>
-          <p:nvPr/>
-        </p:nvSpPr>
-        <p:spPr>
-          <a:xfrm>
-            <a:off x="548640" y="4224527"/>
-            <a:ext cx="11094415" cy="850392"/>
-          </a:xfrm>
-          <a:prstGeom prst="roundRect">
-            <a:avLst>
-              <a:gd name="adj" fmla="val 8000"/>
-            </a:avLst>
-          </a:prstGeom>
-          <a:solidFill>
-            <a:srgbClr val="F3F6F9"/>
-          </a:solidFill>
-          <a:ln>
-            <a:noFill/>
-          </a:ln>
-        </p:spPr>
-        <p:txBody>
-          <a:bodyPr rtlCol="0" anchor="ctr"/>
-          <a:lstStyle/>
-          <a:p>
-            <a:pPr algn="ctr"/>
-          </a:p>
-        </p:txBody>
-      </p:sp>
-      <p:sp>
-        <p:nvSpPr>
-          <p:cNvPr id="19" name="TextBox 18"/>
-          <p:cNvSpPr txBox="1"/>
-          <p:nvPr/>
-        </p:nvSpPr>
-        <p:spPr>
-          <a:xfrm>
-            <a:off x="685800" y="4192523"/>
-            <a:ext cx="2514600" cy="914400"/>
-          </a:xfrm>
-          <a:prstGeom prst="rect">
-            <a:avLst/>
-          </a:prstGeom>
-          <a:noFill/>
-        </p:spPr>
-        <p:txBody>
-          <a:bodyPr wrap="square" anchor="ctr"/>
-          <a:lstStyle/>
-          <a:p>
-            <a:pPr algn="l">
-              <a:lnSpc>
-                <a:spcPct val="110000"/>
-              </a:lnSpc>
-            </a:pPr>
-            <a:r>
-              <a:rPr sz="1600" b="1">
-                <a:solidFill>
-                  <a:srgbClr val="13294B"/>
-                </a:solidFill>
-                <a:latin typeface="맑은 고딕"/>
-                <a:ea typeface="맑은 고딕"/>
-                <a:cs typeface="맑은 고딕"/>
-              </a:rPr>
-              <a:t>걸려 있는 납기가 있는가</a:t>
-            </a:r>
-          </a:p>
-        </p:txBody>
-      </p:sp>
-      <p:sp>
-        <p:nvSpPr>
-          <p:cNvPr id="20" name="TextBox 19"/>
-          <p:cNvSpPr txBox="1"/>
-          <p:nvPr/>
-        </p:nvSpPr>
-        <p:spPr>
-          <a:xfrm>
-            <a:off x="3200400" y="4192523"/>
-            <a:ext cx="6156655" cy="914400"/>
-          </a:xfrm>
-          <a:prstGeom prst="rect">
-            <a:avLst/>
-          </a:prstGeom>
-          <a:noFill/>
-        </p:spPr>
-        <p:txBody>
-          <a:bodyPr wrap="square" anchor="ctr"/>
-          <a:lstStyle/>
-          <a:p>
-            <a:pPr algn="l">
-              <a:lnSpc>
-                <a:spcPct val="110000"/>
-              </a:lnSpc>
-            </a:pPr>
-            <a:r>
-              <a:rPr sz="1400" b="0">
-                <a:solidFill>
-                  <a:srgbClr val="1F2A3A"/>
-                </a:solidFill>
-                <a:latin typeface="맑은 고딕"/>
-                <a:ea typeface="맑은 고딕"/>
-                <a:cs typeface="맑은 고딕"/>
-              </a:rPr>
-              <a:t>업무 DB</a:t>
-            </a:r>
-          </a:p>
-        </p:txBody>
-      </p:sp>
-      <p:sp>
-        <p:nvSpPr>
-          <p:cNvPr id="21" name="TextBox 20"/>
-          <p:cNvSpPr txBox="1"/>
-          <p:nvPr/>
-        </p:nvSpPr>
-        <p:spPr>
-          <a:xfrm>
-            <a:off x="9448495" y="4192523"/>
-            <a:ext cx="2103120" cy="914400"/>
-          </a:xfrm>
-          <a:prstGeom prst="rect">
-            <a:avLst/>
-          </a:prstGeom>
-          <a:noFill/>
-        </p:spPr>
-        <p:txBody>
-          <a:bodyPr wrap="square" anchor="ctr"/>
-          <a:lstStyle/>
-          <a:p>
-            <a:pPr algn="l">
-              <a:lnSpc>
-                <a:spcPct val="110000"/>
-              </a:lnSpc>
-            </a:pPr>
-            <a:r>
-              <a:rPr sz="1250" b="1">
-                <a:solidFill>
-                  <a:srgbClr val="556175"/>
-                </a:solidFill>
-                <a:latin typeface="맑은 고딕"/>
-                <a:ea typeface="맑은 고딕"/>
-                <a:cs typeface="맑은 고딕"/>
-              </a:rPr>
-              <a:t>납기 오더</a:t>
-            </a:r>
-          </a:p>
-          <a:p>
-            <a:pPr algn="l">
-              <a:lnSpc>
-                <a:spcPct val="110000"/>
-              </a:lnSpc>
-            </a:pPr>
-            <a:r>
-              <a:rPr sz="1250" b="1">
-                <a:solidFill>
-                  <a:srgbClr val="556175"/>
-                </a:solidFill>
-                <a:latin typeface="맑은 고딕"/>
-                <a:ea typeface="맑은 고딕"/>
-                <a:cs typeface="맑은 고딕"/>
-              </a:rPr>
-              <a:t>MO-0930-0412</a:t>
-            </a:r>
-          </a:p>
-        </p:txBody>
-      </p:sp>
-      <p:sp>
-        <p:nvSpPr>
-          <p:cNvPr id="22" name="Rounded Rectangle 21"/>
-          <p:cNvSpPr/>
-          <p:nvPr/>
-        </p:nvSpPr>
-        <p:spPr>
-          <a:xfrm>
-            <a:off x="548640" y="5138927"/>
-            <a:ext cx="11094415" cy="850392"/>
-          </a:xfrm>
-          <a:prstGeom prst="roundRect">
-            <a:avLst>
-              <a:gd name="adj" fmla="val 8000"/>
-            </a:avLst>
-          </a:prstGeom>
-          <a:solidFill>
-            <a:srgbClr val="F3F6F9"/>
-          </a:solidFill>
-          <a:ln>
-            <a:noFill/>
-          </a:ln>
-        </p:spPr>
-        <p:txBody>
-          <a:bodyPr rtlCol="0" anchor="ctr"/>
-          <a:lstStyle/>
-          <a:p>
-            <a:pPr algn="ctr"/>
-          </a:p>
-        </p:txBody>
-      </p:sp>
-      <p:sp>
-        <p:nvSpPr>
-          <p:cNvPr id="23" name="TextBox 22"/>
-          <p:cNvSpPr txBox="1"/>
-          <p:nvPr/>
-        </p:nvSpPr>
-        <p:spPr>
-          <a:xfrm>
-            <a:off x="685800" y="5106923"/>
-            <a:ext cx="2514600" cy="914400"/>
-          </a:xfrm>
-          <a:prstGeom prst="rect">
-            <a:avLst/>
-          </a:prstGeom>
-          <a:noFill/>
-        </p:spPr>
-        <p:txBody>
-          <a:bodyPr wrap="square" anchor="ctr"/>
-          <a:lstStyle/>
-          <a:p>
-            <a:pPr algn="l">
-              <a:lnSpc>
-                <a:spcPct val="110000"/>
-              </a:lnSpc>
-            </a:pPr>
-            <a:r>
-              <a:rPr sz="1600" b="1">
-                <a:solidFill>
-                  <a:srgbClr val="13294B"/>
-                </a:solidFill>
-                <a:latin typeface="맑은 고딕"/>
-                <a:ea typeface="맑은 고딕"/>
-                <a:cs typeface="맑은 고딕"/>
-              </a:rPr>
-              <a:t>조치는 어떻게 하는가</a:t>
-            </a:r>
-          </a:p>
-        </p:txBody>
-      </p:sp>
-      <p:sp>
-        <p:nvSpPr>
-          <p:cNvPr id="24" name="TextBox 23"/>
-          <p:cNvSpPr txBox="1"/>
-          <p:nvPr/>
-        </p:nvSpPr>
-        <p:spPr>
-          <a:xfrm>
-            <a:off x="3200400" y="5106923"/>
-            <a:ext cx="6156655" cy="914400"/>
-          </a:xfrm>
-          <a:prstGeom prst="rect">
-            <a:avLst/>
-          </a:prstGeom>
-          <a:noFill/>
-        </p:spPr>
-        <p:txBody>
-          <a:bodyPr wrap="square" anchor="ctr"/>
-          <a:lstStyle/>
-          <a:p>
-            <a:pPr algn="l">
-              <a:lnSpc>
-                <a:spcPct val="110000"/>
-              </a:lnSpc>
-            </a:pPr>
-            <a:r>
-              <a:rPr sz="1400" b="0">
-                <a:solidFill>
-                  <a:srgbClr val="1F2A3A"/>
-                </a:solidFill>
-                <a:latin typeface="맑은 고딕"/>
-                <a:ea typeface="맑은 고딕"/>
-                <a:cs typeface="맑은 고딕"/>
-              </a:rPr>
-              <a:t>지식 그래프의 SOP</a:t>
-            </a:r>
-          </a:p>
-        </p:txBody>
-      </p:sp>
-      <p:sp>
-        <p:nvSpPr>
-          <p:cNvPr id="25" name="TextBox 24"/>
-          <p:cNvSpPr txBox="1"/>
-          <p:nvPr/>
-        </p:nvSpPr>
-        <p:spPr>
-          <a:xfrm>
-            <a:off x="9448495" y="5106923"/>
-            <a:ext cx="2103120" cy="914400"/>
-          </a:xfrm>
-          <a:prstGeom prst="rect">
-            <a:avLst/>
-          </a:prstGeom>
-          <a:noFill/>
-        </p:spPr>
-        <p:txBody>
-          <a:bodyPr wrap="square" anchor="ctr"/>
-          <a:lstStyle/>
-          <a:p>
-            <a:pPr algn="l">
-              <a:lnSpc>
-                <a:spcPct val="110000"/>
-              </a:lnSpc>
-            </a:pPr>
-            <a:r>
-              <a:rPr sz="1250" b="1">
-                <a:solidFill>
-                  <a:srgbClr val="556175"/>
-                </a:solidFill>
-                <a:latin typeface="맑은 고딕"/>
-                <a:ea typeface="맑은 고딕"/>
-                <a:cs typeface="맑은 고딕"/>
-              </a:rPr>
-              <a:t>SOP-COOL-11</a:t>
-            </a:r>
-          </a:p>
-          <a:p>
-            <a:pPr algn="l">
-              <a:lnSpc>
-                <a:spcPct val="110000"/>
-              </a:lnSpc>
-            </a:pPr>
-            <a:r>
-              <a:rPr sz="1250" b="1">
-                <a:solidFill>
-                  <a:srgbClr val="556175"/>
-                </a:solidFill>
-                <a:latin typeface="맑은 고딕"/>
-                <a:ea typeface="맑은 고딕"/>
-                <a:cs typeface="맑은 고딕"/>
-              </a:rPr>
-              <a:t>팬 최대 운전</a:t>
+              <a:t>근거마다 읽은 곳이 남는다</a:t>
             </a:r>
           </a:p>
         </p:txBody>
@@ -34638,69 +34393,9 @@
           </a:p>
         </p:txBody>
       </p:sp>
-      <p:sp>
-        <p:nvSpPr>
-          <p:cNvPr id="6" name="Rounded Rectangle 5"/>
-          <p:cNvSpPr/>
-          <p:nvPr/>
-        </p:nvSpPr>
-        <p:spPr>
-          <a:xfrm>
-            <a:off x="548640" y="2429509"/>
-            <a:ext cx="5181447" cy="3123692"/>
-          </a:xfrm>
-          <a:prstGeom prst="roundRect">
-            <a:avLst>
-              <a:gd name="adj" fmla="val 4000"/>
-            </a:avLst>
-          </a:prstGeom>
-          <a:solidFill>
-            <a:srgbClr val="F3F6F9"/>
-          </a:solidFill>
-          <a:ln>
-            <a:noFill/>
-          </a:ln>
-        </p:spPr>
-        <p:txBody>
-          <a:bodyPr rtlCol="0" anchor="ctr"/>
-          <a:lstStyle/>
-          <a:p>
-            <a:pPr algn="ctr"/>
-          </a:p>
-        </p:txBody>
-      </p:sp>
-      <p:sp>
-        <p:nvSpPr>
-          <p:cNvPr id="7" name="Oval 6"/>
-          <p:cNvSpPr/>
-          <p:nvPr/>
-        </p:nvSpPr>
-        <p:spPr>
-          <a:xfrm>
-            <a:off x="822959" y="2630678"/>
-            <a:ext cx="731520" cy="731520"/>
-          </a:xfrm>
-          <a:prstGeom prst="ellipse">
-            <a:avLst/>
-          </a:prstGeom>
-          <a:solidFill>
-            <a:srgbClr val="FFFFFF"/>
-          </a:solidFill>
-          <a:ln>
-            <a:noFill/>
-          </a:ln>
-        </p:spPr>
-        <p:txBody>
-          <a:bodyPr rtlCol="0" anchor="ctr"/>
-          <a:lstStyle/>
-          <a:p>
-            <a:pPr algn="ctr"/>
-          </a:p>
-        </p:txBody>
-      </p:sp>
       <p:pic>
         <p:nvPicPr>
-          <p:cNvPr id="8" name="아이콘:checks" descr="checks_13294B_1.6.png"/>
+          <p:cNvPr id="6" name="삽화:두문.svg" descr="illust_3057429678799473871_1791770880.png"/>
           <p:cNvPicPr>
             <a:picLocks noChangeAspect="1"/>
           </p:cNvPicPr>
@@ -34714,8 +34409,8 @@
         </p:blipFill>
         <p:spPr>
           <a:xfrm>
-            <a:off x="976579" y="2784297"/>
-            <a:ext cx="424281" cy="424281"/>
+            <a:off x="641100" y="1627632"/>
+            <a:ext cx="10909495" cy="4727448"/>
           </a:xfrm>
           <a:prstGeom prst="rect">
             <a:avLst/>
@@ -34724,31 +34419,118 @@
       </p:pic>
       <p:sp>
         <p:nvSpPr>
+          <p:cNvPr id="7" name="TextBox 6"/>
+          <p:cNvSpPr txBox="1"/>
+          <p:nvPr/>
+        </p:nvSpPr>
+        <p:spPr>
+          <a:xfrm>
+            <a:off x="968384" y="2194925"/>
+            <a:ext cx="1090949" cy="337185"/>
+          </a:xfrm>
+          <a:prstGeom prst="rect">
+            <a:avLst/>
+          </a:prstGeom>
+          <a:noFill/>
+        </p:spPr>
+        <p:txBody>
+          <a:bodyPr wrap="square" anchor="t"/>
+          <a:lstStyle/>
+          <a:p>
+            <a:pPr algn="ctr">
+              <a:lnSpc>
+                <a:spcPct val="110000"/>
+              </a:lnSpc>
+              <a:spcAft>
+                <a:spcPts val="100"/>
+              </a:spcAft>
+            </a:pPr>
+            <a:r>
+              <a:rPr sz="1350" b="1">
+                <a:solidFill>
+                  <a:srgbClr val="13294B"/>
+                </a:solidFill>
+                <a:latin typeface="맑은 고딕"/>
+                <a:ea typeface="맑은 고딕"/>
+                <a:cs typeface="맑은 고딕"/>
+              </a:rPr>
+              <a:t>에이전트</a:t>
+            </a:r>
+          </a:p>
+        </p:txBody>
+      </p:sp>
+      <p:sp>
+        <p:nvSpPr>
+          <p:cNvPr id="8" name="TextBox 7"/>
+          <p:cNvSpPr txBox="1"/>
+          <p:nvPr/>
+        </p:nvSpPr>
+        <p:spPr>
+          <a:xfrm>
+            <a:off x="2582990" y="2454935"/>
+            <a:ext cx="1090949" cy="337185"/>
+          </a:xfrm>
+          <a:prstGeom prst="rect">
+            <a:avLst/>
+          </a:prstGeom>
+          <a:noFill/>
+        </p:spPr>
+        <p:txBody>
+          <a:bodyPr wrap="square" anchor="t"/>
+          <a:lstStyle/>
+          <a:p>
+            <a:pPr algn="ctr">
+              <a:lnSpc>
+                <a:spcPct val="110000"/>
+              </a:lnSpc>
+              <a:spcAft>
+                <a:spcPts val="100"/>
+              </a:spcAft>
+            </a:pPr>
+            <a:r>
+              <a:rPr sz="1350" b="1">
+                <a:solidFill>
+                  <a:srgbClr val="13294B"/>
+                </a:solidFill>
+                <a:latin typeface="맑은 고딕"/>
+                <a:ea typeface="맑은 고딕"/>
+                <a:cs typeface="맑은 고딕"/>
+              </a:rPr>
+              <a:t>추천안</a:t>
+            </a:r>
+          </a:p>
+        </p:txBody>
+      </p:sp>
+      <p:sp>
+        <p:nvSpPr>
           <p:cNvPr id="9" name="TextBox 8"/>
           <p:cNvSpPr txBox="1"/>
           <p:nvPr/>
         </p:nvSpPr>
         <p:spPr>
           <a:xfrm>
-            <a:off x="1691640" y="2630678"/>
-            <a:ext cx="3855567" cy="731520"/>
-          </a:xfrm>
-          <a:prstGeom prst="rect">
-            <a:avLst/>
-          </a:prstGeom>
-          <a:noFill/>
-        </p:spPr>
-        <p:txBody>
-          <a:bodyPr wrap="square" anchor="ctr"/>
-          <a:lstStyle/>
-          <a:p>
-            <a:pPr algn="l">
-              <a:lnSpc>
-                <a:spcPct val="110000"/>
-              </a:lnSpc>
-            </a:pPr>
-            <a:r>
-              <a:rPr sz="2000" b="1">
+            <a:off x="3575754" y="1769455"/>
+            <a:ext cx="2618278" cy="507618"/>
+          </a:xfrm>
+          <a:prstGeom prst="rect">
+            <a:avLst/>
+          </a:prstGeom>
+          <a:noFill/>
+        </p:spPr>
+        <p:txBody>
+          <a:bodyPr wrap="square" anchor="t"/>
+          <a:lstStyle/>
+          <a:p>
+            <a:pPr algn="ctr">
+              <a:lnSpc>
+                <a:spcPct val="110000"/>
+              </a:lnSpc>
+              <a:spcAft>
+                <a:spcPts val="100"/>
+              </a:spcAft>
+            </a:pPr>
+            <a:r>
+              <a:rPr sz="1350" b="1">
                 <a:solidFill>
                   <a:srgbClr val="13294B"/>
                 </a:solidFill>
@@ -34756,7 +34538,28 @@
                 <a:ea typeface="맑은 고딕"/>
                 <a:cs typeface="맑은 고딕"/>
               </a:rPr>
-              <a:t>검사를 통과했다</a:t>
+              <a:t>자동 검사</a:t>
+            </a:r>
+          </a:p>
+          <a:p>
+            <a:pPr algn="ctr">
+              <a:lnSpc>
+                <a:spcPct val="110000"/>
+              </a:lnSpc>
+              <a:spcAft>
+                <a:spcPts val="100"/>
+              </a:spcAft>
+            </a:pPr>
+            <a:r>
+              <a:rPr sz="1100" b="0">
+                <a:solidFill>
+                  <a:srgbClr val="556175"/>
+                </a:solidFill>
+                <a:latin typeface="맑은 고딕"/>
+                <a:ea typeface="맑은 고딕"/>
+                <a:cs typeface="맑은 고딕"/>
+              </a:rPr>
+              <a:t>형식, 규칙의 인용, 승인 역할</a:t>
             </a:r>
           </a:p>
         </p:txBody>
@@ -34769,8 +34572,8 @@
         </p:nvSpPr>
         <p:spPr>
           <a:xfrm>
-            <a:off x="822959" y="3481069"/>
-            <a:ext cx="4632807" cy="1523492"/>
+            <a:off x="4121229" y="4275002"/>
+            <a:ext cx="1527329" cy="337185"/>
           </a:xfrm>
           <a:prstGeom prst="rect">
             <a:avLst/>
@@ -34781,128 +34584,205 @@
           <a:bodyPr wrap="square" anchor="t"/>
           <a:lstStyle/>
           <a:p>
-            <a:pPr algn="l">
+            <a:pPr algn="ctr">
               <a:lnSpc>
                 <a:spcPct val="110000"/>
               </a:lnSpc>
               <a:spcAft>
-                <a:spcPts val="600"/>
+                <a:spcPts val="100"/>
               </a:spcAft>
             </a:pPr>
             <a:r>
-              <a:rPr sz="1450" b="0">
-                <a:solidFill>
-                  <a:srgbClr val="1F2A3A"/>
-                </a:solidFill>
-                <a:latin typeface="맑은 고딕"/>
-                <a:ea typeface="맑은 고딕"/>
-                <a:cs typeface="맑은 고딕"/>
-              </a:rPr>
-              <a:t>• 무엇이: 가드레일, AI의 검토</a:t>
-            </a:r>
-          </a:p>
-          <a:p>
-            <a:pPr algn="l">
+              <a:rPr sz="1350" b="1">
+                <a:solidFill>
+                  <a:srgbClr val="13294B"/>
+                </a:solidFill>
+                <a:latin typeface="맑은 고딕"/>
+                <a:ea typeface="맑은 고딕"/>
+                <a:cs typeface="맑은 고딕"/>
+              </a:rPr>
+              <a:t>올려도 된다</a:t>
+            </a:r>
+          </a:p>
+        </p:txBody>
+      </p:sp>
+      <p:sp>
+        <p:nvSpPr>
+          <p:cNvPr id="11" name="TextBox 10"/>
+          <p:cNvSpPr txBox="1"/>
+          <p:nvPr/>
+        </p:nvSpPr>
+        <p:spPr>
+          <a:xfrm>
+            <a:off x="6008571" y="3636797"/>
+            <a:ext cx="1090949" cy="337185"/>
+          </a:xfrm>
+          <a:prstGeom prst="rect">
+            <a:avLst/>
+          </a:prstGeom>
+          <a:noFill/>
+        </p:spPr>
+        <p:txBody>
+          <a:bodyPr wrap="square" anchor="t"/>
+          <a:lstStyle/>
+          <a:p>
+            <a:pPr algn="ctr">
               <a:lnSpc>
                 <a:spcPct val="110000"/>
               </a:lnSpc>
               <a:spcAft>
-                <a:spcPts val="600"/>
+                <a:spcPts val="100"/>
               </a:spcAft>
             </a:pPr>
             <a:r>
-              <a:rPr sz="1450" b="0">
-                <a:solidFill>
-                  <a:srgbClr val="1F2A3A"/>
-                </a:solidFill>
-                <a:latin typeface="맑은 고딕"/>
-                <a:ea typeface="맑은 고딕"/>
-                <a:cs typeface="맑은 고딕"/>
-              </a:rPr>
-              <a:t>• 무엇을: 결과의 형식, 규칙의 인용, 승인 역할의 유무</a:t>
-            </a:r>
-          </a:p>
-          <a:p>
-            <a:pPr algn="l">
+              <a:rPr sz="1350" b="1">
+                <a:solidFill>
+                  <a:srgbClr val="13294B"/>
+                </a:solidFill>
+                <a:latin typeface="맑은 고딕"/>
+                <a:ea typeface="맑은 고딕"/>
+                <a:cs typeface="맑은 고딕"/>
+              </a:rPr>
+              <a:t>승인 대기</a:t>
+            </a:r>
+          </a:p>
+        </p:txBody>
+      </p:sp>
+      <p:sp>
+        <p:nvSpPr>
+          <p:cNvPr id="12" name="TextBox 11"/>
+          <p:cNvSpPr txBox="1"/>
+          <p:nvPr/>
+        </p:nvSpPr>
+        <p:spPr>
+          <a:xfrm>
+            <a:off x="7055883" y="1769455"/>
+            <a:ext cx="2400088" cy="507618"/>
+          </a:xfrm>
+          <a:prstGeom prst="rect">
+            <a:avLst/>
+          </a:prstGeom>
+          <a:noFill/>
+        </p:spPr>
+        <p:txBody>
+          <a:bodyPr wrap="square" anchor="t"/>
+          <a:lstStyle/>
+          <a:p>
+            <a:pPr algn="ctr">
               <a:lnSpc>
                 <a:spcPct val="110000"/>
               </a:lnSpc>
               <a:spcAft>
-                <a:spcPts val="600"/>
+                <a:spcPts val="100"/>
               </a:spcAft>
             </a:pPr>
             <a:r>
-              <a:rPr sz="1450" b="0">
-                <a:solidFill>
-                  <a:srgbClr val="1F2A3A"/>
-                </a:solidFill>
-                <a:latin typeface="맑은 고딕"/>
-                <a:ea typeface="맑은 고딕"/>
-                <a:cs typeface="맑은 고딕"/>
-              </a:rPr>
-              <a:t>• 그 뒤의 상태: 승인 대기</a:t>
-            </a:r>
-          </a:p>
-        </p:txBody>
-      </p:sp>
-      <p:sp>
-        <p:nvSpPr>
-          <p:cNvPr id="11" name="Rounded Rectangle 10"/>
-          <p:cNvSpPr/>
-          <p:nvPr/>
-        </p:nvSpPr>
-        <p:spPr>
-          <a:xfrm>
-            <a:off x="868680" y="5096002"/>
-            <a:ext cx="1173480" cy="292608"/>
-          </a:xfrm>
-          <a:prstGeom prst="roundRect">
-            <a:avLst>
-              <a:gd name="adj" fmla="val 50000"/>
-            </a:avLst>
-          </a:prstGeom>
-          <a:solidFill>
-            <a:srgbClr val="D3D9E1"/>
-          </a:solidFill>
-          <a:ln>
-            <a:noFill/>
-          </a:ln>
-        </p:spPr>
-        <p:txBody>
-          <a:bodyPr rtlCol="0" anchor="ctr"/>
-          <a:lstStyle/>
-          <a:p>
-            <a:pPr algn="ctr"/>
-          </a:p>
-        </p:txBody>
-      </p:sp>
-      <p:sp>
-        <p:nvSpPr>
-          <p:cNvPr id="12" name="TextBox 11"/>
-          <p:cNvSpPr txBox="1"/>
-          <p:nvPr/>
-        </p:nvSpPr>
-        <p:spPr>
-          <a:xfrm>
-            <a:off x="868680" y="5096002"/>
-            <a:ext cx="1173480" cy="292608"/>
-          </a:xfrm>
-          <a:prstGeom prst="rect">
-            <a:avLst/>
-          </a:prstGeom>
-          <a:noFill/>
-        </p:spPr>
-        <p:txBody>
-          <a:bodyPr wrap="square" anchor="ctr"/>
-          <a:lstStyle/>
+              <a:rPr sz="1350" b="1">
+                <a:solidFill>
+                  <a:srgbClr val="1A6FC4"/>
+                </a:solidFill>
+                <a:latin typeface="맑은 고딕"/>
+                <a:ea typeface="맑은 고딕"/>
+                <a:cs typeface="맑은 고딕"/>
+              </a:rPr>
+              <a:t>담당자의 승인</a:t>
+            </a:r>
+          </a:p>
           <a:p>
             <a:pPr algn="ctr">
               <a:lnSpc>
                 <a:spcPct val="110000"/>
               </a:lnSpc>
-            </a:pPr>
-            <a:r>
-              <a:rPr sz="1200" b="1">
+              <a:spcAft>
+                <a:spcPts val="100"/>
+              </a:spcAft>
+            </a:pPr>
+            <a:r>
+              <a:rPr sz="1100" b="0">
+                <a:solidFill>
+                  <a:srgbClr val="556175"/>
+                </a:solidFill>
+                <a:latin typeface="맑은 고딕"/>
+                <a:ea typeface="맑은 고딕"/>
+                <a:cs typeface="맑은 고딕"/>
+              </a:rPr>
+              <a:t>추천의 내용과 지금의 상황을 본다</a:t>
+            </a:r>
+          </a:p>
+        </p:txBody>
+      </p:sp>
+      <p:sp>
+        <p:nvSpPr>
+          <p:cNvPr id="13" name="TextBox 12"/>
+          <p:cNvSpPr txBox="1"/>
+          <p:nvPr/>
+        </p:nvSpPr>
+        <p:spPr>
+          <a:xfrm>
+            <a:off x="7492262" y="4275002"/>
+            <a:ext cx="1527329" cy="337185"/>
+          </a:xfrm>
+          <a:prstGeom prst="rect">
+            <a:avLst/>
+          </a:prstGeom>
+          <a:noFill/>
+        </p:spPr>
+        <p:txBody>
+          <a:bodyPr wrap="square" anchor="t"/>
+          <a:lstStyle/>
+          <a:p>
+            <a:pPr algn="ctr">
+              <a:lnSpc>
+                <a:spcPct val="110000"/>
+              </a:lnSpc>
+              <a:spcAft>
+                <a:spcPts val="100"/>
+              </a:spcAft>
+            </a:pPr>
+            <a:r>
+              <a:rPr sz="1350" b="1">
+                <a:solidFill>
+                  <a:srgbClr val="1A6FC4"/>
+                </a:solidFill>
+                <a:latin typeface="맑은 고딕"/>
+                <a:ea typeface="맑은 고딕"/>
+                <a:cs typeface="맑은 고딕"/>
+              </a:rPr>
+              <a:t>실행해도 된다</a:t>
+            </a:r>
+          </a:p>
+        </p:txBody>
+      </p:sp>
+      <p:sp>
+        <p:nvSpPr>
+          <p:cNvPr id="14" name="TextBox 13"/>
+          <p:cNvSpPr txBox="1"/>
+          <p:nvPr/>
+        </p:nvSpPr>
+        <p:spPr>
+          <a:xfrm>
+            <a:off x="9455972" y="3802258"/>
+            <a:ext cx="1963709" cy="507618"/>
+          </a:xfrm>
+          <a:prstGeom prst="rect">
+            <a:avLst/>
+          </a:prstGeom>
+          <a:noFill/>
+        </p:spPr>
+        <p:txBody>
+          <a:bodyPr wrap="square" anchor="t"/>
+          <a:lstStyle/>
+          <a:p>
+            <a:pPr algn="ctr">
+              <a:lnSpc>
+                <a:spcPct val="110000"/>
+              </a:lnSpc>
+              <a:spcAft>
+                <a:spcPts val="100"/>
+              </a:spcAft>
+            </a:pPr>
+            <a:r>
+              <a:rPr sz="1350" b="1">
                 <a:solidFill>
                   <a:srgbClr val="13294B"/>
                 </a:solidFill>
@@ -34910,97 +34790,95 @@
                 <a:ea typeface="맑은 고딕"/>
                 <a:cs typeface="맑은 고딕"/>
               </a:rPr>
-              <a:t>올려도 된다</a:t>
-            </a:r>
-          </a:p>
-        </p:txBody>
-      </p:sp>
-      <p:sp>
-        <p:nvSpPr>
-          <p:cNvPr id="13" name="Rounded Rectangle 12"/>
-          <p:cNvSpPr/>
-          <p:nvPr/>
-        </p:nvSpPr>
-        <p:spPr>
-          <a:xfrm>
-            <a:off x="6461607" y="2429509"/>
-            <a:ext cx="5181447" cy="3123692"/>
-          </a:xfrm>
-          <a:prstGeom prst="roundRect">
-            <a:avLst>
-              <a:gd name="adj" fmla="val 4000"/>
-            </a:avLst>
-          </a:prstGeom>
-          <a:solidFill>
-            <a:srgbClr val="E7F3FD"/>
-          </a:solidFill>
-          <a:ln w="28575">
-            <a:solidFill>
-              <a:srgbClr val="5CB8F2"/>
-            </a:solidFill>
-          </a:ln>
-        </p:spPr>
-        <p:txBody>
-          <a:bodyPr rtlCol="0" anchor="ctr"/>
-          <a:lstStyle/>
-          <a:p>
-            <a:pPr algn="ctr"/>
-          </a:p>
-        </p:txBody>
-      </p:sp>
-      <p:sp>
-        <p:nvSpPr>
-          <p:cNvPr id="14" name="Oval 13"/>
-          <p:cNvSpPr/>
-          <p:nvPr/>
-        </p:nvSpPr>
-        <p:spPr>
-          <a:xfrm>
-            <a:off x="6735927" y="2630678"/>
-            <a:ext cx="731520" cy="731520"/>
-          </a:xfrm>
-          <a:prstGeom prst="ellipse">
-            <a:avLst/>
-          </a:prstGeom>
-          <a:solidFill>
-            <a:srgbClr val="5CB8F2"/>
-          </a:solidFill>
-          <a:ln>
-            <a:noFill/>
-          </a:ln>
-        </p:spPr>
-        <p:txBody>
-          <a:bodyPr rtlCol="0" anchor="ctr"/>
-          <a:lstStyle/>
-          <a:p>
-            <a:pPr algn="ctr"/>
-          </a:p>
-        </p:txBody>
-      </p:sp>
-      <p:pic>
-        <p:nvPicPr>
-          <p:cNvPr id="15" name="아이콘:user-check" descr="user-check_13294B_1.6.png"/>
-          <p:cNvPicPr>
-            <a:picLocks noChangeAspect="1"/>
-          </p:cNvPicPr>
-          <p:nvPr/>
-        </p:nvPicPr>
-        <p:blipFill>
-          <a:blip r:embed="rId4"/>
-          <a:stretch>
-            <a:fillRect/>
-          </a:stretch>
-        </p:blipFill>
-        <p:spPr>
-          <a:xfrm>
-            <a:off x="6889546" y="2784297"/>
-            <a:ext cx="424281" cy="424281"/>
-          </a:xfrm>
-          <a:prstGeom prst="rect">
-            <a:avLst/>
-          </a:prstGeom>
-        </p:spPr>
-      </p:pic>
+              <a:t>설비 명령</a:t>
+            </a:r>
+          </a:p>
+          <a:p>
+            <a:pPr algn="ctr">
+              <a:lnSpc>
+                <a:spcPct val="110000"/>
+              </a:lnSpc>
+              <a:spcAft>
+                <a:spcPts val="100"/>
+              </a:spcAft>
+            </a:pPr>
+            <a:r>
+              <a:rPr sz="1100" b="0">
+                <a:solidFill>
+                  <a:srgbClr val="556175"/>
+                </a:solidFill>
+                <a:latin typeface="맑은 고딕"/>
+                <a:ea typeface="맑은 고딕"/>
+                <a:cs typeface="맑은 고딕"/>
+              </a:rPr>
+              <a:t>승인 뒤에만 만들어진다</a:t>
+            </a:r>
+          </a:p>
+        </p:txBody>
+      </p:sp>
+      <p:sp>
+        <p:nvSpPr>
+          <p:cNvPr id="15" name="TextBox 14"/>
+          <p:cNvSpPr txBox="1"/>
+          <p:nvPr/>
+        </p:nvSpPr>
+        <p:spPr>
+          <a:xfrm>
+            <a:off x="8823221" y="5409590"/>
+            <a:ext cx="1963709" cy="507618"/>
+          </a:xfrm>
+          <a:prstGeom prst="rect">
+            <a:avLst/>
+          </a:prstGeom>
+          <a:noFill/>
+        </p:spPr>
+        <p:txBody>
+          <a:bodyPr wrap="square" anchor="t"/>
+          <a:lstStyle/>
+          <a:p>
+            <a:pPr algn="ctr">
+              <a:lnSpc>
+                <a:spcPct val="110000"/>
+              </a:lnSpc>
+              <a:spcAft>
+                <a:spcPts val="100"/>
+              </a:spcAft>
+            </a:pPr>
+            <a:r>
+              <a:rPr sz="1350" b="1">
+                <a:solidFill>
+                  <a:srgbClr val="13294B"/>
+                </a:solidFill>
+                <a:latin typeface="맑은 고딕"/>
+                <a:ea typeface="맑은 고딕"/>
+                <a:cs typeface="맑은 고딕"/>
+              </a:rPr>
+              <a:t>결정 기록</a:t>
+            </a:r>
+          </a:p>
+          <a:p>
+            <a:pPr algn="ctr">
+              <a:lnSpc>
+                <a:spcPct val="110000"/>
+              </a:lnSpc>
+              <a:spcAft>
+                <a:spcPts val="100"/>
+              </a:spcAft>
+            </a:pPr>
+            <a:r>
+              <a:rPr sz="1100" b="0">
+                <a:solidFill>
+                  <a:srgbClr val="556175"/>
+                </a:solidFill>
+                <a:latin typeface="맑은 고딕"/>
+                <a:ea typeface="맑은 고딕"/>
+                <a:cs typeface="맑은 고딕"/>
+              </a:rPr>
+              <a:t>승인한 사람과 역할</a:t>
+            </a:r>
+          </a:p>
+        </p:txBody>
+      </p:sp>
       <p:sp>
         <p:nvSpPr>
           <p:cNvPr id="16" name="TextBox 15"/>
@@ -35009,25 +34887,28 @@
         </p:nvSpPr>
         <p:spPr>
           <a:xfrm>
-            <a:off x="7604607" y="2630678"/>
-            <a:ext cx="3855567" cy="731520"/>
-          </a:xfrm>
-          <a:prstGeom prst="rect">
-            <a:avLst/>
-          </a:prstGeom>
-          <a:noFill/>
-        </p:spPr>
-        <p:txBody>
-          <a:bodyPr wrap="square" anchor="ctr"/>
-          <a:lstStyle/>
-          <a:p>
-            <a:pPr algn="l">
-              <a:lnSpc>
-                <a:spcPct val="110000"/>
-              </a:lnSpc>
-            </a:pPr>
-            <a:r>
-              <a:rPr sz="2000" b="1">
+            <a:off x="657464" y="5385953"/>
+            <a:ext cx="1690971" cy="507618"/>
+          </a:xfrm>
+          <a:prstGeom prst="rect">
+            <a:avLst/>
+          </a:prstGeom>
+          <a:noFill/>
+        </p:spPr>
+        <p:txBody>
+          <a:bodyPr wrap="square" anchor="t"/>
+          <a:lstStyle/>
+          <a:p>
+            <a:pPr algn="ctr">
+              <a:lnSpc>
+                <a:spcPct val="110000"/>
+              </a:lnSpc>
+              <a:spcAft>
+                <a:spcPts val="100"/>
+              </a:spcAft>
+            </a:pPr>
+            <a:r>
+              <a:rPr sz="1350" b="1">
                 <a:solidFill>
                   <a:srgbClr val="13294B"/>
                 </a:solidFill>
@@ -35035,7 +34916,28 @@
                 <a:ea typeface="맑은 고딕"/>
                 <a:cs typeface="맑은 고딕"/>
               </a:rPr>
-              <a:t>승인되었다</a:t>
+              <a:t>에이전트의 질문</a:t>
+            </a:r>
+          </a:p>
+          <a:p>
+            <a:pPr algn="ctr">
+              <a:lnSpc>
+                <a:spcPct val="110000"/>
+              </a:lnSpc>
+              <a:spcAft>
+                <a:spcPts val="100"/>
+              </a:spcAft>
+            </a:pPr>
+            <a:r>
+              <a:rPr sz="1100" b="0">
+                <a:solidFill>
+                  <a:srgbClr val="556175"/>
+                </a:solidFill>
+                <a:latin typeface="맑은 고딕"/>
+                <a:ea typeface="맑은 고딕"/>
+                <a:cs typeface="맑은 고딕"/>
+              </a:rPr>
+              <a:t>필수 정보가 없을 때</a:t>
             </a:r>
           </a:p>
         </p:txBody>
@@ -35048,8 +34950,8 @@
         </p:nvSpPr>
         <p:spPr>
           <a:xfrm>
-            <a:off x="6735927" y="3481069"/>
-            <a:ext cx="4632807" cy="1523492"/>
+            <a:off x="2441166" y="5385953"/>
+            <a:ext cx="1854614" cy="507618"/>
           </a:xfrm>
           <a:prstGeom prst="rect">
             <a:avLst/>
@@ -35060,204 +34962,45 @@
           <a:bodyPr wrap="square" anchor="t"/>
           <a:lstStyle/>
           <a:p>
-            <a:pPr algn="l">
+            <a:pPr algn="ctr">
               <a:lnSpc>
                 <a:spcPct val="110000"/>
               </a:lnSpc>
               <a:spcAft>
-                <a:spcPts val="600"/>
+                <a:spcPts val="100"/>
               </a:spcAft>
             </a:pPr>
             <a:r>
-              <a:rPr sz="1450" b="0">
-                <a:solidFill>
-                  <a:srgbClr val="1F2A3A"/>
-                </a:solidFill>
-                <a:latin typeface="맑은 고딕"/>
-                <a:ea typeface="맑은 고딕"/>
-                <a:cs typeface="맑은 고딕"/>
-              </a:rPr>
-              <a:t>• 누가: 승인 역할의 담당자</a:t>
-            </a:r>
-          </a:p>
-          <a:p>
-            <a:pPr algn="l">
+              <a:rPr sz="1350" b="1">
+                <a:solidFill>
+                  <a:srgbClr val="13294B"/>
+                </a:solidFill>
+                <a:latin typeface="맑은 고딕"/>
+                <a:ea typeface="맑은 고딕"/>
+                <a:cs typeface="맑은 고딕"/>
+              </a:rPr>
+              <a:t>멈춘 작업 닫기</a:t>
+            </a:r>
+          </a:p>
+          <a:p>
+            <a:pPr algn="ctr">
               <a:lnSpc>
                 <a:spcPct val="110000"/>
               </a:lnSpc>
               <a:spcAft>
-                <a:spcPts val="600"/>
+                <a:spcPts val="100"/>
               </a:spcAft>
             </a:pPr>
             <a:r>
-              <a:rPr sz="1450" b="0">
-                <a:solidFill>
-                  <a:srgbClr val="1F2A3A"/>
-                </a:solidFill>
-                <a:latin typeface="맑은 고딕"/>
-                <a:ea typeface="맑은 고딕"/>
-                <a:cs typeface="맑은 고딕"/>
-              </a:rPr>
-              <a:t>• 무엇을: 추천의 내용과 지금의 상황</a:t>
-            </a:r>
-          </a:p>
-          <a:p>
-            <a:pPr algn="l">
-              <a:lnSpc>
-                <a:spcPct val="110000"/>
-              </a:lnSpc>
-              <a:spcAft>
-                <a:spcPts val="600"/>
-              </a:spcAft>
-            </a:pPr>
-            <a:r>
-              <a:rPr sz="1450" b="0">
-                <a:solidFill>
-                  <a:srgbClr val="1F2A3A"/>
-                </a:solidFill>
-                <a:latin typeface="맑은 고딕"/>
-                <a:ea typeface="맑은 고딕"/>
-                <a:cs typeface="맑은 고딕"/>
-              </a:rPr>
-              <a:t>• 남는 것: 결정 기록(승인한 사람과 역할)</a:t>
-            </a:r>
-          </a:p>
-        </p:txBody>
-      </p:sp>
-      <p:sp>
-        <p:nvSpPr>
-          <p:cNvPr id="18" name="Rounded Rectangle 17"/>
-          <p:cNvSpPr/>
-          <p:nvPr/>
-        </p:nvSpPr>
-        <p:spPr>
-          <a:xfrm>
-            <a:off x="6781647" y="5096002"/>
-            <a:ext cx="1325879" cy="292608"/>
-          </a:xfrm>
-          <a:prstGeom prst="roundRect">
-            <a:avLst>
-              <a:gd name="adj" fmla="val 50000"/>
-            </a:avLst>
-          </a:prstGeom>
-          <a:solidFill>
-            <a:srgbClr val="5CB8F2"/>
-          </a:solidFill>
-          <a:ln>
-            <a:noFill/>
-          </a:ln>
-        </p:spPr>
-        <p:txBody>
-          <a:bodyPr rtlCol="0" anchor="ctr"/>
-          <a:lstStyle/>
-          <a:p>
-            <a:pPr algn="ctr"/>
-          </a:p>
-        </p:txBody>
-      </p:sp>
-      <p:sp>
-        <p:nvSpPr>
-          <p:cNvPr id="19" name="TextBox 18"/>
-          <p:cNvSpPr txBox="1"/>
-          <p:nvPr/>
-        </p:nvSpPr>
-        <p:spPr>
-          <a:xfrm>
-            <a:off x="6781647" y="5096002"/>
-            <a:ext cx="1325879" cy="292608"/>
-          </a:xfrm>
-          <a:prstGeom prst="rect">
-            <a:avLst/>
-          </a:prstGeom>
-          <a:noFill/>
-        </p:spPr>
-        <p:txBody>
-          <a:bodyPr wrap="square" anchor="ctr"/>
-          <a:lstStyle/>
-          <a:p>
-            <a:pPr algn="ctr">
-              <a:lnSpc>
-                <a:spcPct val="110000"/>
-              </a:lnSpc>
-            </a:pPr>
-            <a:r>
-              <a:rPr sz="1200" b="1">
-                <a:solidFill>
-                  <a:srgbClr val="13294B"/>
-                </a:solidFill>
-                <a:latin typeface="맑은 고딕"/>
-                <a:ea typeface="맑은 고딕"/>
-                <a:cs typeface="맑은 고딕"/>
-              </a:rPr>
-              <a:t>실행해도 된다</a:t>
-            </a:r>
-          </a:p>
-        </p:txBody>
-      </p:sp>
-      <p:sp>
-        <p:nvSpPr>
-          <p:cNvPr id="20" name="Oval 19"/>
-          <p:cNvSpPr/>
-          <p:nvPr/>
-        </p:nvSpPr>
-        <p:spPr>
-          <a:xfrm>
-            <a:off x="5821527" y="3717036"/>
-            <a:ext cx="548640" cy="548640"/>
-          </a:xfrm>
-          <a:prstGeom prst="ellipse">
-            <a:avLst/>
-          </a:prstGeom>
-          <a:solidFill>
-            <a:srgbClr val="13294B"/>
-          </a:solidFill>
-          <a:ln>
-            <a:noFill/>
-          </a:ln>
-        </p:spPr>
-        <p:txBody>
-          <a:bodyPr rtlCol="0" anchor="ctr"/>
-          <a:lstStyle/>
-          <a:p>
-            <a:pPr algn="ctr"/>
-          </a:p>
-        </p:txBody>
-      </p:sp>
-      <p:sp>
-        <p:nvSpPr>
-          <p:cNvPr id="21" name="TextBox 20"/>
-          <p:cNvSpPr txBox="1"/>
-          <p:nvPr/>
-        </p:nvSpPr>
-        <p:spPr>
-          <a:xfrm>
-            <a:off x="5821527" y="3717036"/>
-            <a:ext cx="548640" cy="548640"/>
-          </a:xfrm>
-          <a:prstGeom prst="rect">
-            <a:avLst/>
-          </a:prstGeom>
-          <a:noFill/>
-        </p:spPr>
-        <p:txBody>
-          <a:bodyPr wrap="square" anchor="ctr"/>
-          <a:lstStyle/>
-          <a:p>
-            <a:pPr algn="ctr">
-              <a:lnSpc>
-                <a:spcPct val="110000"/>
-              </a:lnSpc>
-            </a:pPr>
-            <a:r>
-              <a:rPr sz="1400" b="1">
-                <a:solidFill>
-                  <a:srgbClr val="FFFFFF"/>
-                </a:solidFill>
-                <a:latin typeface="맑은 고딕"/>
-                <a:ea typeface="맑은 고딕"/>
-                <a:cs typeface="맑은 고딕"/>
-              </a:rPr>
-              <a:t>vs</a:t>
+              <a:rPr sz="1100" b="0">
+                <a:solidFill>
+                  <a:srgbClr val="556175"/>
+                </a:solidFill>
+                <a:latin typeface="맑은 고딕"/>
+                <a:ea typeface="맑은 고딕"/>
+                <a:cs typeface="맑은 고딕"/>
+              </a:rPr>
+              <a:t>한도를 넘겨 멈췄을 때</a:t>
             </a:r>
           </a:p>
         </p:txBody>
@@ -35442,7 +35185,7 @@
         </p:nvSpPr>
         <p:spPr>
           <a:xfrm>
-            <a:off x="1704405" y="2215225"/>
+            <a:off x="1319150" y="2019360"/>
             <a:ext cx="1463040" cy="1463040"/>
           </a:xfrm>
           <a:prstGeom prst="ellipse">
@@ -35481,7 +35224,7 @@
         </p:blipFill>
         <p:spPr>
           <a:xfrm>
-            <a:off x="2260360" y="2420051"/>
+            <a:off x="1875105" y="2224186"/>
             <a:ext cx="351129" cy="351129"/>
           </a:xfrm>
           <a:prstGeom prst="rect">
@@ -35497,7 +35240,7 @@
         </p:nvSpPr>
         <p:spPr>
           <a:xfrm>
-            <a:off x="1806817" y="2800441"/>
+            <a:off x="1421562" y="2604576"/>
             <a:ext cx="1258214" cy="731520"/>
           </a:xfrm>
           <a:prstGeom prst="rect">
@@ -35554,7 +35297,7 @@
         </p:nvSpPr>
         <p:spPr>
           <a:xfrm>
-            <a:off x="1704405" y="4304446"/>
+            <a:off x="1319150" y="4500311"/>
             <a:ext cx="1463040" cy="1463040"/>
           </a:xfrm>
           <a:prstGeom prst="ellipse">
@@ -35593,7 +35336,7 @@
         </p:blipFill>
         <p:spPr>
           <a:xfrm>
-            <a:off x="2260360" y="4509272"/>
+            <a:off x="1875105" y="4705136"/>
             <a:ext cx="351129" cy="351129"/>
           </a:xfrm>
           <a:prstGeom prst="rect">
@@ -35609,7 +35352,7 @@
         </p:nvSpPr>
         <p:spPr>
           <a:xfrm>
-            <a:off x="1806817" y="4889662"/>
+            <a:off x="1421562" y="5085527"/>
             <a:ext cx="1258214" cy="731520"/>
           </a:xfrm>
           <a:prstGeom prst="rect">
@@ -35666,7 +35409,7 @@
         </p:nvSpPr>
         <p:spPr>
           <a:xfrm>
-            <a:off x="4015935" y="3259836"/>
+            <a:off x="4208562" y="3259836"/>
             <a:ext cx="1463040" cy="1463040"/>
           </a:xfrm>
           <a:prstGeom prst="ellipse">
@@ -35705,7 +35448,7 @@
         </p:blipFill>
         <p:spPr>
           <a:xfrm>
-            <a:off x="4571890" y="3464661"/>
+            <a:off x="4764517" y="3464661"/>
             <a:ext cx="351129" cy="351129"/>
           </a:xfrm>
           <a:prstGeom prst="rect">
@@ -35721,7 +35464,7 @@
         </p:nvSpPr>
         <p:spPr>
           <a:xfrm>
-            <a:off x="4118347" y="3845052"/>
+            <a:off x="4310975" y="3845052"/>
             <a:ext cx="1258214" cy="731520"/>
           </a:xfrm>
           <a:prstGeom prst="rect">
@@ -36114,8 +35857,8 @@
         </p:nvCxnSpPr>
         <p:spPr>
           <a:xfrm>
-            <a:off x="3144198" y="3266823"/>
-            <a:ext cx="869985" cy="393157"/>
+            <a:off x="2764873" y="3057500"/>
+            <a:ext cx="1435799" cy="616414"/>
           </a:xfrm>
           <a:prstGeom prst="line">
             <a:avLst/>
@@ -36136,7 +35879,7 @@
         </p:nvSpPr>
         <p:spPr>
           <a:xfrm>
-            <a:off x="3054998" y="3097642"/>
+            <a:off x="2958580" y="2999947"/>
             <a:ext cx="1048385" cy="292608"/>
           </a:xfrm>
           <a:prstGeom prst="roundRect">
@@ -36169,7 +35912,7 @@
         </p:nvSpPr>
         <p:spPr>
           <a:xfrm>
-            <a:off x="3054998" y="3097642"/>
+            <a:off x="2958580" y="2999947"/>
             <a:ext cx="1048385" cy="292608"/>
           </a:xfrm>
           <a:prstGeom prst="rect">
@@ -36208,8 +35951,8 @@
         </p:nvCxnSpPr>
         <p:spPr>
           <a:xfrm>
-            <a:off x="2435925" y="3723985"/>
-            <a:ext cx="0" cy="507309"/>
+            <a:off x="2050670" y="3528120"/>
+            <a:ext cx="0" cy="899039"/>
           </a:xfrm>
           <a:prstGeom prst="line">
             <a:avLst/>
@@ -36230,7 +35973,7 @@
         </p:nvSpPr>
         <p:spPr>
           <a:xfrm>
-            <a:off x="2527365" y="3831335"/>
+            <a:off x="2142110" y="3831335"/>
             <a:ext cx="1194435" cy="292608"/>
           </a:xfrm>
           <a:prstGeom prst="roundRect">
@@ -36263,7 +36006,7 @@
         </p:nvSpPr>
         <p:spPr>
           <a:xfrm>
-            <a:off x="2527365" y="3831335"/>
+            <a:off x="2142110" y="3831335"/>
             <a:ext cx="1194435" cy="292608"/>
           </a:xfrm>
           <a:prstGeom prst="rect">
@@ -36302,8 +36045,8 @@
         </p:nvCxnSpPr>
         <p:spPr>
           <a:xfrm flipV="1">
-            <a:off x="3144198" y="4322731"/>
-            <a:ext cx="869985" cy="393157"/>
+            <a:off x="2764873" y="4308797"/>
+            <a:ext cx="1435799" cy="616414"/>
           </a:xfrm>
           <a:prstGeom prst="line">
             <a:avLst/>
@@ -36324,7 +36067,7 @@
         </p:nvSpPr>
         <p:spPr>
           <a:xfrm>
-            <a:off x="2908948" y="4153549"/>
+            <a:off x="2812530" y="4251244"/>
             <a:ext cx="1340485" cy="292608"/>
           </a:xfrm>
           <a:prstGeom prst="roundRect">
@@ -36357,7 +36100,7 @@
         </p:nvSpPr>
         <p:spPr>
           <a:xfrm>
-            <a:off x="2908948" y="4153549"/>
+            <a:off x="2812530" y="4251244"/>
             <a:ext cx="1340485" cy="292608"/>
           </a:xfrm>
           <a:prstGeom prst="rect">
@@ -36396,8 +36139,8 @@
         </p:nvCxnSpPr>
         <p:spPr>
           <a:xfrm>
-            <a:off x="5524695" y="3991356"/>
-            <a:ext cx="922245" cy="0"/>
+            <a:off x="5717322" y="3991356"/>
+            <a:ext cx="729618" cy="0"/>
           </a:xfrm>
           <a:prstGeom prst="line">
             <a:avLst/>
@@ -36418,7 +36161,7 @@
         </p:nvSpPr>
         <p:spPr>
           <a:xfrm>
-            <a:off x="5702607" y="3625596"/>
+            <a:off x="5798921" y="3625596"/>
             <a:ext cx="566420" cy="292608"/>
           </a:xfrm>
           <a:prstGeom prst="roundRect">
@@ -36451,7 +36194,7 @@
         </p:nvSpPr>
         <p:spPr>
           <a:xfrm>
-            <a:off x="5702607" y="3625596"/>
+            <a:off x="5798921" y="3625596"/>
             <a:ext cx="566420" cy="292608"/>
           </a:xfrm>
           <a:prstGeom prst="rect">
@@ -36850,7 +36593,7 @@
         </p:nvSpPr>
         <p:spPr>
           <a:xfrm>
-            <a:off x="1935441" y="3146679"/>
+            <a:off x="1935441" y="2937510"/>
             <a:ext cx="8320811" cy="36576"/>
           </a:xfrm>
           <a:prstGeom prst="rect">
@@ -36879,7 +36622,7 @@
         </p:nvSpPr>
         <p:spPr>
           <a:xfrm>
-            <a:off x="1501101" y="2730627"/>
+            <a:off x="1501101" y="2521458"/>
             <a:ext cx="868680" cy="868680"/>
           </a:xfrm>
           <a:prstGeom prst="ellipse">
@@ -36910,7 +36653,7 @@
         </p:nvSpPr>
         <p:spPr>
           <a:xfrm>
-            <a:off x="1501101" y="2730627"/>
+            <a:off x="1501101" y="2521458"/>
             <a:ext cx="868680" cy="868680"/>
           </a:xfrm>
           <a:prstGeom prst="rect">
@@ -36949,8 +36692,8 @@
         </p:nvSpPr>
         <p:spPr>
           <a:xfrm>
-            <a:off x="621791" y="3782187"/>
-            <a:ext cx="2627299" cy="1469898"/>
+            <a:off x="621791" y="3573018"/>
+            <a:ext cx="2627299" cy="1888236"/>
           </a:xfrm>
           <a:prstGeom prst="rect">
             <a:avLst/>
@@ -37002,6 +36745,27 @@
               <a:t>새 조건의 계약과 금지 조건, 수용 기준을 적는다</a:t>
             </a:r>
           </a:p>
+          <a:p>
+            <a:pPr algn="ctr">
+              <a:lnSpc>
+                <a:spcPct val="110000"/>
+              </a:lnSpc>
+              <a:spcAft>
+                <a:spcPts val="400"/>
+              </a:spcAft>
+            </a:pPr>
+            <a:r>
+              <a:rPr sz="1350" b="0">
+                <a:solidFill>
+                  <a:srgbClr val="1F2A3A"/>
+                </a:solidFill>
+                <a:latin typeface="맑은 고딕"/>
+                <a:ea typeface="맑은 고딕"/>
+                <a:cs typeface="맑은 고딕"/>
+              </a:rPr>
+              <a:t>예: 긴급 조건을 더하고 「승인 없이 확정 금지」는 그대로 둔다</a:t>
+            </a:r>
+          </a:p>
         </p:txBody>
       </p:sp>
       <p:sp>
@@ -37012,7 +36776,7 @@
         </p:nvSpPr>
         <p:spPr>
           <a:xfrm>
-            <a:off x="4274705" y="2730627"/>
+            <a:off x="4274705" y="2521458"/>
             <a:ext cx="868680" cy="868680"/>
           </a:xfrm>
           <a:prstGeom prst="ellipse">
@@ -37043,7 +36807,7 @@
         </p:nvSpPr>
         <p:spPr>
           <a:xfrm>
-            <a:off x="4274705" y="2730627"/>
+            <a:off x="4274705" y="2521458"/>
             <a:ext cx="868680" cy="868680"/>
           </a:xfrm>
           <a:prstGeom prst="rect">
@@ -37082,8 +36846,8 @@
         </p:nvSpPr>
         <p:spPr>
           <a:xfrm>
-            <a:off x="3395395" y="3782187"/>
-            <a:ext cx="2627299" cy="1469898"/>
+            <a:off x="3395395" y="3573018"/>
+            <a:ext cx="2627299" cy="1888236"/>
           </a:xfrm>
           <a:prstGeom prst="rect">
             <a:avLst/>
@@ -37135,6 +36899,27 @@
               <a:t>새 조건의 Given · When · Then과 기대값을 적는다</a:t>
             </a:r>
           </a:p>
+          <a:p>
+            <a:pPr algn="ctr">
+              <a:lnSpc>
+                <a:spcPct val="110000"/>
+              </a:lnSpc>
+              <a:spcAft>
+                <a:spcPts val="400"/>
+              </a:spcAft>
+            </a:pPr>
+            <a:r>
+              <a:rPr sz="1350" b="0">
+                <a:solidFill>
+                  <a:srgbClr val="1F2A3A"/>
+                </a:solidFill>
+                <a:latin typeface="맑은 고딕"/>
+                <a:ea typeface="맑은 고딕"/>
+                <a:cs typeface="맑은 고딕"/>
+              </a:rPr>
+              <a:t>예: 긴급 요청의 시나리오 한 편</a:t>
+            </a:r>
+          </a:p>
         </p:txBody>
       </p:sp>
       <p:sp>
@@ -37145,7 +36930,7 @@
         </p:nvSpPr>
         <p:spPr>
           <a:xfrm>
-            <a:off x="7048309" y="2730627"/>
+            <a:off x="7048309" y="2521458"/>
             <a:ext cx="868680" cy="868680"/>
           </a:xfrm>
           <a:prstGeom prst="ellipse">
@@ -37176,7 +36961,7 @@
         </p:nvSpPr>
         <p:spPr>
           <a:xfrm>
-            <a:off x="7048309" y="2730627"/>
+            <a:off x="7048309" y="2521458"/>
             <a:ext cx="868680" cy="868680"/>
           </a:xfrm>
           <a:prstGeom prst="rect">
@@ -37215,8 +37000,8 @@
         </p:nvSpPr>
         <p:spPr>
           <a:xfrm>
-            <a:off x="6168999" y="3782187"/>
-            <a:ext cx="2627299" cy="1469898"/>
+            <a:off x="6168999" y="3573018"/>
+            <a:ext cx="2627299" cy="1888236"/>
           </a:xfrm>
           <a:prstGeom prst="rect">
             <a:avLst/>
@@ -37268,6 +37053,27 @@
               <a:t>지침이나 코드를 명세에 맞추어 고친다</a:t>
             </a:r>
           </a:p>
+          <a:p>
+            <a:pPr algn="ctr">
+              <a:lnSpc>
+                <a:spcPct val="110000"/>
+              </a:lnSpc>
+              <a:spcAft>
+                <a:spcPts val="400"/>
+              </a:spcAft>
+            </a:pPr>
+            <a:r>
+              <a:rPr sz="1350" b="0">
+                <a:solidFill>
+                  <a:srgbClr val="1F2A3A"/>
+                </a:solidFill>
+                <a:latin typeface="맑은 고딕"/>
+                <a:ea typeface="맑은 고딕"/>
+                <a:cs typeface="맑은 고딕"/>
+              </a:rPr>
+              <a:t>예: 스킬의 절차나 해당 기능의 코드</a:t>
+            </a:r>
+          </a:p>
         </p:txBody>
       </p:sp>
       <p:sp>
@@ -37278,7 +37084,7 @@
         </p:nvSpPr>
         <p:spPr>
           <a:xfrm>
-            <a:off x="9821913" y="2730627"/>
+            <a:off x="9821913" y="2521458"/>
             <a:ext cx="868680" cy="868680"/>
           </a:xfrm>
           <a:prstGeom prst="ellipse">
@@ -37307,7 +37113,7 @@
         </p:nvSpPr>
         <p:spPr>
           <a:xfrm>
-            <a:off x="9821913" y="2730627"/>
+            <a:off x="9821913" y="2521458"/>
             <a:ext cx="868680" cy="868680"/>
           </a:xfrm>
           <a:prstGeom prst="rect">
@@ -37346,8 +37152,8 @@
         </p:nvSpPr>
         <p:spPr>
           <a:xfrm>
-            <a:off x="8942603" y="3782187"/>
-            <a:ext cx="2627299" cy="1469898"/>
+            <a:off x="8942603" y="3573018"/>
+            <a:ext cx="2627299" cy="1888236"/>
           </a:xfrm>
           <a:prstGeom prst="rect">
             <a:avLst/>
@@ -37397,6 +37203,27 @@
                 <a:cs typeface="맑은 고딕"/>
               </a:rPr>
               <a:t>새 시나리오와 기존 시나리오가 모두 통과하는지 확인한다</a:t>
+            </a:r>
+          </a:p>
+          <a:p>
+            <a:pPr algn="ctr">
+              <a:lnSpc>
+                <a:spcPct val="110000"/>
+              </a:lnSpc>
+              <a:spcAft>
+                <a:spcPts val="400"/>
+              </a:spcAft>
+            </a:pPr>
+            <a:r>
+              <a:rPr sz="1350" b="0">
+                <a:solidFill>
+                  <a:srgbClr val="1F2A3A"/>
+                </a:solidFill>
+                <a:latin typeface="맑은 고딕"/>
+                <a:ea typeface="맑은 고딕"/>
+                <a:cs typeface="맑은 고딕"/>
+              </a:rPr>
+              <a:t>예: 일반 요청, 보류, 거절의 시나리오까지</a:t>
             </a:r>
           </a:p>
         </p:txBody>
@@ -38296,7 +38123,7 @@
                 <a:ea typeface="맑은 고딕"/>
                 <a:cs typeface="맑은 고딕"/>
               </a:rPr>
-              <a:t>목표, 스킬과 도구, 출력 계약이라는 틀은 세 에이전트가 같고, 그 자리에 넣은 것이 달라서 서로 다른 카드가 나온다.</a:t>
+              <a:t>목표, 스킬과 도구, 출력 계약이라는 틀은 세 에이전트가 같고, 그 자리에 넣은 것이 달라서 서로 다른 산출물이 나온다.</a:t>
             </a:r>
           </a:p>
         </p:txBody>
@@ -38369,37 +38196,30 @@
           </a:p>
         </p:txBody>
       </p:sp>
-      <p:sp>
-        <p:nvSpPr>
-          <p:cNvPr id="6" name="Rounded Rectangle 5"/>
-          <p:cNvSpPr/>
-          <p:nvPr/>
-        </p:nvSpPr>
-        <p:spPr>
-          <a:xfrm>
-            <a:off x="548640" y="2418587"/>
-            <a:ext cx="11094415" cy="347472"/>
-          </a:xfrm>
-          <a:prstGeom prst="roundRect">
-            <a:avLst>
-              <a:gd name="adj" fmla="val 12000"/>
-            </a:avLst>
-          </a:prstGeom>
-          <a:solidFill>
-            <a:srgbClr val="13294B"/>
-          </a:solidFill>
-          <a:ln>
-            <a:noFill/>
-          </a:ln>
-        </p:spPr>
-        <p:txBody>
-          <a:bodyPr rtlCol="0" anchor="ctr"/>
-          <a:lstStyle/>
-          <a:p>
-            <a:pPr algn="ctr"/>
-          </a:p>
-        </p:txBody>
-      </p:sp>
+      <p:pic>
+        <p:nvPicPr>
+          <p:cNvPr id="6" name="삽화:세산출물.svg" descr="illust_179449656464119021_1791770880.png"/>
+          <p:cNvPicPr>
+            <a:picLocks noChangeAspect="1"/>
+          </p:cNvPicPr>
+          <p:nvPr/>
+        </p:nvPicPr>
+        <p:blipFill>
+          <a:blip r:embed="rId3"/>
+          <a:stretch>
+            <a:fillRect/>
+          </a:stretch>
+        </p:blipFill>
+        <p:spPr>
+          <a:xfrm>
+            <a:off x="641100" y="1627632"/>
+            <a:ext cx="10909495" cy="4727448"/>
+          </a:xfrm>
+          <a:prstGeom prst="rect">
+            <a:avLst/>
+          </a:prstGeom>
+        </p:spPr>
+      </p:pic>
       <p:sp>
         <p:nvSpPr>
           <p:cNvPr id="7" name="TextBox 6"/>
@@ -38408,33 +38228,57 @@
         </p:nvSpPr>
         <p:spPr>
           <a:xfrm>
-            <a:off x="685800" y="2418587"/>
-            <a:ext cx="2514600" cy="347472"/>
-          </a:xfrm>
-          <a:prstGeom prst="rect">
-            <a:avLst/>
-          </a:prstGeom>
-          <a:noFill/>
-        </p:spPr>
-        <p:txBody>
-          <a:bodyPr wrap="square" anchor="ctr"/>
-          <a:lstStyle/>
-          <a:p>
-            <a:pPr algn="l">
-              <a:lnSpc>
-                <a:spcPct val="110000"/>
-              </a:lnSpc>
-            </a:pPr>
-            <a:r>
-              <a:rPr sz="1300" b="1">
-                <a:solidFill>
-                  <a:srgbClr val="FFFFFF"/>
-                </a:solidFill>
-                <a:latin typeface="맑은 고딕"/>
-                <a:ea typeface="맑은 고딕"/>
-                <a:cs typeface="맑은 고딕"/>
-              </a:rPr>
-              <a:t>업무</a:t>
+            <a:off x="3041189" y="1627632"/>
+            <a:ext cx="2836468" cy="507618"/>
+          </a:xfrm>
+          <a:prstGeom prst="rect">
+            <a:avLst/>
+          </a:prstGeom>
+          <a:noFill/>
+        </p:spPr>
+        <p:txBody>
+          <a:bodyPr wrap="square" anchor="t"/>
+          <a:lstStyle/>
+          <a:p>
+            <a:pPr algn="ctr">
+              <a:lnSpc>
+                <a:spcPct val="110000"/>
+              </a:lnSpc>
+              <a:spcAft>
+                <a:spcPts val="100"/>
+              </a:spcAft>
+            </a:pPr>
+            <a:r>
+              <a:rPr sz="1350" b="1">
+                <a:solidFill>
+                  <a:srgbClr val="13294B"/>
+                </a:solidFill>
+                <a:latin typeface="맑은 고딕"/>
+                <a:ea typeface="맑은 고딕"/>
+                <a:cs typeface="맑은 고딕"/>
+              </a:rPr>
+              <a:t>같은 틀</a:t>
+            </a:r>
+          </a:p>
+          <a:p>
+            <a:pPr algn="ctr">
+              <a:lnSpc>
+                <a:spcPct val="110000"/>
+              </a:lnSpc>
+              <a:spcAft>
+                <a:spcPts val="100"/>
+              </a:spcAft>
+            </a:pPr>
+            <a:r>
+              <a:rPr sz="1100" b="0">
+                <a:solidFill>
+                  <a:srgbClr val="556175"/>
+                </a:solidFill>
+                <a:latin typeface="맑은 고딕"/>
+                <a:ea typeface="맑은 고딕"/>
+                <a:cs typeface="맑은 고딕"/>
+              </a:rPr>
+              <a:t>목표, 스킬과 도구, 출력 계약</a:t>
             </a:r>
           </a:p>
         </p:txBody>
@@ -38447,33 +38291,36 @@
         </p:nvSpPr>
         <p:spPr>
           <a:xfrm>
-            <a:off x="3200400" y="2418587"/>
-            <a:ext cx="6248095" cy="347472"/>
-          </a:xfrm>
-          <a:prstGeom prst="rect">
-            <a:avLst/>
-          </a:prstGeom>
-          <a:noFill/>
-        </p:spPr>
-        <p:txBody>
-          <a:bodyPr wrap="square" anchor="ctr"/>
-          <a:lstStyle/>
-          <a:p>
-            <a:pPr algn="l">
-              <a:lnSpc>
-                <a:spcPct val="110000"/>
-              </a:lnSpc>
-            </a:pPr>
-            <a:r>
-              <a:rPr sz="1300" b="1">
-                <a:solidFill>
-                  <a:srgbClr val="FFFFFF"/>
-                </a:solidFill>
-                <a:latin typeface="맑은 고딕"/>
-                <a:ea typeface="맑은 고딕"/>
-                <a:cs typeface="맑은 고딕"/>
-              </a:rPr>
-              <a:t>스킬</a:t>
+            <a:off x="553824" y="3045866"/>
+            <a:ext cx="1963709" cy="337185"/>
+          </a:xfrm>
+          <a:prstGeom prst="rect">
+            <a:avLst/>
+          </a:prstGeom>
+          <a:noFill/>
+        </p:spPr>
+        <p:txBody>
+          <a:bodyPr wrap="square" anchor="t"/>
+          <a:lstStyle/>
+          <a:p>
+            <a:pPr algn="ctr">
+              <a:lnSpc>
+                <a:spcPct val="110000"/>
+              </a:lnSpc>
+              <a:spcAft>
+                <a:spcPts val="100"/>
+              </a:spcAft>
+            </a:pPr>
+            <a:r>
+              <a:rPr sz="1350" b="1">
+                <a:solidFill>
+                  <a:srgbClr val="13294B"/>
+                </a:solidFill>
+                <a:latin typeface="맑은 고딕"/>
+                <a:ea typeface="맑은 고딕"/>
+                <a:cs typeface="맑은 고딕"/>
+              </a:rPr>
+              <a:t>쿨러 성능 저하 경보</a:t>
             </a:r>
           </a:p>
         </p:txBody>
@@ -38486,65 +38333,79 @@
         </p:nvSpPr>
         <p:spPr>
           <a:xfrm>
-            <a:off x="9448495" y="2418587"/>
-            <a:ext cx="2194560" cy="347472"/>
-          </a:xfrm>
-          <a:prstGeom prst="rect">
-            <a:avLst/>
-          </a:prstGeom>
-          <a:noFill/>
-        </p:spPr>
-        <p:txBody>
-          <a:bodyPr wrap="square" anchor="ctr"/>
-          <a:lstStyle/>
-          <a:p>
-            <a:pPr algn="l">
-              <a:lnSpc>
-                <a:spcPct val="110000"/>
-              </a:lnSpc>
-            </a:pPr>
-            <a:r>
-              <a:rPr sz="1300" b="1">
-                <a:solidFill>
-                  <a:srgbClr val="FFFFFF"/>
-                </a:solidFill>
-                <a:latin typeface="맑은 고딕"/>
-                <a:ea typeface="맑은 고딕"/>
-                <a:cs typeface="맑은 고딕"/>
-              </a:rPr>
-              <a:t>산출물</a:t>
-            </a:r>
-          </a:p>
-        </p:txBody>
-      </p:sp>
-      <p:sp>
-        <p:nvSpPr>
-          <p:cNvPr id="10" name="Rounded Rectangle 9"/>
-          <p:cNvSpPr/>
-          <p:nvPr/>
-        </p:nvSpPr>
-        <p:spPr>
-          <a:xfrm>
-            <a:off x="548640" y="2852927"/>
-            <a:ext cx="11094415" cy="850392"/>
-          </a:xfrm>
-          <a:prstGeom prst="roundRect">
-            <a:avLst>
-              <a:gd name="adj" fmla="val 8000"/>
-            </a:avLst>
-          </a:prstGeom>
-          <a:solidFill>
-            <a:srgbClr val="F3F6F9"/>
-          </a:solidFill>
-          <a:ln>
-            <a:noFill/>
-          </a:ln>
-        </p:spPr>
-        <p:txBody>
-          <a:bodyPr rtlCol="0" anchor="ctr"/>
-          <a:lstStyle/>
-          <a:p>
-            <a:pPr algn="ctr"/>
+            <a:off x="553824" y="4464100"/>
+            <a:ext cx="1963709" cy="337185"/>
+          </a:xfrm>
+          <a:prstGeom prst="rect">
+            <a:avLst/>
+          </a:prstGeom>
+          <a:noFill/>
+        </p:spPr>
+        <p:txBody>
+          <a:bodyPr wrap="square" anchor="t"/>
+          <a:lstStyle/>
+          <a:p>
+            <a:pPr algn="ctr">
+              <a:lnSpc>
+                <a:spcPct val="110000"/>
+              </a:lnSpc>
+              <a:spcAft>
+                <a:spcPts val="100"/>
+              </a:spcAft>
+            </a:pPr>
+            <a:r>
+              <a:rPr sz="1350" b="1">
+                <a:solidFill>
+                  <a:srgbClr val="13294B"/>
+                </a:solidFill>
+                <a:latin typeface="맑은 고딕"/>
+                <a:ea typeface="맑은 고딕"/>
+                <a:cs typeface="맑은 고딕"/>
+              </a:rPr>
+              <a:t>정기 정비 도래</a:t>
+            </a:r>
+          </a:p>
+        </p:txBody>
+      </p:sp>
+      <p:sp>
+        <p:nvSpPr>
+          <p:cNvPr id="10" name="TextBox 9"/>
+          <p:cNvSpPr txBox="1"/>
+          <p:nvPr/>
+        </p:nvSpPr>
+        <p:spPr>
+          <a:xfrm>
+            <a:off x="553824" y="5882335"/>
+            <a:ext cx="1963709" cy="337185"/>
+          </a:xfrm>
+          <a:prstGeom prst="rect">
+            <a:avLst/>
+          </a:prstGeom>
+          <a:noFill/>
+        </p:spPr>
+        <p:txBody>
+          <a:bodyPr wrap="square" anchor="t"/>
+          <a:lstStyle/>
+          <a:p>
+            <a:pPr algn="ctr">
+              <a:lnSpc>
+                <a:spcPct val="110000"/>
+              </a:lnSpc>
+              <a:spcAft>
+                <a:spcPts val="100"/>
+              </a:spcAft>
+            </a:pPr>
+            <a:r>
+              <a:rPr sz="1350" b="1">
+                <a:solidFill>
+                  <a:srgbClr val="13294B"/>
+                </a:solidFill>
+                <a:latin typeface="맑은 고딕"/>
+                <a:ea typeface="맑은 고딕"/>
+                <a:cs typeface="맑은 고딕"/>
+              </a:rPr>
+              <a:t>예비품 재고 기준 이탈</a:t>
+            </a:r>
           </a:p>
         </p:txBody>
       </p:sp>
@@ -38556,25 +38417,28 @@
         </p:nvSpPr>
         <p:spPr>
           <a:xfrm>
-            <a:off x="685800" y="2820923"/>
-            <a:ext cx="2514600" cy="914400"/>
-          </a:xfrm>
-          <a:prstGeom prst="rect">
-            <a:avLst/>
-          </a:prstGeom>
-          <a:noFill/>
-        </p:spPr>
-        <p:txBody>
-          <a:bodyPr wrap="square" anchor="ctr"/>
-          <a:lstStyle/>
-          <a:p>
-            <a:pPr algn="l">
-              <a:lnSpc>
-                <a:spcPct val="110000"/>
-              </a:lnSpc>
-            </a:pPr>
-            <a:r>
-              <a:rPr sz="1600" b="1">
+            <a:off x="3041189" y="3022229"/>
+            <a:ext cx="2836468" cy="507618"/>
+          </a:xfrm>
+          <a:prstGeom prst="rect">
+            <a:avLst/>
+          </a:prstGeom>
+          <a:noFill/>
+        </p:spPr>
+        <p:txBody>
+          <a:bodyPr wrap="square" anchor="t"/>
+          <a:lstStyle/>
+          <a:p>
+            <a:pPr algn="ctr">
+              <a:lnSpc>
+                <a:spcPct val="110000"/>
+              </a:lnSpc>
+              <a:spcAft>
+                <a:spcPts val="100"/>
+              </a:spcAft>
+            </a:pPr>
+            <a:r>
+              <a:rPr sz="1350" b="1">
                 <a:solidFill>
                   <a:srgbClr val="13294B"/>
                 </a:solidFill>
@@ -38582,7 +38446,28 @@
                 <a:ea typeface="맑은 고딕"/>
                 <a:cs typeface="맑은 고딕"/>
               </a:rPr>
-              <a:t>쿨러 과열 경보</a:t>
+              <a:t>냉각 긴급 대응</a:t>
+            </a:r>
+          </a:p>
+          <a:p>
+            <a:pPr algn="ctr">
+              <a:lnSpc>
+                <a:spcPct val="110000"/>
+              </a:lnSpc>
+              <a:spcAft>
+                <a:spcPts val="100"/>
+              </a:spcAft>
+            </a:pPr>
+            <a:r>
+              <a:rPr sz="1100" b="0">
+                <a:solidFill>
+                  <a:srgbClr val="556175"/>
+                </a:solidFill>
+                <a:latin typeface="맑은 고딕"/>
+                <a:ea typeface="맑은 고딕"/>
+                <a:cs typeface="맑은 고딕"/>
+              </a:rPr>
+              <a:t>cooling-emergency-response</a:t>
             </a:r>
           </a:p>
         </p:txBody>
@@ -38595,33 +38480,57 @@
         </p:nvSpPr>
         <p:spPr>
           <a:xfrm>
-            <a:off x="3200400" y="2820923"/>
-            <a:ext cx="6156655" cy="914400"/>
-          </a:xfrm>
-          <a:prstGeom prst="rect">
-            <a:avLst/>
-          </a:prstGeom>
-          <a:noFill/>
-        </p:spPr>
-        <p:txBody>
-          <a:bodyPr wrap="square" anchor="ctr"/>
-          <a:lstStyle/>
-          <a:p>
-            <a:pPr algn="l">
-              <a:lnSpc>
-                <a:spcPct val="110000"/>
-              </a:lnSpc>
-            </a:pPr>
-            <a:r>
-              <a:rPr sz="1400" b="0">
-                <a:solidFill>
-                  <a:srgbClr val="1F2A3A"/>
-                </a:solidFill>
-                <a:latin typeface="맑은 고딕"/>
-                <a:ea typeface="맑은 고딕"/>
-                <a:cs typeface="맑은 고딕"/>
-              </a:rPr>
-              <a:t>cooling-emergency-response</a:t>
+            <a:off x="3041189" y="4440463"/>
+            <a:ext cx="2836468" cy="507618"/>
+          </a:xfrm>
+          <a:prstGeom prst="rect">
+            <a:avLst/>
+          </a:prstGeom>
+          <a:noFill/>
+        </p:spPr>
+        <p:txBody>
+          <a:bodyPr wrap="square" anchor="t"/>
+          <a:lstStyle/>
+          <a:p>
+            <a:pPr algn="ctr">
+              <a:lnSpc>
+                <a:spcPct val="110000"/>
+              </a:lnSpc>
+              <a:spcAft>
+                <a:spcPts val="100"/>
+              </a:spcAft>
+            </a:pPr>
+            <a:r>
+              <a:rPr sz="1350" b="1">
+                <a:solidFill>
+                  <a:srgbClr val="13294B"/>
+                </a:solidFill>
+                <a:latin typeface="맑은 고딕"/>
+                <a:ea typeface="맑은 고딕"/>
+                <a:cs typeface="맑은 고딕"/>
+              </a:rPr>
+              <a:t>정기 정비 계획</a:t>
+            </a:r>
+          </a:p>
+          <a:p>
+            <a:pPr algn="ctr">
+              <a:lnSpc>
+                <a:spcPct val="110000"/>
+              </a:lnSpc>
+              <a:spcAft>
+                <a:spcPts val="100"/>
+              </a:spcAft>
+            </a:pPr>
+            <a:r>
+              <a:rPr sz="1100" b="0">
+                <a:solidFill>
+                  <a:srgbClr val="556175"/>
+                </a:solidFill>
+                <a:latin typeface="맑은 고딕"/>
+                <a:ea typeface="맑은 고딕"/>
+                <a:cs typeface="맑은 고딕"/>
+              </a:rPr>
+              <a:t>pm-schedule-planning</a:t>
             </a:r>
           </a:p>
         </p:txBody>
@@ -38634,25 +38543,49 @@
         </p:nvSpPr>
         <p:spPr>
           <a:xfrm>
-            <a:off x="9448495" y="2820923"/>
-            <a:ext cx="2103120" cy="914400"/>
-          </a:xfrm>
-          <a:prstGeom prst="rect">
-            <a:avLst/>
-          </a:prstGeom>
-          <a:noFill/>
-        </p:spPr>
-        <p:txBody>
-          <a:bodyPr wrap="square" anchor="ctr"/>
-          <a:lstStyle/>
-          <a:p>
-            <a:pPr algn="l">
-              <a:lnSpc>
-                <a:spcPct val="110000"/>
-              </a:lnSpc>
-            </a:pPr>
-            <a:r>
-              <a:rPr sz="1250" b="1">
+            <a:off x="3041189" y="5811423"/>
+            <a:ext cx="2836468" cy="507618"/>
+          </a:xfrm>
+          <a:prstGeom prst="rect">
+            <a:avLst/>
+          </a:prstGeom>
+          <a:noFill/>
+        </p:spPr>
+        <p:txBody>
+          <a:bodyPr wrap="square" anchor="t"/>
+          <a:lstStyle/>
+          <a:p>
+            <a:pPr algn="ctr">
+              <a:lnSpc>
+                <a:spcPct val="110000"/>
+              </a:lnSpc>
+              <a:spcAft>
+                <a:spcPts val="100"/>
+              </a:spcAft>
+            </a:pPr>
+            <a:r>
+              <a:rPr sz="1350" b="1">
+                <a:solidFill>
+                  <a:srgbClr val="13294B"/>
+                </a:solidFill>
+                <a:latin typeface="맑은 고딕"/>
+                <a:ea typeface="맑은 고딕"/>
+                <a:cs typeface="맑은 고딕"/>
+              </a:rPr>
+              <a:t>예비품 구매</a:t>
+            </a:r>
+          </a:p>
+          <a:p>
+            <a:pPr algn="ctr">
+              <a:lnSpc>
+                <a:spcPct val="110000"/>
+              </a:lnSpc>
+              <a:spcAft>
+                <a:spcPts val="100"/>
+              </a:spcAft>
+            </a:pPr>
+            <a:r>
+              <a:rPr sz="1100" b="0">
                 <a:solidFill>
                   <a:srgbClr val="556175"/>
                 </a:solidFill>
@@ -38660,17 +38593,62 @@
                 <a:ea typeface="맑은 고딕"/>
                 <a:cs typeface="맑은 고딕"/>
               </a:rPr>
-              <a:t>조치 카드:</a:t>
-            </a:r>
-          </a:p>
-          <a:p>
-            <a:pPr algn="l">
-              <a:lnSpc>
-                <a:spcPct val="110000"/>
-              </a:lnSpc>
-            </a:pPr>
-            <a:r>
-              <a:rPr sz="1250" b="1">
+              <a:t>spare-purchase-planning</a:t>
+            </a:r>
+          </a:p>
+        </p:txBody>
+      </p:sp>
+      <p:sp>
+        <p:nvSpPr>
+          <p:cNvPr id="14" name="TextBox 13"/>
+          <p:cNvSpPr txBox="1"/>
+          <p:nvPr/>
+        </p:nvSpPr>
+        <p:spPr>
+          <a:xfrm>
+            <a:off x="8823221" y="2384023"/>
+            <a:ext cx="2400088" cy="507618"/>
+          </a:xfrm>
+          <a:prstGeom prst="rect">
+            <a:avLst/>
+          </a:prstGeom>
+          <a:noFill/>
+        </p:spPr>
+        <p:txBody>
+          <a:bodyPr wrap="square" anchor="t"/>
+          <a:lstStyle/>
+          <a:p>
+            <a:pPr algn="ctr">
+              <a:lnSpc>
+                <a:spcPct val="110000"/>
+              </a:lnSpc>
+              <a:spcAft>
+                <a:spcPts val="100"/>
+              </a:spcAft>
+            </a:pPr>
+            <a:r>
+              <a:rPr sz="1350" b="1">
+                <a:solidFill>
+                  <a:srgbClr val="1A6FC4"/>
+                </a:solidFill>
+                <a:latin typeface="맑은 고딕"/>
+                <a:ea typeface="맑은 고딕"/>
+                <a:cs typeface="맑은 고딕"/>
+              </a:rPr>
+              <a:t>추천안</a:t>
+            </a:r>
+          </a:p>
+          <a:p>
+            <a:pPr algn="ctr">
+              <a:lnSpc>
+                <a:spcPct val="110000"/>
+              </a:lnSpc>
+              <a:spcAft>
+                <a:spcPts val="100"/>
+              </a:spcAft>
+            </a:pPr>
+            <a:r>
+              <a:rPr sz="1100" b="0">
                 <a:solidFill>
                   <a:srgbClr val="556175"/>
                 </a:solidFill>
@@ -38685,70 +38663,63 @@
       </p:sp>
       <p:sp>
         <p:nvSpPr>
-          <p:cNvPr id="14" name="Rounded Rectangle 13"/>
-          <p:cNvSpPr/>
-          <p:nvPr/>
-        </p:nvSpPr>
-        <p:spPr>
-          <a:xfrm>
-            <a:off x="548640" y="3767327"/>
-            <a:ext cx="11094415" cy="850392"/>
-          </a:xfrm>
-          <a:prstGeom prst="roundRect">
-            <a:avLst>
-              <a:gd name="adj" fmla="val 8000"/>
-            </a:avLst>
-          </a:prstGeom>
-          <a:solidFill>
-            <a:srgbClr val="F3F6F9"/>
-          </a:solidFill>
-          <a:ln>
-            <a:noFill/>
-          </a:ln>
-        </p:spPr>
-        <p:txBody>
-          <a:bodyPr rtlCol="0" anchor="ctr"/>
-          <a:lstStyle/>
-          <a:p>
-            <a:pPr algn="ctr"/>
-          </a:p>
-        </p:txBody>
-      </p:sp>
-      <p:sp>
-        <p:nvSpPr>
           <p:cNvPr id="15" name="TextBox 14"/>
           <p:cNvSpPr txBox="1"/>
           <p:nvPr/>
         </p:nvSpPr>
         <p:spPr>
           <a:xfrm>
-            <a:off x="685800" y="3735323"/>
-            <a:ext cx="2514600" cy="914400"/>
-          </a:xfrm>
-          <a:prstGeom prst="rect">
-            <a:avLst/>
-          </a:prstGeom>
-          <a:noFill/>
-        </p:spPr>
-        <p:txBody>
-          <a:bodyPr wrap="square" anchor="ctr"/>
-          <a:lstStyle/>
-          <a:p>
-            <a:pPr algn="l">
-              <a:lnSpc>
-                <a:spcPct val="110000"/>
-              </a:lnSpc>
-            </a:pPr>
-            <a:r>
-              <a:rPr sz="1600" b="1">
-                <a:solidFill>
-                  <a:srgbClr val="13294B"/>
-                </a:solidFill>
-                <a:latin typeface="맑은 고딕"/>
-                <a:ea typeface="맑은 고딕"/>
-                <a:cs typeface="맑은 고딕"/>
-              </a:rPr>
-              <a:t>정기 정비 도래</a:t>
+            <a:off x="8823221" y="3802258"/>
+            <a:ext cx="2400088" cy="507618"/>
+          </a:xfrm>
+          <a:prstGeom prst="rect">
+            <a:avLst/>
+          </a:prstGeom>
+          <a:noFill/>
+        </p:spPr>
+        <p:txBody>
+          <a:bodyPr wrap="square" anchor="t"/>
+          <a:lstStyle/>
+          <a:p>
+            <a:pPr algn="ctr">
+              <a:lnSpc>
+                <a:spcPct val="110000"/>
+              </a:lnSpc>
+              <a:spcAft>
+                <a:spcPts val="100"/>
+              </a:spcAft>
+            </a:pPr>
+            <a:r>
+              <a:rPr sz="1350" b="1">
+                <a:solidFill>
+                  <a:srgbClr val="1A6FC4"/>
+                </a:solidFill>
+                <a:latin typeface="맑은 고딕"/>
+                <a:ea typeface="맑은 고딕"/>
+                <a:cs typeface="맑은 고딕"/>
+              </a:rPr>
+              <a:t>정비 시간</a:t>
+            </a:r>
+          </a:p>
+          <a:p>
+            <a:pPr algn="ctr">
+              <a:lnSpc>
+                <a:spcPct val="110000"/>
+              </a:lnSpc>
+              <a:spcAft>
+                <a:spcPts val="100"/>
+              </a:spcAft>
+            </a:pPr>
+            <a:r>
+              <a:rPr sz="1100" b="0">
+                <a:solidFill>
+                  <a:srgbClr val="556175"/>
+                </a:solidFill>
+                <a:latin typeface="맑은 고딕"/>
+                <a:ea typeface="맑은 고딕"/>
+                <a:cs typeface="맑은 고딕"/>
+              </a:rPr>
+              <a:t>언제 정비할 것인가</a:t>
             </a:r>
           </a:p>
         </p:txBody>
@@ -38761,248 +38732,49 @@
         </p:nvSpPr>
         <p:spPr>
           <a:xfrm>
-            <a:off x="3200400" y="3735323"/>
-            <a:ext cx="6156655" cy="914400"/>
-          </a:xfrm>
-          <a:prstGeom prst="rect">
-            <a:avLst/>
-          </a:prstGeom>
-          <a:noFill/>
-        </p:spPr>
-        <p:txBody>
-          <a:bodyPr wrap="square" anchor="ctr"/>
-          <a:lstStyle/>
-          <a:p>
-            <a:pPr algn="l">
-              <a:lnSpc>
-                <a:spcPct val="110000"/>
-              </a:lnSpc>
-            </a:pPr>
-            <a:r>
-              <a:rPr sz="1400" b="0">
-                <a:solidFill>
-                  <a:srgbClr val="1F2A3A"/>
-                </a:solidFill>
-                <a:latin typeface="맑은 고딕"/>
-                <a:ea typeface="맑은 고딕"/>
-                <a:cs typeface="맑은 고딕"/>
-              </a:rPr>
-              <a:t>pm-schedule-planning</a:t>
-            </a:r>
-          </a:p>
-        </p:txBody>
-      </p:sp>
-      <p:sp>
-        <p:nvSpPr>
-          <p:cNvPr id="17" name="TextBox 16"/>
-          <p:cNvSpPr txBox="1"/>
-          <p:nvPr/>
-        </p:nvSpPr>
-        <p:spPr>
-          <a:xfrm>
-            <a:off x="9448495" y="3735323"/>
-            <a:ext cx="2103120" cy="914400"/>
-          </a:xfrm>
-          <a:prstGeom prst="rect">
-            <a:avLst/>
-          </a:prstGeom>
-          <a:noFill/>
-        </p:spPr>
-        <p:txBody>
-          <a:bodyPr wrap="square" anchor="ctr"/>
-          <a:lstStyle/>
-          <a:p>
-            <a:pPr algn="l">
-              <a:lnSpc>
-                <a:spcPct val="110000"/>
-              </a:lnSpc>
-            </a:pPr>
-            <a:r>
-              <a:rPr sz="1250" b="1">
-                <a:solidFill>
-                  <a:srgbClr val="556175"/>
-                </a:solidFill>
-                <a:latin typeface="맑은 고딕"/>
-                <a:ea typeface="맑은 고딕"/>
-                <a:cs typeface="맑은 고딕"/>
-              </a:rPr>
-              <a:t>정비 시간 카드:</a:t>
-            </a:r>
-          </a:p>
-          <a:p>
-            <a:pPr algn="l">
-              <a:lnSpc>
-                <a:spcPct val="110000"/>
-              </a:lnSpc>
-            </a:pPr>
-            <a:r>
-              <a:rPr sz="1250" b="1">
-                <a:solidFill>
-                  <a:srgbClr val="556175"/>
-                </a:solidFill>
-                <a:latin typeface="맑은 고딕"/>
-                <a:ea typeface="맑은 고딕"/>
-                <a:cs typeface="맑은 고딕"/>
-              </a:rPr>
-              <a:t>언제 정비할 것인가</a:t>
-            </a:r>
-          </a:p>
-        </p:txBody>
-      </p:sp>
-      <p:sp>
-        <p:nvSpPr>
-          <p:cNvPr id="18" name="Rounded Rectangle 17"/>
-          <p:cNvSpPr/>
-          <p:nvPr/>
-        </p:nvSpPr>
-        <p:spPr>
-          <a:xfrm>
-            <a:off x="548640" y="4681727"/>
-            <a:ext cx="11094415" cy="850392"/>
-          </a:xfrm>
-          <a:prstGeom prst="roundRect">
-            <a:avLst>
-              <a:gd name="adj" fmla="val 8000"/>
-            </a:avLst>
-          </a:prstGeom>
-          <a:solidFill>
-            <a:srgbClr val="F3F6F9"/>
-          </a:solidFill>
-          <a:ln>
-            <a:noFill/>
-          </a:ln>
-        </p:spPr>
-        <p:txBody>
-          <a:bodyPr rtlCol="0" anchor="ctr"/>
-          <a:lstStyle/>
-          <a:p>
-            <a:pPr algn="ctr"/>
-          </a:p>
-        </p:txBody>
-      </p:sp>
-      <p:sp>
-        <p:nvSpPr>
-          <p:cNvPr id="19" name="TextBox 18"/>
-          <p:cNvSpPr txBox="1"/>
-          <p:nvPr/>
-        </p:nvSpPr>
-        <p:spPr>
-          <a:xfrm>
-            <a:off x="685800" y="4649723"/>
-            <a:ext cx="2514600" cy="914400"/>
-          </a:xfrm>
-          <a:prstGeom prst="rect">
-            <a:avLst/>
-          </a:prstGeom>
-          <a:noFill/>
-        </p:spPr>
-        <p:txBody>
-          <a:bodyPr wrap="square" anchor="ctr"/>
-          <a:lstStyle/>
-          <a:p>
-            <a:pPr algn="l">
-              <a:lnSpc>
-                <a:spcPct val="110000"/>
-              </a:lnSpc>
-            </a:pPr>
-            <a:r>
-              <a:rPr sz="1600" b="1">
-                <a:solidFill>
-                  <a:srgbClr val="13294B"/>
-                </a:solidFill>
-                <a:latin typeface="맑은 고딕"/>
-                <a:ea typeface="맑은 고딕"/>
-                <a:cs typeface="맑은 고딕"/>
-              </a:rPr>
-              <a:t>예비품 재고 기준 이탈</a:t>
-            </a:r>
-          </a:p>
-        </p:txBody>
-      </p:sp>
-      <p:sp>
-        <p:nvSpPr>
-          <p:cNvPr id="20" name="TextBox 19"/>
-          <p:cNvSpPr txBox="1"/>
-          <p:nvPr/>
-        </p:nvSpPr>
-        <p:spPr>
-          <a:xfrm>
-            <a:off x="3200400" y="4649723"/>
-            <a:ext cx="6156655" cy="914400"/>
-          </a:xfrm>
-          <a:prstGeom prst="rect">
-            <a:avLst/>
-          </a:prstGeom>
-          <a:noFill/>
-        </p:spPr>
-        <p:txBody>
-          <a:bodyPr wrap="square" anchor="ctr"/>
-          <a:lstStyle/>
-          <a:p>
-            <a:pPr algn="l">
-              <a:lnSpc>
-                <a:spcPct val="110000"/>
-              </a:lnSpc>
-            </a:pPr>
-            <a:r>
-              <a:rPr sz="1400" b="0">
-                <a:solidFill>
-                  <a:srgbClr val="1F2A3A"/>
-                </a:solidFill>
-                <a:latin typeface="맑은 고딕"/>
-                <a:ea typeface="맑은 고딕"/>
-                <a:cs typeface="맑은 고딕"/>
-              </a:rPr>
-              <a:t>spare-purchase-planning</a:t>
-            </a:r>
-          </a:p>
-        </p:txBody>
-      </p:sp>
-      <p:sp>
-        <p:nvSpPr>
-          <p:cNvPr id="21" name="TextBox 20"/>
-          <p:cNvSpPr txBox="1"/>
-          <p:nvPr/>
-        </p:nvSpPr>
-        <p:spPr>
-          <a:xfrm>
-            <a:off x="9448495" y="4649723"/>
-            <a:ext cx="2103120" cy="914400"/>
-          </a:xfrm>
-          <a:prstGeom prst="rect">
-            <a:avLst/>
-          </a:prstGeom>
-          <a:noFill/>
-        </p:spPr>
-        <p:txBody>
-          <a:bodyPr wrap="square" anchor="ctr"/>
-          <a:lstStyle/>
-          <a:p>
-            <a:pPr algn="l">
-              <a:lnSpc>
-                <a:spcPct val="110000"/>
-              </a:lnSpc>
-            </a:pPr>
-            <a:r>
-              <a:rPr sz="1250" b="1">
-                <a:solidFill>
-                  <a:srgbClr val="556175"/>
-                </a:solidFill>
-                <a:latin typeface="맑은 고딕"/>
-                <a:ea typeface="맑은 고딕"/>
-                <a:cs typeface="맑은 고딕"/>
-              </a:rPr>
-              <a:t>발주 카드:</a:t>
-            </a:r>
-          </a:p>
-          <a:p>
-            <a:pPr algn="l">
-              <a:lnSpc>
-                <a:spcPct val="110000"/>
-              </a:lnSpc>
-            </a:pPr>
-            <a:r>
-              <a:rPr sz="1250" b="1">
+            <a:off x="8823221" y="5220492"/>
+            <a:ext cx="2400088" cy="507618"/>
+          </a:xfrm>
+          <a:prstGeom prst="rect">
+            <a:avLst/>
+          </a:prstGeom>
+          <a:noFill/>
+        </p:spPr>
+        <p:txBody>
+          <a:bodyPr wrap="square" anchor="t"/>
+          <a:lstStyle/>
+          <a:p>
+            <a:pPr algn="ctr">
+              <a:lnSpc>
+                <a:spcPct val="110000"/>
+              </a:lnSpc>
+              <a:spcAft>
+                <a:spcPts val="100"/>
+              </a:spcAft>
+            </a:pPr>
+            <a:r>
+              <a:rPr sz="1350" b="1">
+                <a:solidFill>
+                  <a:srgbClr val="1A6FC4"/>
+                </a:solidFill>
+                <a:latin typeface="맑은 고딕"/>
+                <a:ea typeface="맑은 고딕"/>
+                <a:cs typeface="맑은 고딕"/>
+              </a:rPr>
+              <a:t>발주안</a:t>
+            </a:r>
+          </a:p>
+          <a:p>
+            <a:pPr algn="ctr">
+              <a:lnSpc>
+                <a:spcPct val="110000"/>
+              </a:lnSpc>
+              <a:spcAft>
+                <a:spcPts val="100"/>
+              </a:spcAft>
+            </a:pPr>
+            <a:r>
+              <a:rPr sz="1100" b="0">
                 <a:solidFill>
                   <a:srgbClr val="556175"/>
                 </a:solidFill>
@@ -40345,13 +40117,200 @@
         </p:nvSpPr>
         <p:spPr>
           <a:xfrm>
-            <a:off x="548640" y="2418587"/>
-            <a:ext cx="11094415" cy="347472"/>
+            <a:off x="548640" y="2498598"/>
+            <a:ext cx="2485567" cy="2985515"/>
           </a:xfrm>
           <a:prstGeom prst="roundRect">
             <a:avLst>
-              <a:gd name="adj" fmla="val 12000"/>
+              <a:gd name="adj" fmla="val 5000"/>
             </a:avLst>
+          </a:prstGeom>
+          <a:solidFill>
+            <a:srgbClr val="F3F6F9"/>
+          </a:solidFill>
+          <a:ln>
+            <a:noFill/>
+          </a:ln>
+        </p:spPr>
+        <p:txBody>
+          <a:bodyPr rtlCol="0" anchor="ctr"/>
+          <a:lstStyle/>
+          <a:p>
+            <a:pPr algn="ctr"/>
+          </a:p>
+        </p:txBody>
+      </p:sp>
+      <p:sp>
+        <p:nvSpPr>
+          <p:cNvPr id="7" name="Oval 6"/>
+          <p:cNvSpPr/>
+          <p:nvPr/>
+        </p:nvSpPr>
+        <p:spPr>
+          <a:xfrm>
+            <a:off x="1425663" y="2681478"/>
+            <a:ext cx="731520" cy="731520"/>
+          </a:xfrm>
+          <a:prstGeom prst="ellipse">
+            <a:avLst/>
+          </a:prstGeom>
+          <a:solidFill>
+            <a:srgbClr val="FFFFFF"/>
+          </a:solidFill>
+          <a:ln>
+            <a:noFill/>
+          </a:ln>
+        </p:spPr>
+        <p:txBody>
+          <a:bodyPr rtlCol="0" anchor="ctr"/>
+          <a:lstStyle/>
+          <a:p>
+            <a:pPr algn="ctr"/>
+          </a:p>
+        </p:txBody>
+      </p:sp>
+      <p:pic>
+        <p:nvPicPr>
+          <p:cNvPr id="8" name="아이콘:message-question" descr="message-question_13294B_1.6.png"/>
+          <p:cNvPicPr>
+            <a:picLocks noChangeAspect="1"/>
+          </p:cNvPicPr>
+          <p:nvPr/>
+        </p:nvPicPr>
+        <p:blipFill>
+          <a:blip r:embed="rId3"/>
+          <a:stretch>
+            <a:fillRect/>
+          </a:stretch>
+        </p:blipFill>
+        <p:spPr>
+          <a:xfrm>
+            <a:off x="1579283" y="2835097"/>
+            <a:ext cx="424281" cy="424281"/>
+          </a:xfrm>
+          <a:prstGeom prst="rect">
+            <a:avLst/>
+          </a:prstGeom>
+        </p:spPr>
+      </p:pic>
+      <p:sp>
+        <p:nvSpPr>
+          <p:cNvPr id="9" name="TextBox 8"/>
+          <p:cNvSpPr txBox="1"/>
+          <p:nvPr/>
+        </p:nvSpPr>
+        <p:spPr>
+          <a:xfrm>
+            <a:off x="621792" y="3486150"/>
+            <a:ext cx="2339263" cy="1924811"/>
+          </a:xfrm>
+          <a:prstGeom prst="rect">
+            <a:avLst/>
+          </a:prstGeom>
+          <a:noFill/>
+        </p:spPr>
+        <p:txBody>
+          <a:bodyPr wrap="square" anchor="t"/>
+          <a:lstStyle/>
+          <a:p>
+            <a:pPr algn="ctr">
+              <a:lnSpc>
+                <a:spcPct val="110000"/>
+              </a:lnSpc>
+              <a:spcAft>
+                <a:spcPts val="400"/>
+              </a:spcAft>
+            </a:pPr>
+            <a:r>
+              <a:rPr sz="1700" b="1">
+                <a:solidFill>
+                  <a:srgbClr val="13294B"/>
+                </a:solidFill>
+                <a:latin typeface="맑은 고딕"/>
+                <a:ea typeface="맑은 고딕"/>
+                <a:cs typeface="맑은 고딕"/>
+              </a:rPr>
+              <a:t>확인 질문과 전후 기록</a:t>
+            </a:r>
+          </a:p>
+          <a:p>
+            <a:pPr algn="ctr">
+              <a:lnSpc>
+                <a:spcPct val="110000"/>
+              </a:lnSpc>
+              <a:spcAft>
+                <a:spcPts val="400"/>
+              </a:spcAft>
+            </a:pPr>
+            <a:r>
+              <a:rPr sz="1350" b="0">
+                <a:solidFill>
+                  <a:srgbClr val="1F2A3A"/>
+                </a:solidFill>
+                <a:latin typeface="맑은 고딕"/>
+                <a:ea typeface="맑은 고딕"/>
+                <a:cs typeface="맑은 고딕"/>
+              </a:rPr>
+              <a:t>빠진 정보를 묻고</a:t>
+            </a:r>
+          </a:p>
+          <a:p>
+            <a:pPr algn="ctr">
+              <a:lnSpc>
+                <a:spcPct val="110000"/>
+              </a:lnSpc>
+              <a:spcAft>
+                <a:spcPts val="400"/>
+              </a:spcAft>
+            </a:pPr>
+            <a:r>
+              <a:rPr sz="1350" b="0">
+                <a:solidFill>
+                  <a:srgbClr val="1F2A3A"/>
+                </a:solidFill>
+                <a:latin typeface="맑은 고딕"/>
+                <a:ea typeface="맑은 고딕"/>
+                <a:cs typeface="맑은 고딕"/>
+              </a:rPr>
+              <a:t>다시 처리한 기록이</a:t>
+            </a:r>
+          </a:p>
+          <a:p>
+            <a:pPr algn="ctr">
+              <a:lnSpc>
+                <a:spcPct val="110000"/>
+              </a:lnSpc>
+              <a:spcAft>
+                <a:spcPts val="400"/>
+              </a:spcAft>
+            </a:pPr>
+            <a:r>
+              <a:rPr sz="1350" b="0">
+                <a:solidFill>
+                  <a:srgbClr val="1F2A3A"/>
+                </a:solidFill>
+                <a:latin typeface="맑은 고딕"/>
+                <a:ea typeface="맑은 고딕"/>
+                <a:cs typeface="맑은 고딕"/>
+              </a:rPr>
+              <a:t>정보 누락의 시나리오가 된다</a:t>
+            </a:r>
+          </a:p>
+        </p:txBody>
+      </p:sp>
+      <p:sp>
+        <p:nvSpPr>
+          <p:cNvPr id="10" name="Right Arrow 9"/>
+          <p:cNvSpPr/>
+          <p:nvPr/>
+        </p:nvSpPr>
+        <p:spPr>
+          <a:xfrm>
+            <a:off x="3098215" y="3854196"/>
+            <a:ext cx="256031" cy="274320"/>
+          </a:xfrm>
+          <a:prstGeom prst="rightArrow">
+            <a:avLst/>
           </a:prstGeom>
           <a:solidFill>
             <a:srgbClr val="13294B"/>
@@ -40370,135 +40329,238 @@
       </p:sp>
       <p:sp>
         <p:nvSpPr>
-          <p:cNvPr id="7" name="TextBox 6"/>
-          <p:cNvSpPr txBox="1"/>
-          <p:nvPr/>
-        </p:nvSpPr>
-        <p:spPr>
-          <a:xfrm>
-            <a:off x="685800" y="2418587"/>
-            <a:ext cx="2514600" cy="347472"/>
-          </a:xfrm>
-          <a:prstGeom prst="rect">
-            <a:avLst/>
-          </a:prstGeom>
-          <a:noFill/>
-        </p:spPr>
-        <p:txBody>
-          <a:bodyPr wrap="square" anchor="ctr"/>
-          <a:lstStyle/>
-          <a:p>
-            <a:pPr algn="l">
-              <a:lnSpc>
-                <a:spcPct val="110000"/>
-              </a:lnSpc>
-            </a:pPr>
-            <a:r>
-              <a:rPr sz="1300" b="1">
-                <a:solidFill>
-                  <a:srgbClr val="FFFFFF"/>
-                </a:solidFill>
-                <a:latin typeface="맑은 고딕"/>
-                <a:ea typeface="맑은 고딕"/>
-                <a:cs typeface="맑은 고딕"/>
-              </a:rPr>
-              <a:t>산출물</a:t>
-            </a:r>
-          </a:p>
-        </p:txBody>
-      </p:sp>
-      <p:sp>
-        <p:nvSpPr>
-          <p:cNvPr id="8" name="TextBox 7"/>
-          <p:cNvSpPr txBox="1"/>
-          <p:nvPr/>
-        </p:nvSpPr>
-        <p:spPr>
-          <a:xfrm>
-            <a:off x="3200400" y="2418587"/>
-            <a:ext cx="6248095" cy="347472"/>
-          </a:xfrm>
-          <a:prstGeom prst="rect">
-            <a:avLst/>
-          </a:prstGeom>
-          <a:noFill/>
-        </p:spPr>
-        <p:txBody>
-          <a:bodyPr wrap="square" anchor="ctr"/>
-          <a:lstStyle/>
-          <a:p>
-            <a:pPr algn="l">
-              <a:lnSpc>
-                <a:spcPct val="110000"/>
-              </a:lnSpc>
-            </a:pPr>
-            <a:r>
-              <a:rPr sz="1300" b="1">
-                <a:solidFill>
-                  <a:srgbClr val="FFFFFF"/>
-                </a:solidFill>
-                <a:latin typeface="맑은 고딕"/>
-                <a:ea typeface="맑은 고딕"/>
-                <a:cs typeface="맑은 고딕"/>
-              </a:rPr>
-              <a:t>만든 실습</a:t>
-            </a:r>
-          </a:p>
-        </p:txBody>
-      </p:sp>
-      <p:sp>
-        <p:nvSpPr>
-          <p:cNvPr id="9" name="TextBox 8"/>
-          <p:cNvSpPr txBox="1"/>
-          <p:nvPr/>
-        </p:nvSpPr>
-        <p:spPr>
-          <a:xfrm>
-            <a:off x="9448495" y="2418587"/>
-            <a:ext cx="2194560" cy="347472"/>
-          </a:xfrm>
-          <a:prstGeom prst="rect">
-            <a:avLst/>
-          </a:prstGeom>
-          <a:noFill/>
-        </p:spPr>
-        <p:txBody>
-          <a:bodyPr wrap="square" anchor="ctr"/>
-          <a:lstStyle/>
-          <a:p>
-            <a:pPr algn="l">
-              <a:lnSpc>
-                <a:spcPct val="110000"/>
-              </a:lnSpc>
-            </a:pPr>
-            <a:r>
-              <a:rPr sz="1300" b="1">
-                <a:solidFill>
-                  <a:srgbClr val="FFFFFF"/>
-                </a:solidFill>
-                <a:latin typeface="맑은 고딕"/>
-                <a:ea typeface="맑은 고딕"/>
-                <a:cs typeface="맑은 고딕"/>
-              </a:rPr>
-              <a:t>쓰이는 곳</a:t>
-            </a:r>
-          </a:p>
-        </p:txBody>
-      </p:sp>
-      <p:sp>
-        <p:nvSpPr>
-          <p:cNvPr id="10" name="Rounded Rectangle 9"/>
+          <p:cNvPr id="11" name="Rounded Rectangle 10"/>
           <p:cNvSpPr/>
           <p:nvPr/>
         </p:nvSpPr>
         <p:spPr>
           <a:xfrm>
-            <a:off x="548640" y="2852927"/>
-            <a:ext cx="11094415" cy="850392"/>
+            <a:off x="3418255" y="2498598"/>
+            <a:ext cx="2485567" cy="2985515"/>
           </a:xfrm>
           <a:prstGeom prst="roundRect">
             <a:avLst>
-              <a:gd name="adj" fmla="val 8000"/>
+              <a:gd name="adj" fmla="val 5000"/>
+            </a:avLst>
+          </a:prstGeom>
+          <a:solidFill>
+            <a:srgbClr val="E7F3FD"/>
+          </a:solidFill>
+          <a:ln w="25400">
+            <a:solidFill>
+              <a:srgbClr val="5CB8F2"/>
+            </a:solidFill>
+          </a:ln>
+        </p:spPr>
+        <p:txBody>
+          <a:bodyPr rtlCol="0" anchor="ctr"/>
+          <a:lstStyle/>
+          <a:p>
+            <a:pPr algn="ctr"/>
+          </a:p>
+        </p:txBody>
+      </p:sp>
+      <p:sp>
+        <p:nvSpPr>
+          <p:cNvPr id="12" name="Oval 11"/>
+          <p:cNvSpPr/>
+          <p:nvPr/>
+        </p:nvSpPr>
+        <p:spPr>
+          <a:xfrm>
+            <a:off x="4295279" y="2681478"/>
+            <a:ext cx="731520" cy="731520"/>
+          </a:xfrm>
+          <a:prstGeom prst="ellipse">
+            <a:avLst/>
+          </a:prstGeom>
+          <a:solidFill>
+            <a:srgbClr val="5CB8F2"/>
+          </a:solidFill>
+          <a:ln>
+            <a:noFill/>
+          </a:ln>
+        </p:spPr>
+        <p:txBody>
+          <a:bodyPr rtlCol="0" anchor="ctr"/>
+          <a:lstStyle/>
+          <a:p>
+            <a:pPr algn="ctr"/>
+          </a:p>
+        </p:txBody>
+      </p:sp>
+      <p:pic>
+        <p:nvPicPr>
+          <p:cNvPr id="13" name="아이콘:file-text" descr="file-text_13294B_1.6.png"/>
+          <p:cNvPicPr>
+            <a:picLocks noChangeAspect="1"/>
+          </p:cNvPicPr>
+          <p:nvPr/>
+        </p:nvPicPr>
+        <p:blipFill>
+          <a:blip r:embed="rId4"/>
+          <a:stretch>
+            <a:fillRect/>
+          </a:stretch>
+        </p:blipFill>
+        <p:spPr>
+          <a:xfrm>
+            <a:off x="4448898" y="2835097"/>
+            <a:ext cx="424281" cy="424281"/>
+          </a:xfrm>
+          <a:prstGeom prst="rect">
+            <a:avLst/>
+          </a:prstGeom>
+        </p:spPr>
+      </p:pic>
+      <p:sp>
+        <p:nvSpPr>
+          <p:cNvPr id="14" name="TextBox 13"/>
+          <p:cNvSpPr txBox="1"/>
+          <p:nvPr/>
+        </p:nvSpPr>
+        <p:spPr>
+          <a:xfrm>
+            <a:off x="3491407" y="3486150"/>
+            <a:ext cx="2339263" cy="1924811"/>
+          </a:xfrm>
+          <a:prstGeom prst="rect">
+            <a:avLst/>
+          </a:prstGeom>
+          <a:noFill/>
+        </p:spPr>
+        <p:txBody>
+          <a:bodyPr wrap="square" anchor="t"/>
+          <a:lstStyle/>
+          <a:p>
+            <a:pPr algn="ctr">
+              <a:lnSpc>
+                <a:spcPct val="110000"/>
+              </a:lnSpc>
+              <a:spcAft>
+                <a:spcPts val="400"/>
+              </a:spcAft>
+            </a:pPr>
+            <a:r>
+              <a:rPr sz="1700" b="1">
+                <a:solidFill>
+                  <a:srgbClr val="13294B"/>
+                </a:solidFill>
+                <a:latin typeface="맑은 고딕"/>
+                <a:ea typeface="맑은 고딕"/>
+                <a:cs typeface="맑은 고딕"/>
+              </a:rPr>
+              <a:t>spec.md와 기대 결과</a:t>
+            </a:r>
+          </a:p>
+          <a:p>
+            <a:pPr algn="ctr">
+              <a:lnSpc>
+                <a:spcPct val="110000"/>
+              </a:lnSpc>
+              <a:spcAft>
+                <a:spcPts val="400"/>
+              </a:spcAft>
+            </a:pPr>
+            <a:r>
+              <a:rPr sz="1350" b="0">
+                <a:solidFill>
+                  <a:srgbClr val="1F2A3A"/>
+                </a:solidFill>
+                <a:latin typeface="맑은 고딕"/>
+                <a:ea typeface="맑은 고딕"/>
+                <a:cs typeface="맑은 고딕"/>
+              </a:rPr>
+              <a:t>보완한 명세와</a:t>
+            </a:r>
+          </a:p>
+          <a:p>
+            <a:pPr algn="ctr">
+              <a:lnSpc>
+                <a:spcPct val="110000"/>
+              </a:lnSpc>
+              <a:spcAft>
+                <a:spcPts val="400"/>
+              </a:spcAft>
+            </a:pPr>
+            <a:r>
+              <a:rPr sz="1350" b="0">
+                <a:solidFill>
+                  <a:srgbClr val="1F2A3A"/>
+                </a:solidFill>
+                <a:latin typeface="맑은 고딕"/>
+                <a:ea typeface="맑은 고딕"/>
+                <a:cs typeface="맑은 고딕"/>
+              </a:rPr>
+              <a:t>저장한 입력 · 기대 결과가</a:t>
+            </a:r>
+          </a:p>
+          <a:p>
+            <a:pPr algn="ctr">
+              <a:lnSpc>
+                <a:spcPct val="110000"/>
+              </a:lnSpc>
+              <a:spcAft>
+                <a:spcPts val="400"/>
+              </a:spcAft>
+            </a:pPr>
+            <a:r>
+              <a:rPr sz="1350" b="0">
+                <a:solidFill>
+                  <a:srgbClr val="1F2A3A"/>
+                </a:solidFill>
+                <a:latin typeface="맑은 고딕"/>
+                <a:ea typeface="맑은 고딕"/>
+                <a:cs typeface="맑은 고딕"/>
+              </a:rPr>
+              <a:t>시나리오의 재료가 된다</a:t>
+            </a:r>
+          </a:p>
+        </p:txBody>
+      </p:sp>
+      <p:sp>
+        <p:nvSpPr>
+          <p:cNvPr id="15" name="Right Arrow 14"/>
+          <p:cNvSpPr/>
+          <p:nvPr/>
+        </p:nvSpPr>
+        <p:spPr>
+          <a:xfrm>
+            <a:off x="5967831" y="3854196"/>
+            <a:ext cx="256031" cy="274320"/>
+          </a:xfrm>
+          <a:prstGeom prst="rightArrow">
+            <a:avLst/>
+          </a:prstGeom>
+          <a:solidFill>
+            <a:srgbClr val="13294B"/>
+          </a:solidFill>
+          <a:ln>
+            <a:noFill/>
+          </a:ln>
+        </p:spPr>
+        <p:txBody>
+          <a:bodyPr rtlCol="0" anchor="ctr"/>
+          <a:lstStyle/>
+          <a:p>
+            <a:pPr algn="ctr"/>
+          </a:p>
+        </p:txBody>
+      </p:sp>
+      <p:sp>
+        <p:nvSpPr>
+          <p:cNvPr id="16" name="Rounded Rectangle 15"/>
+          <p:cNvSpPr/>
+          <p:nvPr/>
+        </p:nvSpPr>
+        <p:spPr>
+          <a:xfrm>
+            <a:off x="6287871" y="2498598"/>
+            <a:ext cx="2485567" cy="2985515"/>
+          </a:xfrm>
+          <a:prstGeom prst="roundRect">
+            <a:avLst>
+              <a:gd name="adj" fmla="val 5000"/>
             </a:avLst>
           </a:prstGeom>
           <a:solidFill>
@@ -40518,157 +40580,20 @@
       </p:sp>
       <p:sp>
         <p:nvSpPr>
-          <p:cNvPr id="11" name="TextBox 10"/>
-          <p:cNvSpPr txBox="1"/>
-          <p:nvPr/>
-        </p:nvSpPr>
-        <p:spPr>
-          <a:xfrm>
-            <a:off x="685800" y="2820923"/>
-            <a:ext cx="2514600" cy="914400"/>
-          </a:xfrm>
-          <a:prstGeom prst="rect">
-            <a:avLst/>
-          </a:prstGeom>
-          <a:noFill/>
-        </p:spPr>
-        <p:txBody>
-          <a:bodyPr wrap="square" anchor="ctr"/>
-          <a:lstStyle/>
-          <a:p>
-            <a:pPr algn="l">
-              <a:lnSpc>
-                <a:spcPct val="110000"/>
-              </a:lnSpc>
-            </a:pPr>
-            <a:r>
-              <a:rPr sz="1600" b="1">
-                <a:solidFill>
-                  <a:srgbClr val="13294B"/>
-                </a:solidFill>
-                <a:latin typeface="맑은 고딕"/>
-                <a:ea typeface="맑은 고딕"/>
-                <a:cs typeface="맑은 고딕"/>
-              </a:rPr>
-              <a:t>확인 질문과 전후 상태 기록</a:t>
-            </a:r>
-          </a:p>
-        </p:txBody>
-      </p:sp>
-      <p:sp>
-        <p:nvSpPr>
-          <p:cNvPr id="12" name="TextBox 11"/>
-          <p:cNvSpPr txBox="1"/>
-          <p:nvPr/>
-        </p:nvSpPr>
-        <p:spPr>
-          <a:xfrm>
-            <a:off x="3200400" y="2820923"/>
-            <a:ext cx="6156655" cy="914400"/>
-          </a:xfrm>
-          <a:prstGeom prst="rect">
-            <a:avLst/>
-          </a:prstGeom>
-          <a:noFill/>
-        </p:spPr>
-        <p:txBody>
-          <a:bodyPr wrap="square" anchor="ctr"/>
-          <a:lstStyle/>
-          <a:p>
-            <a:pPr algn="l">
-              <a:lnSpc>
-                <a:spcPct val="110000"/>
-              </a:lnSpc>
-            </a:pPr>
-            <a:r>
-              <a:rPr sz="1400" b="0">
-                <a:solidFill>
-                  <a:srgbClr val="1F2A3A"/>
-                </a:solidFill>
-                <a:latin typeface="맑은 고딕"/>
-                <a:ea typeface="맑은 고딕"/>
-                <a:cs typeface="맑은 고딕"/>
-              </a:rPr>
-              <a:t>빠진 정보를 묻고 다시 처리</a:t>
-            </a:r>
-          </a:p>
-        </p:txBody>
-      </p:sp>
-      <p:sp>
-        <p:nvSpPr>
-          <p:cNvPr id="13" name="TextBox 12"/>
-          <p:cNvSpPr txBox="1"/>
-          <p:nvPr/>
-        </p:nvSpPr>
-        <p:spPr>
-          <a:xfrm>
-            <a:off x="9448495" y="2820923"/>
-            <a:ext cx="2103120" cy="914400"/>
-          </a:xfrm>
-          <a:prstGeom prst="rect">
-            <a:avLst/>
-          </a:prstGeom>
-          <a:noFill/>
-        </p:spPr>
-        <p:txBody>
-          <a:bodyPr wrap="square" anchor="ctr"/>
-          <a:lstStyle/>
-          <a:p>
-            <a:pPr algn="l">
-              <a:lnSpc>
-                <a:spcPct val="110000"/>
-              </a:lnSpc>
-            </a:pPr>
-            <a:r>
-              <a:rPr sz="1250" b="1">
-                <a:solidFill>
-                  <a:srgbClr val="556175"/>
-                </a:solidFill>
-                <a:latin typeface="맑은 고딕"/>
-                <a:ea typeface="맑은 고딕"/>
-                <a:cs typeface="맑은 고딕"/>
-              </a:rPr>
-              <a:t>필수 정보 누락의</a:t>
-            </a:r>
-          </a:p>
-          <a:p>
-            <a:pPr algn="l">
-              <a:lnSpc>
-                <a:spcPct val="110000"/>
-              </a:lnSpc>
-            </a:pPr>
-            <a:r>
-              <a:rPr sz="1250" b="1">
-                <a:solidFill>
-                  <a:srgbClr val="556175"/>
-                </a:solidFill>
-                <a:latin typeface="맑은 고딕"/>
-                <a:ea typeface="맑은 고딕"/>
-                <a:cs typeface="맑은 고딕"/>
-              </a:rPr>
-              <a:t>시나리오</a:t>
-            </a:r>
-          </a:p>
-        </p:txBody>
-      </p:sp>
-      <p:sp>
-        <p:nvSpPr>
-          <p:cNvPr id="14" name="Rounded Rectangle 13"/>
+          <p:cNvPr id="17" name="Oval 16"/>
           <p:cNvSpPr/>
           <p:nvPr/>
         </p:nvSpPr>
         <p:spPr>
           <a:xfrm>
-            <a:off x="548640" y="3767327"/>
-            <a:ext cx="11094415" cy="850392"/>
-          </a:xfrm>
-          <a:prstGeom prst="roundRect">
-            <a:avLst>
-              <a:gd name="adj" fmla="val 8000"/>
-            </a:avLst>
+            <a:off x="7164895" y="2681478"/>
+            <a:ext cx="731520" cy="731520"/>
+          </a:xfrm>
+          <a:prstGeom prst="ellipse">
+            <a:avLst/>
           </a:prstGeom>
           <a:solidFill>
-            <a:srgbClr val="E7F3FD"/>
+            <a:srgbClr val="FFFFFF"/>
           </a:solidFill>
           <a:ln>
             <a:noFill/>
@@ -40682,33 +40607,60 @@
           </a:p>
         </p:txBody>
       </p:sp>
-      <p:sp>
-        <p:nvSpPr>
-          <p:cNvPr id="15" name="TextBox 14"/>
-          <p:cNvSpPr txBox="1"/>
-          <p:nvPr/>
-        </p:nvSpPr>
-        <p:spPr>
-          <a:xfrm>
-            <a:off x="685800" y="3735323"/>
-            <a:ext cx="2514600" cy="914400"/>
-          </a:xfrm>
-          <a:prstGeom prst="rect">
-            <a:avLst/>
-          </a:prstGeom>
-          <a:noFill/>
-        </p:spPr>
-        <p:txBody>
-          <a:bodyPr wrap="square" anchor="ctr"/>
-          <a:lstStyle/>
-          <a:p>
-            <a:pPr algn="l">
-              <a:lnSpc>
-                <a:spcPct val="110000"/>
-              </a:lnSpc>
-            </a:pPr>
-            <a:r>
-              <a:rPr sz="1600" b="1">
+      <p:pic>
+        <p:nvPicPr>
+          <p:cNvPr id="18" name="아이콘:list-check" descr="list-check_13294B_1.6.png"/>
+          <p:cNvPicPr>
+            <a:picLocks noChangeAspect="1"/>
+          </p:cNvPicPr>
+          <p:nvPr/>
+        </p:nvPicPr>
+        <p:blipFill>
+          <a:blip r:embed="rId5"/>
+          <a:stretch>
+            <a:fillRect/>
+          </a:stretch>
+        </p:blipFill>
+        <p:spPr>
+          <a:xfrm>
+            <a:off x="7318514" y="2835097"/>
+            <a:ext cx="424281" cy="424281"/>
+          </a:xfrm>
+          <a:prstGeom prst="rect">
+            <a:avLst/>
+          </a:prstGeom>
+        </p:spPr>
+      </p:pic>
+      <p:sp>
+        <p:nvSpPr>
+          <p:cNvPr id="19" name="TextBox 18"/>
+          <p:cNvSpPr txBox="1"/>
+          <p:nvPr/>
+        </p:nvSpPr>
+        <p:spPr>
+          <a:xfrm>
+            <a:off x="6361023" y="3486150"/>
+            <a:ext cx="2339263" cy="1924811"/>
+          </a:xfrm>
+          <a:prstGeom prst="rect">
+            <a:avLst/>
+          </a:prstGeom>
+          <a:noFill/>
+        </p:spPr>
+        <p:txBody>
+          <a:bodyPr wrap="square" anchor="t"/>
+          <a:lstStyle/>
+          <a:p>
+            <a:pPr algn="ctr">
+              <a:lnSpc>
+                <a:spcPct val="110000"/>
+              </a:lnSpc>
+              <a:spcAft>
+                <a:spcPts val="400"/>
+              </a:spcAft>
+            </a:pPr>
+            <a:r>
+              <a:rPr sz="1700" b="1">
                 <a:solidFill>
                   <a:srgbClr val="13294B"/>
                 </a:solidFill>
@@ -40716,38 +40668,20 @@
                 <a:ea typeface="맑은 고딕"/>
                 <a:cs typeface="맑은 고딕"/>
               </a:rPr>
-              <a:t>spec.md와 저장한 기대 결과</a:t>
-            </a:r>
-          </a:p>
-        </p:txBody>
-      </p:sp>
-      <p:sp>
-        <p:nvSpPr>
-          <p:cNvPr id="16" name="TextBox 15"/>
-          <p:cNvSpPr txBox="1"/>
-          <p:nvPr/>
-        </p:nvSpPr>
-        <p:spPr>
-          <a:xfrm>
-            <a:off x="3200400" y="3735323"/>
-            <a:ext cx="6156655" cy="914400"/>
-          </a:xfrm>
-          <a:prstGeom prst="rect">
-            <a:avLst/>
-          </a:prstGeom>
-          <a:noFill/>
-        </p:spPr>
-        <p:txBody>
-          <a:bodyPr wrap="square" anchor="ctr"/>
-          <a:lstStyle/>
-          <a:p>
-            <a:pPr algn="l">
-              <a:lnSpc>
-                <a:spcPct val="110000"/>
-              </a:lnSpc>
-            </a:pPr>
-            <a:r>
-              <a:rPr sz="1400" b="0">
+              <a:t>시나리오와 회귀 기록</a:t>
+            </a:r>
+          </a:p>
+          <a:p>
+            <a:pPr algn="ctr">
+              <a:lnSpc>
+                <a:spcPct val="110000"/>
+              </a:lnSpc>
+              <a:spcAft>
+                <a:spcPts val="400"/>
+              </a:spcAft>
+            </a:pPr>
+            <a:r>
+              <a:rPr sz="1350" b="0">
                 <a:solidFill>
                   <a:srgbClr val="1F2A3A"/>
                 </a:solidFill>
@@ -40755,82 +40689,96 @@
                 <a:ea typeface="맑은 고딕"/>
                 <a:cs typeface="맑은 고딕"/>
               </a:rPr>
-              <a:t>명세의 갱신</a:t>
-            </a:r>
-          </a:p>
-        </p:txBody>
-      </p:sp>
-      <p:sp>
-        <p:nvSpPr>
-          <p:cNvPr id="17" name="TextBox 16"/>
-          <p:cNvSpPr txBox="1"/>
-          <p:nvPr/>
-        </p:nvSpPr>
-        <p:spPr>
-          <a:xfrm>
-            <a:off x="9448495" y="3735323"/>
-            <a:ext cx="2103120" cy="914400"/>
-          </a:xfrm>
-          <a:prstGeom prst="rect">
-            <a:avLst/>
-          </a:prstGeom>
-          <a:noFill/>
-        </p:spPr>
-        <p:txBody>
-          <a:bodyPr wrap="square" anchor="ctr"/>
-          <a:lstStyle/>
-          <a:p>
-            <a:pPr algn="l">
-              <a:lnSpc>
-                <a:spcPct val="110000"/>
-              </a:lnSpc>
-            </a:pPr>
-            <a:r>
-              <a:rPr sz="1250" b="1">
-                <a:solidFill>
-                  <a:srgbClr val="1A6FC4"/>
-                </a:solidFill>
-                <a:latin typeface="맑은 고딕"/>
-                <a:ea typeface="맑은 고딕"/>
-                <a:cs typeface="맑은 고딕"/>
-              </a:rPr>
-              <a:t>시나리오의</a:t>
-            </a:r>
-          </a:p>
-          <a:p>
-            <a:pPr algn="l">
-              <a:lnSpc>
-                <a:spcPct val="110000"/>
-              </a:lnSpc>
-            </a:pPr>
-            <a:r>
-              <a:rPr sz="1250" b="1">
-                <a:solidFill>
-                  <a:srgbClr val="1A6FC4"/>
-                </a:solidFill>
-                <a:latin typeface="맑은 고딕"/>
-                <a:ea typeface="맑은 고딕"/>
-                <a:cs typeface="맑은 고딕"/>
-              </a:rPr>
-              <a:t>입력과 기대값</a:t>
-            </a:r>
-          </a:p>
-        </p:txBody>
-      </p:sp>
-      <p:sp>
-        <p:nvSpPr>
-          <p:cNvPr id="18" name="Rounded Rectangle 17"/>
+              <a:t>여섯 경우를 실행하고</a:t>
+            </a:r>
+          </a:p>
+          <a:p>
+            <a:pPr algn="ctr">
+              <a:lnSpc>
+                <a:spcPct val="110000"/>
+              </a:lnSpc>
+              <a:spcAft>
+                <a:spcPts val="400"/>
+              </a:spcAft>
+            </a:pPr>
+            <a:r>
+              <a:rPr sz="1350" b="0">
+                <a:solidFill>
+                  <a:srgbClr val="1F2A3A"/>
+                </a:solidFill>
+                <a:latin typeface="맑은 고딕"/>
+                <a:ea typeface="맑은 고딕"/>
+                <a:cs typeface="맑은 고딕"/>
+              </a:rPr>
+              <a:t>기존 요청까지</a:t>
+            </a:r>
+          </a:p>
+          <a:p>
+            <a:pPr algn="ctr">
+              <a:lnSpc>
+                <a:spcPct val="110000"/>
+              </a:lnSpc>
+              <a:spcAft>
+                <a:spcPts val="400"/>
+              </a:spcAft>
+            </a:pPr>
+            <a:r>
+              <a:rPr sz="1350" b="0">
+                <a:solidFill>
+                  <a:srgbClr val="1F2A3A"/>
+                </a:solidFill>
+                <a:latin typeface="맑은 고딕"/>
+                <a:ea typeface="맑은 고딕"/>
+                <a:cs typeface="맑은 고딕"/>
+              </a:rPr>
+              <a:t>다시 확인한 결과이다</a:t>
+            </a:r>
+          </a:p>
+        </p:txBody>
+      </p:sp>
+      <p:sp>
+        <p:nvSpPr>
+          <p:cNvPr id="20" name="Right Arrow 19"/>
           <p:cNvSpPr/>
           <p:nvPr/>
         </p:nvSpPr>
         <p:spPr>
           <a:xfrm>
-            <a:off x="548640" y="4681727"/>
-            <a:ext cx="11094415" cy="850392"/>
+            <a:off x="8837447" y="3854196"/>
+            <a:ext cx="256031" cy="274320"/>
+          </a:xfrm>
+          <a:prstGeom prst="rightArrow">
+            <a:avLst/>
+          </a:prstGeom>
+          <a:solidFill>
+            <a:srgbClr val="13294B"/>
+          </a:solidFill>
+          <a:ln>
+            <a:noFill/>
+          </a:ln>
+        </p:spPr>
+        <p:txBody>
+          <a:bodyPr rtlCol="0" anchor="ctr"/>
+          <a:lstStyle/>
+          <a:p>
+            <a:pPr algn="ctr"/>
+          </a:p>
+        </p:txBody>
+      </p:sp>
+      <p:sp>
+        <p:nvSpPr>
+          <p:cNvPr id="21" name="Rounded Rectangle 20"/>
+          <p:cNvSpPr/>
+          <p:nvPr/>
+        </p:nvSpPr>
+        <p:spPr>
+          <a:xfrm>
+            <a:off x="9157487" y="2498598"/>
+            <a:ext cx="2485567" cy="2985515"/>
           </a:xfrm>
           <a:prstGeom prst="roundRect">
             <a:avLst>
-              <a:gd name="adj" fmla="val 8000"/>
+              <a:gd name="adj" fmla="val 5000"/>
             </a:avLst>
           </a:prstGeom>
           <a:solidFill>
@@ -40850,31 +40798,87 @@
       </p:sp>
       <p:sp>
         <p:nvSpPr>
-          <p:cNvPr id="19" name="TextBox 18"/>
-          <p:cNvSpPr txBox="1"/>
-          <p:nvPr/>
-        </p:nvSpPr>
-        <p:spPr>
-          <a:xfrm>
-            <a:off x="685800" y="4649723"/>
-            <a:ext cx="2514600" cy="914400"/>
-          </a:xfrm>
-          <a:prstGeom prst="rect">
-            <a:avLst/>
-          </a:prstGeom>
-          <a:noFill/>
-        </p:spPr>
-        <p:txBody>
-          <a:bodyPr wrap="square" anchor="ctr"/>
-          <a:lstStyle/>
-          <a:p>
-            <a:pPr algn="l">
-              <a:lnSpc>
-                <a:spcPct val="110000"/>
-              </a:lnSpc>
-            </a:pPr>
-            <a:r>
-              <a:rPr sz="1600" b="1">
+          <p:cNvPr id="22" name="Oval 21"/>
+          <p:cNvSpPr/>
+          <p:nvPr/>
+        </p:nvSpPr>
+        <p:spPr>
+          <a:xfrm>
+            <a:off x="10034511" y="2681478"/>
+            <a:ext cx="731520" cy="731520"/>
+          </a:xfrm>
+          <a:prstGeom prst="ellipse">
+            <a:avLst/>
+          </a:prstGeom>
+          <a:solidFill>
+            <a:srgbClr val="FFFFFF"/>
+          </a:solidFill>
+          <a:ln>
+            <a:noFill/>
+          </a:ln>
+        </p:spPr>
+        <p:txBody>
+          <a:bodyPr rtlCol="0" anchor="ctr"/>
+          <a:lstStyle/>
+          <a:p>
+            <a:pPr algn="ctr"/>
+          </a:p>
+        </p:txBody>
+      </p:sp>
+      <p:pic>
+        <p:nvPicPr>
+          <p:cNvPr id="23" name="아이콘:refresh" descr="refresh_13294B_1.6.png"/>
+          <p:cNvPicPr>
+            <a:picLocks noChangeAspect="1"/>
+          </p:cNvPicPr>
+          <p:nvPr/>
+        </p:nvPicPr>
+        <p:blipFill>
+          <a:blip r:embed="rId6"/>
+          <a:stretch>
+            <a:fillRect/>
+          </a:stretch>
+        </p:blipFill>
+        <p:spPr>
+          <a:xfrm>
+            <a:off x="10188130" y="2835097"/>
+            <a:ext cx="424281" cy="424281"/>
+          </a:xfrm>
+          <a:prstGeom prst="rect">
+            <a:avLst/>
+          </a:prstGeom>
+        </p:spPr>
+      </p:pic>
+      <p:sp>
+        <p:nvSpPr>
+          <p:cNvPr id="24" name="TextBox 23"/>
+          <p:cNvSpPr txBox="1"/>
+          <p:nvPr/>
+        </p:nvSpPr>
+        <p:spPr>
+          <a:xfrm>
+            <a:off x="9230639" y="3486150"/>
+            <a:ext cx="2339263" cy="1924811"/>
+          </a:xfrm>
+          <a:prstGeom prst="rect">
+            <a:avLst/>
+          </a:prstGeom>
+          <a:noFill/>
+        </p:spPr>
+        <p:txBody>
+          <a:bodyPr wrap="square" anchor="t"/>
+          <a:lstStyle/>
+          <a:p>
+            <a:pPr algn="ctr">
+              <a:lnSpc>
+                <a:spcPct val="110000"/>
+              </a:lnSpc>
+              <a:spcAft>
+                <a:spcPts val="400"/>
+              </a:spcAft>
+            </a:pPr>
+            <a:r>
+              <a:rPr sz="1700" b="1">
                 <a:solidFill>
                   <a:srgbClr val="13294B"/>
                 </a:solidFill>
@@ -40882,38 +40886,20 @@
                 <a:ea typeface="맑은 고딕"/>
                 <a:cs typeface="맑은 고딕"/>
               </a:rPr>
-              <a:t>시나리오와 회귀 기록</a:t>
-            </a:r>
-          </a:p>
-        </p:txBody>
-      </p:sp>
-      <p:sp>
-        <p:nvSpPr>
-          <p:cNvPr id="20" name="TextBox 19"/>
-          <p:cNvSpPr txBox="1"/>
-          <p:nvPr/>
-        </p:nvSpPr>
-        <p:spPr>
-          <a:xfrm>
-            <a:off x="3200400" y="4649723"/>
-            <a:ext cx="6156655" cy="914400"/>
-          </a:xfrm>
-          <a:prstGeom prst="rect">
-            <a:avLst/>
-          </a:prstGeom>
-          <a:noFill/>
-        </p:spPr>
-        <p:txBody>
-          <a:bodyPr wrap="square" anchor="ctr"/>
-          <a:lstStyle/>
-          <a:p>
-            <a:pPr algn="l">
-              <a:lnSpc>
-                <a:spcPct val="110000"/>
-              </a:lnSpc>
-            </a:pPr>
-            <a:r>
-              <a:rPr sz="1400" b="0">
+              <a:t>다음 변경의 기준</a:t>
+            </a:r>
+          </a:p>
+          <a:p>
+            <a:pPr algn="ctr">
+              <a:lnSpc>
+                <a:spcPct val="110000"/>
+              </a:lnSpc>
+              <a:spcAft>
+                <a:spcPts val="400"/>
+              </a:spcAft>
+            </a:pPr>
+            <a:r>
+              <a:rPr sz="1350" b="0">
                 <a:solidFill>
                   <a:srgbClr val="1F2A3A"/>
                 </a:solidFill>
@@ -40921,64 +40907,49 @@
                 <a:ea typeface="맑은 고딕"/>
                 <a:cs typeface="맑은 고딕"/>
               </a:rPr>
-              <a:t>복합 · 예외 조건의 동작 검증</a:t>
-            </a:r>
-          </a:p>
-        </p:txBody>
-      </p:sp>
-      <p:sp>
-        <p:nvSpPr>
-          <p:cNvPr id="21" name="TextBox 20"/>
-          <p:cNvSpPr txBox="1"/>
-          <p:nvPr/>
-        </p:nvSpPr>
-        <p:spPr>
-          <a:xfrm>
-            <a:off x="9448495" y="4649723"/>
-            <a:ext cx="2103120" cy="914400"/>
-          </a:xfrm>
-          <a:prstGeom prst="rect">
-            <a:avLst/>
-          </a:prstGeom>
-          <a:noFill/>
-        </p:spPr>
-        <p:txBody>
-          <a:bodyPr wrap="square" anchor="ctr"/>
-          <a:lstStyle/>
-          <a:p>
-            <a:pPr algn="l">
-              <a:lnSpc>
-                <a:spcPct val="110000"/>
-              </a:lnSpc>
-            </a:pPr>
-            <a:r>
-              <a:rPr sz="1250" b="1">
-                <a:solidFill>
-                  <a:srgbClr val="556175"/>
-                </a:solidFill>
-                <a:latin typeface="맑은 고딕"/>
-                <a:ea typeface="맑은 고딕"/>
-                <a:cs typeface="맑은 고딕"/>
-              </a:rPr>
-              <a:t>다음 변경의</a:t>
-            </a:r>
-          </a:p>
-          <a:p>
-            <a:pPr algn="l">
-              <a:lnSpc>
-                <a:spcPct val="110000"/>
-              </a:lnSpc>
-            </a:pPr>
-            <a:r>
-              <a:rPr sz="1250" b="1">
-                <a:solidFill>
-                  <a:srgbClr val="556175"/>
-                </a:solidFill>
-                <a:latin typeface="맑은 고딕"/>
-                <a:ea typeface="맑은 고딕"/>
-                <a:cs typeface="맑은 고딕"/>
-              </a:rPr>
-              <a:t>회귀 시험</a:t>
+              <a:t>요구가 다시 바뀌면</a:t>
+            </a:r>
+          </a:p>
+          <a:p>
+            <a:pPr algn="ctr">
+              <a:lnSpc>
+                <a:spcPct val="110000"/>
+              </a:lnSpc>
+              <a:spcAft>
+                <a:spcPts val="400"/>
+              </a:spcAft>
+            </a:pPr>
+            <a:r>
+              <a:rPr sz="1350" b="0">
+                <a:solidFill>
+                  <a:srgbClr val="1F2A3A"/>
+                </a:solidFill>
+                <a:latin typeface="맑은 고딕"/>
+                <a:ea typeface="맑은 고딕"/>
+                <a:cs typeface="맑은 고딕"/>
+              </a:rPr>
+              <a:t>이 시나리오를</a:t>
+            </a:r>
+          </a:p>
+          <a:p>
+            <a:pPr algn="ctr">
+              <a:lnSpc>
+                <a:spcPct val="110000"/>
+              </a:lnSpc>
+              <a:spcAft>
+                <a:spcPts val="400"/>
+              </a:spcAft>
+            </a:pPr>
+            <a:r>
+              <a:rPr sz="1350" b="0">
+                <a:solidFill>
+                  <a:srgbClr val="1F2A3A"/>
+                </a:solidFill>
+                <a:latin typeface="맑은 고딕"/>
+                <a:ea typeface="맑은 고딕"/>
+                <a:cs typeface="맑은 고딕"/>
+              </a:rPr>
+              <a:t>모두 다시 실행한다</a:t>
             </a:r>
           </a:p>
         </p:txBody>
@@ -41179,7 +41150,7 @@
       </p:sp>
       <p:pic>
         <p:nvPicPr>
-          <p:cNvPr id="6" name="삽화:갈림.svg" descr="illust_6401623513390373159_1791736073.png"/>
+          <p:cNvPr id="6" name="삽화:갈림.svg" descr="illust_5263842856323075712_1791736073.png"/>
           <p:cNvPicPr>
             <a:picLocks noChangeAspect="1"/>
           </p:cNvPicPr>
@@ -42459,7 +42430,7 @@
                 <a:ea typeface="맑은 고딕"/>
                 <a:cs typeface="맑은 고딕"/>
               </a:rPr>
-              <a:t>• 조치 카드는 승인으로</a:t>
+              <a:t>• 추천안은 승인으로</a:t>
             </a:r>
           </a:p>
           <a:p>
@@ -46501,7 +46472,7 @@
                 <a:ea typeface="맑은 고딕"/>
                 <a:cs typeface="맑은 고딕"/>
               </a:rPr>
-              <a:t>에이전트가 팬 최대 운전을 추천한 시점에 유온은 그대로이며, 승인에서 결과 보고까지 다섯 가지 일이 남아 있다.</a:t>
+              <a:t>팬 최대 운전을 권하는 추천안이 나온 시점에 유온은 그대로이며, 승인에서 결과 보고까지 다섯 가지 일이 남아 있다.</a:t>
             </a:r>
           </a:p>
         </p:txBody>
@@ -46576,7 +46547,7 @@
       </p:sp>
       <p:pic>
         <p:nvPicPr>
-          <p:cNvPr id="6" name="삽화:남은일_추천뒤.svg" descr="illust_2463733771193095324_1791735769.png"/>
+          <p:cNvPr id="6" name="삽화:남은일_추천뒤.svg" descr="illust_8283606531237131610_1791735769.png"/>
           <p:cNvPicPr>
             <a:picLocks noChangeAspect="1"/>
           </p:cNvPicPr>
@@ -53605,7 +53576,7 @@
       </p:sp>
       <p:pic>
         <p:nvPicPr>
-          <p:cNvPr id="6" name="삽화:세지점.svg" descr="illust_8567374191004304732_1791736073.png"/>
+          <p:cNvPr id="6" name="삽화:세지점.svg" descr="illust_8419348159470744295_1791736073.png"/>
           <p:cNvPicPr>
             <a:picLocks noChangeAspect="1"/>
           </p:cNvPicPr>
@@ -53895,7 +53866,7 @@
                 <a:ea typeface="맑은 고딕"/>
                 <a:cs typeface="맑은 고딕"/>
               </a:rPr>
-              <a:t>한도를 넘겨 멈췄을 때</a:t>
+              <a:t>실행 시간 등의 한도를 넘겨 멈췄을 때</a:t>
             </a:r>
           </a:p>
           <a:p>

--- a/docs/교재/실전반_오프라인/06회차/실전반_오프라인_06회차.pptx
+++ b/docs/교재/실전반_오프라인/06회차/실전반_오프라인_06회차.pptx
@@ -10299,7 +10299,7 @@
       </p:sp>
       <p:pic>
         <p:nvPicPr>
-          <p:cNvPr id="6" name="삽화:두관문.svg" descr="illust_7143711520488172470_1791736073.png"/>
+          <p:cNvPr id="6" name="삽화:두관문.svg" descr="illust_675156722192751147_1791736073.png"/>
           <p:cNvPicPr>
             <a:picLocks noChangeAspect="1"/>
           </p:cNvPicPr>
@@ -11670,7 +11670,7 @@
       </p:sp>
       <p:pic>
         <p:nvPicPr>
-          <p:cNvPr id="6" name="삽화:세해석.svg" descr="illust_928805092734271264_1791736073.png"/>
+          <p:cNvPr id="6" name="삽화:세해석.svg" descr="illust_6743586766043573458_1791736073.png"/>
           <p:cNvPicPr>
             <a:picLocks noChangeAspect="1"/>
           </p:cNvPicPr>
@@ -12831,7 +12831,7 @@
       </p:sp>
       <p:pic>
         <p:nvPicPr>
-          <p:cNvPr id="6" name="삽화:명세문서.svg" descr="illust_1512623812394534611_1791736073.png"/>
+          <p:cNvPr id="6" name="삽화:명세문서.svg" descr="illust_6876362796018186040_1791736073.png"/>
           <p:cNvPicPr>
             <a:picLocks noChangeAspect="1"/>
           </p:cNvPicPr>
@@ -13342,7 +13342,7 @@
       </p:sp>
       <p:pic>
         <p:nvPicPr>
-          <p:cNvPr id="6" name="삽화:계약.svg" descr="illust_1909185994350290981_1791736073.png"/>
+          <p:cNvPr id="6" name="삽화:계약.svg" descr="illust_7352805522307368772_1791736073.png"/>
           <p:cNvPicPr>
             <a:picLocks noChangeAspect="1"/>
           </p:cNvPicPr>
@@ -18607,7 +18607,7 @@
       </p:sp>
       <p:pic>
         <p:nvPicPr>
-          <p:cNvPr id="6" name="삽화:명세와실행.svg" descr="illust_7289801345771377311_1791770361.png"/>
+          <p:cNvPr id="6" name="삽화:명세와실행.svg" descr="illust_9167402784179910572_1791770361.png"/>
           <p:cNvPicPr>
             <a:picLocks noChangeAspect="1"/>
           </p:cNvPicPr>
@@ -19778,7 +19778,7 @@
       </p:sp>
       <p:pic>
         <p:nvPicPr>
-          <p:cNvPr id="6" name="삽화:세부분.svg" descr="illust_4049484602687774924_1791770361.png"/>
+          <p:cNvPr id="6" name="삽화:세부분.svg" descr="illust_2697789422754225726_1791770361.png"/>
           <p:cNvPicPr>
             <a:picLocks noChangeAspect="1"/>
           </p:cNvPicPr>
@@ -22384,7 +22384,7 @@
       </p:sp>
       <p:pic>
         <p:nvPicPr>
-          <p:cNvPr id="6" name="삽화:회귀.svg" descr="illust_574339008930830013_1791770361.png"/>
+          <p:cNvPr id="6" name="삽화:회귀.svg" descr="illust_6047951803355692455_1791770361.png"/>
           <p:cNvPicPr>
             <a:picLocks noChangeAspect="1"/>
           </p:cNvPicPr>
@@ -29014,7 +29014,7 @@
       </p:sp>
       <p:pic>
         <p:nvPicPr>
-          <p:cNvPr id="6" name="삽화:더해진것.svg" descr="illust_3575183096368693717_1791770361.png"/>
+          <p:cNvPr id="6" name="삽화:더해진것.svg" descr="illust_8811072684959469984_1791770361.png"/>
           <p:cNvPicPr>
             <a:picLocks noChangeAspect="1"/>
           </p:cNvPicPr>
@@ -31008,7 +31008,7 @@
       </p:sp>
       <p:pic>
         <p:nvPicPr>
-          <p:cNvPr id="6" name="삽화:사건위장치.svg" descr="illust_1266081435908013750_1791770361.png"/>
+          <p:cNvPr id="6" name="삽화:사건위장치.svg" descr="illust_3497717126194413498_1791770361.png"/>
           <p:cNvPicPr>
             <a:picLocks noChangeAspect="1"/>
           </p:cNvPicPr>
@@ -32878,7 +32878,7 @@
       </p:sp>
       <p:pic>
         <p:nvPicPr>
-          <p:cNvPr id="6" name="삽화:근거자리.svg" descr="illust_1418957791228613445_1791770880.png"/>
+          <p:cNvPr id="6" name="삽화:근거자리.svg" descr="illust_8988801311457047248_1791770880.png"/>
           <p:cNvPicPr>
             <a:picLocks noChangeAspect="1"/>
           </p:cNvPicPr>
@@ -34395,7 +34395,7 @@
       </p:sp>
       <p:pic>
         <p:nvPicPr>
-          <p:cNvPr id="6" name="삽화:두문.svg" descr="illust_3057429678799473871_1791770880.png"/>
+          <p:cNvPr id="6" name="삽화:두문.svg" descr="illust_3930872526077200473_1791770880.png"/>
           <p:cNvPicPr>
             <a:picLocks noChangeAspect="1"/>
           </p:cNvPicPr>
@@ -38198,7 +38198,7 @@
       </p:sp>
       <p:pic>
         <p:nvPicPr>
-          <p:cNvPr id="6" name="삽화:세산출물.svg" descr="illust_179449656464119021_1791770880.png"/>
+          <p:cNvPr id="6" name="삽화:세산출물.svg" descr="illust_7972057898209011625_1791770880.png"/>
           <p:cNvPicPr>
             <a:picLocks noChangeAspect="1"/>
           </p:cNvPicPr>
@@ -41150,7 +41150,7 @@
       </p:sp>
       <p:pic>
         <p:nvPicPr>
-          <p:cNvPr id="6" name="삽화:갈림.svg" descr="illust_5263842856323075712_1791736073.png"/>
+          <p:cNvPr id="6" name="삽화:갈림.svg" descr="illust_1085215080502733504_1791736073.png"/>
           <p:cNvPicPr>
             <a:picLocks noChangeAspect="1"/>
           </p:cNvPicPr>
@@ -46547,7 +46547,7 @@
       </p:sp>
       <p:pic>
         <p:nvPicPr>
-          <p:cNvPr id="6" name="삽화:남은일_추천뒤.svg" descr="illust_8283606531237131610_1791735769.png"/>
+          <p:cNvPr id="6" name="삽화:남은일_추천뒤.svg" descr="illust_7930470278553303450_1791735769.png"/>
           <p:cNvPicPr>
             <a:picLocks noChangeAspect="1"/>
           </p:cNvPicPr>
@@ -49455,7 +49455,7 @@
                 <a:ea typeface="맑은 고딕"/>
                 <a:cs typeface="맑은 고딕"/>
               </a:rPr>
-              <a:t>배운 내용을 바탕으로 정답을 맞춰보세요.</a:t>
+              <a:t>배운 내용을 바탕으로 정답을 맞혀 보세요.</a:t>
             </a:r>
           </a:p>
         </p:txBody>
@@ -53576,7 +53576,7 @@
       </p:sp>
       <p:pic>
         <p:nvPicPr>
-          <p:cNvPr id="6" name="삽화:세지점.svg" descr="illust_8419348159470744295_1791736073.png"/>
+          <p:cNvPr id="6" name="삽화:세지점.svg" descr="illust_7300245264911259092_1791736073.png"/>
           <p:cNvPicPr>
             <a:picLocks noChangeAspect="1"/>
           </p:cNvPicPr>
